--- a/material-de-apoyo/Clase1_Presentacion_Java_POO.pptx
+++ b/material-de-apoyo/Clase1_Presentacion_Java_POO.pptx
@@ -3597,7 +3597,7 @@
                 </a:solidFill>
                 <a:latin typeface="Century Gothic"/>
               </a:rPr>
-              <a:t>4 pruebas en verde con </a:t>
+              <a:t>Clase </a:t>
             </a:r>
             <a:r>
               <a:rPr b="0" sz="1800">
@@ -3606,7 +3606,25 @@
                 </a:solidFill>
                 <a:latin typeface="Consolas"/>
               </a:rPr>
-              <a:t>gradle test</a:t>
+              <a:t>Tienda</a:t>
+            </a:r>
+            <a:r>
+              <a:rPr b="0" sz="1800">
+                <a:solidFill>
+                  <a:srgbClr val="FFFFFF"/>
+                </a:solidFill>
+                <a:latin typeface="Century Gothic"/>
+              </a:rPr>
+              <a:t> que imprime 4 casos con </a:t>
+            </a:r>
+            <a:r>
+              <a:rPr b="0" sz="1800">
+                <a:solidFill>
+                  <a:srgbClr val="36B5FF"/>
+                </a:solidFill>
+                <a:latin typeface="Consolas"/>
+              </a:rPr>
+              <a:t>gradle run</a:t>
             </a:r>
             <a:r>
               <a:rPr b="0" sz="1800">
@@ -3754,7 +3772,25 @@
                 </a:solidFill>
                 <a:latin typeface="Century Gothic"/>
               </a:rPr>
-              <a:t>Captura de la ejecución en verde</a:t>
+              <a:t>Captura de </a:t>
+            </a:r>
+            <a:r>
+              <a:rPr b="0" sz="1400">
+                <a:solidFill>
+                  <a:srgbClr val="36B5FF"/>
+                </a:solidFill>
+                <a:latin typeface="Consolas"/>
+              </a:rPr>
+              <a:t>gradle run</a:t>
+            </a:r>
+            <a:r>
+              <a:rPr b="0" sz="1400">
+                <a:solidFill>
+                  <a:srgbClr val="C9D6E3"/>
+                </a:solidFill>
+                <a:latin typeface="Century Gothic"/>
+              </a:rPr>
+              <a:t> con la salida</a:t>
             </a:r>
           </a:p>
         </p:txBody>
@@ -4066,7 +4102,7 @@
                 </a:solidFill>
                 <a:latin typeface="Consolas"/>
               </a:rPr>
-              <a:t>gradle test</a:t>
+              <a:t>gradle run</a:t>
             </a:r>
             <a:r>
               <a:rPr b="0" sz="1400">
@@ -4698,7 +4734,7 @@
                 </a:solidFill>
                 <a:latin typeface="Century Gothic"/>
               </a:rPr>
-              <a:t>Pruebas con JUnit</a:t>
+              <a:t>Práctica guiada</a:t>
             </a:r>
           </a:p>
           <a:p>
@@ -4710,7 +4746,7 @@
                 </a:solidFill>
                 <a:latin typeface="Century Gothic"/>
               </a:rPr>
-              <a:t>Actividad</a:t>
+              <a:t>Modificar ejemplos y leer errores</a:t>
             </a:r>
           </a:p>
         </p:txBody>
@@ -8193,7 +8229,7 @@
                 </a:solidFill>
                 <a:latin typeface="Century Gothic"/>
               </a:rPr>
-              <a:t>Cómo lo corres en tu equipo</a:t>
+              <a:t>Cómo lo corres y cómo lees un error</a:t>
             </a:r>
           </a:p>
         </p:txBody>
@@ -8433,7 +8469,7 @@
                 </a:solidFill>
                 <a:latin typeface="Century Gothic"/>
               </a:rPr>
-              <a:t>2. gradle test</a:t>
+              <a:t>2. gradle run</a:t>
             </a:r>
           </a:p>
         </p:txBody>
@@ -8468,7 +8504,7 @@
                 </a:solidFill>
                 <a:latin typeface="Century Gothic"/>
               </a:rPr>
-              <a:t>Corre las 14 pruebas</a:t>
+              <a:t>Compila y ejecuta los ejemplos</a:t>
             </a:r>
           </a:p>
         </p:txBody>
@@ -8584,7 +8620,7 @@
                 </a:solidFill>
                 <a:latin typeface="Century Gothic"/>
               </a:rPr>
-              <a:t>3. Lee el final</a:t>
+              <a:t>3. Lee la consola</a:t>
             </a:r>
           </a:p>
         </p:txBody>
@@ -8615,6 +8651,15 @@
             <a:r>
               <a:rPr b="0" sz="1400">
                 <a:solidFill>
+                  <a:srgbClr val="C9D6E3"/>
+                </a:solidFill>
+                <a:latin typeface="Century Gothic"/>
+              </a:rPr>
+              <a:t>Un título por tema y </a:t>
+            </a:r>
+            <a:r>
+              <a:rPr b="0" sz="1400">
+                <a:solidFill>
                   <a:srgbClr val="36B5FF"/>
                 </a:solidFill>
                 <a:latin typeface="Consolas"/>
@@ -8628,16 +8673,7 @@
                 </a:solidFill>
                 <a:latin typeface="Century Gothic"/>
               </a:rPr>
-              <a:t> o </a:t>
-            </a:r>
-            <a:r>
-              <a:rPr b="0" sz="1400">
-                <a:solidFill>
-                  <a:srgbClr val="36B5FF"/>
-                </a:solidFill>
-                <a:latin typeface="Consolas"/>
-              </a:rPr>
-              <a:t>FAILED</a:t>
+              <a:t> al final</a:t>
             </a:r>
           </a:p>
         </p:txBody>
@@ -8753,7 +8789,7 @@
                 </a:solidFill>
                 <a:latin typeface="Century Gothic"/>
               </a:rPr>
-              <a:t>4. gradle run</a:t>
+              <a:t>4. Si falla</a:t>
             </a:r>
           </a:p>
         </p:txBody>
@@ -8788,7 +8824,16 @@
                 </a:solidFill>
                 <a:latin typeface="Century Gothic"/>
               </a:rPr>
-              <a:t>Muestra los ejemplos en consola</a:t>
+              <a:t>Busca archivo, línea y mensaje: </a:t>
+            </a:r>
+            <a:r>
+              <a:rPr b="0" sz="1400">
+                <a:solidFill>
+                  <a:srgbClr val="36B5FF"/>
+                </a:solidFill>
+                <a:latin typeface="Consolas"/>
+              </a:rPr>
+              <a:t>Variables.java:9: error: ';' expected</a:t>
             </a:r>
           </a:p>
         </p:txBody>
@@ -8823,7 +8868,7 @@
                 </a:solidFill>
                 <a:latin typeface="Century Gothic"/>
               </a:rPr>
-              <a:t>Si una prueba falla, busca </a:t>
+              <a:t>Otro error que vas a ver: </a:t>
             </a:r>
             <a:r>
               <a:rPr b="0" sz="1600">
@@ -8832,7 +8877,7 @@
                 </a:solidFill>
                 <a:latin typeface="Consolas"/>
               </a:rPr>
-              <a:t>expected</a:t>
+              <a:t>saldo has private access in CuentaBancaria</a:t>
             </a:r>
             <a:r>
               <a:rPr b="0" sz="1600">
@@ -8841,25 +8886,7 @@
                 </a:solidFill>
                 <a:latin typeface="Century Gothic"/>
               </a:rPr>
-              <a:t> (lo que se esperaba) y </a:t>
-            </a:r>
-            <a:r>
-              <a:rPr b="0" sz="1600">
-                <a:solidFill>
-                  <a:srgbClr val="36B5FF"/>
-                </a:solidFill>
-                <a:latin typeface="Consolas"/>
-              </a:rPr>
-              <a:t>but was</a:t>
-            </a:r>
-            <a:r>
-              <a:rPr b="0" sz="1600">
-                <a:solidFill>
-                  <a:srgbClr val="C9D6E3"/>
-                </a:solidFill>
-                <a:latin typeface="Century Gothic"/>
-              </a:rPr>
-              <a:t> (lo que llegó).</a:t>
+              <a:t>. Es el encapsulamiento protegiendo el dato.</a:t>
             </a:r>
           </a:p>
         </p:txBody>

--- a/material-de-apoyo/Clase1_Presentacion_Java_POO.pptx
+++ b/material-de-apoyo/Clase1_Presentacion_Java_POO.pptx
@@ -5,18 +5,19 @@
     <p:sldMasterId id="2147483648" r:id="rId1"/>
   </p:sldMasterIdLst>
   <p:sldIdLst>
-    <p:sldId id="256" r:id="rId7"/>
-    <p:sldId id="257" r:id="rId8"/>
-    <p:sldId id="258" r:id="rId9"/>
-    <p:sldId id="259" r:id="rId10"/>
-    <p:sldId id="260" r:id="rId11"/>
-    <p:sldId id="261" r:id="rId12"/>
-    <p:sldId id="262" r:id="rId13"/>
-    <p:sldId id="263" r:id="rId14"/>
-    <p:sldId id="264" r:id="rId15"/>
-    <p:sldId id="265" r:id="rId16"/>
+    <p:sldId id="256" r:id="rId2"/>
+    <p:sldId id="257" r:id="rId3"/>
+    <p:sldId id="258" r:id="rId4"/>
+    <p:sldId id="259" r:id="rId5"/>
+    <p:sldId id="260" r:id="rId6"/>
+    <p:sldId id="261" r:id="rId7"/>
+    <p:sldId id="262" r:id="rId8"/>
+    <p:sldId id="263" r:id="rId9"/>
+    <p:sldId id="266" r:id="rId16"/>
+    <p:sldId id="264" r:id="rId10"/>
+    <p:sldId id="265" r:id="rId11"/>
   </p:sldIdLst>
-  <p:sldSz cx="12191695" cy="6858000" type="screen4x3"/>
+  <p:sldSz cx="12192000" cy="6858000"/>
   <p:notesSz cx="6858000" cy="9144000"/>
   <p:defaultTextStyle>
     <a:defPPr>
@@ -113,6 +114,22 @@
       </a:defRPr>
     </a:lvl9pPr>
   </p:defaultTextStyle>
+  <p:extLst>
+    <p:ext uri="{EFAFB233-063F-42B5-8137-9DF3F51BA10A}">
+      <p15:sldGuideLst xmlns:p15="http://schemas.microsoft.com/office/powerpoint/2012/main">
+        <p15:guide id="1" orient="horz" pos="2160">
+          <p15:clr>
+            <a:srgbClr val="A4A3A4"/>
+          </p15:clr>
+        </p15:guide>
+        <p15:guide id="2" pos="2880">
+          <p15:clr>
+            <a:srgbClr val="A4A3A4"/>
+          </p15:clr>
+        </p15:guide>
+      </p15:sldGuideLst>
+    </p:ext>
+  </p:extLst>
 </p:presentation>
 </file>
 
@@ -154,10 +171,9 @@
           <a:lstStyle/>
           <a:p>
             <a:r>
-              <a:rPr lang="en-US" smtClean="0"/>
+              <a:rPr lang="en-US"/>
               <a:t>Click to edit Master title style</a:t>
             </a:r>
-            <a:endParaRPr lang="en-US"/>
           </a:p>
         </p:txBody>
       </p:sp>
@@ -273,10 +289,9 @@
           </a:lstStyle>
           <a:p>
             <a:r>
-              <a:rPr lang="en-US" smtClean="0"/>
+              <a:rPr lang="en-US"/>
               <a:t>Click to edit Master subtitle style</a:t>
             </a:r>
-            <a:endParaRPr lang="en-US"/>
           </a:p>
         </p:txBody>
       </p:sp>
@@ -297,7 +312,7 @@
           <a:p>
             <a:fld id="{5BCAD085-E8A6-8845-BD4E-CB4CCA059FC4}" type="datetimeFigureOut">
               <a:rPr lang="en-US" smtClean="0"/>
-              <a:t>1/27/13</a:t>
+              <a:t>9/16/26</a:t>
             </a:fld>
             <a:endParaRPr lang="en-US"/>
           </a:p>
@@ -339,7 +354,7 @@
           <a:p>
             <a:fld id="{C1FF6DA9-008F-8B48-92A6-B652298478BF}" type="slidenum">
               <a:rPr lang="en-US" smtClean="0"/>
-              <a:t>‹#›</a:t>
+              <a:t>‹Nº›</a:t>
             </a:fld>
             <a:endParaRPr lang="en-US"/>
           </a:p>
@@ -391,10 +406,9 @@
           <a:lstStyle/>
           <a:p>
             <a:r>
-              <a:rPr lang="en-US" smtClean="0"/>
+              <a:rPr lang="en-US"/>
               <a:t>Click to edit Master title style</a:t>
             </a:r>
-            <a:endParaRPr lang="en-US"/>
           </a:p>
         </p:txBody>
       </p:sp>
@@ -415,38 +429,37 @@
           <a:p>
             <a:pPr lvl="0"/>
             <a:r>
-              <a:rPr lang="en-US" smtClean="0"/>
+              <a:rPr lang="en-US"/>
               <a:t>Click to edit Master text styles</a:t>
             </a:r>
           </a:p>
           <a:p>
             <a:pPr lvl="1"/>
             <a:r>
-              <a:rPr lang="en-US" smtClean="0"/>
+              <a:rPr lang="en-US"/>
               <a:t>Second level</a:t>
             </a:r>
           </a:p>
           <a:p>
             <a:pPr lvl="2"/>
             <a:r>
-              <a:rPr lang="en-US" smtClean="0"/>
+              <a:rPr lang="en-US"/>
               <a:t>Third level</a:t>
             </a:r>
           </a:p>
           <a:p>
             <a:pPr lvl="3"/>
             <a:r>
-              <a:rPr lang="en-US" smtClean="0"/>
+              <a:rPr lang="en-US"/>
               <a:t>Fourth level</a:t>
             </a:r>
           </a:p>
           <a:p>
             <a:pPr lvl="4"/>
             <a:r>
-              <a:rPr lang="en-US" smtClean="0"/>
+              <a:rPr lang="en-US"/>
               <a:t>Fifth level</a:t>
             </a:r>
-            <a:endParaRPr lang="en-US"/>
           </a:p>
         </p:txBody>
       </p:sp>
@@ -467,7 +480,7 @@
           <a:p>
             <a:fld id="{5BCAD085-E8A6-8845-BD4E-CB4CCA059FC4}" type="datetimeFigureOut">
               <a:rPr lang="en-US" smtClean="0"/>
-              <a:t>1/27/13</a:t>
+              <a:t>9/16/26</a:t>
             </a:fld>
             <a:endParaRPr lang="en-US"/>
           </a:p>
@@ -509,7 +522,7 @@
           <a:p>
             <a:fld id="{C1FF6DA9-008F-8B48-92A6-B652298478BF}" type="slidenum">
               <a:rPr lang="en-US" smtClean="0"/>
-              <a:t>‹#›</a:t>
+              <a:t>‹Nº›</a:t>
             </a:fld>
             <a:endParaRPr lang="en-US"/>
           </a:p>
@@ -566,10 +579,9 @@
           <a:lstStyle/>
           <a:p>
             <a:r>
-              <a:rPr lang="en-US" smtClean="0"/>
+              <a:rPr lang="en-US"/>
               <a:t>Click to edit Master title style</a:t>
             </a:r>
-            <a:endParaRPr lang="en-US"/>
           </a:p>
         </p:txBody>
       </p:sp>
@@ -595,38 +607,37 @@
           <a:p>
             <a:pPr lvl="0"/>
             <a:r>
-              <a:rPr lang="en-US" smtClean="0"/>
+              <a:rPr lang="en-US"/>
               <a:t>Click to edit Master text styles</a:t>
             </a:r>
           </a:p>
           <a:p>
             <a:pPr lvl="1"/>
             <a:r>
-              <a:rPr lang="en-US" smtClean="0"/>
+              <a:rPr lang="en-US"/>
               <a:t>Second level</a:t>
             </a:r>
           </a:p>
           <a:p>
             <a:pPr lvl="2"/>
             <a:r>
-              <a:rPr lang="en-US" smtClean="0"/>
+              <a:rPr lang="en-US"/>
               <a:t>Third level</a:t>
             </a:r>
           </a:p>
           <a:p>
             <a:pPr lvl="3"/>
             <a:r>
-              <a:rPr lang="en-US" smtClean="0"/>
+              <a:rPr lang="en-US"/>
               <a:t>Fourth level</a:t>
             </a:r>
           </a:p>
           <a:p>
             <a:pPr lvl="4"/>
             <a:r>
-              <a:rPr lang="en-US" smtClean="0"/>
+              <a:rPr lang="en-US"/>
               <a:t>Fifth level</a:t>
             </a:r>
-            <a:endParaRPr lang="en-US"/>
           </a:p>
         </p:txBody>
       </p:sp>
@@ -647,7 +658,7 @@
           <a:p>
             <a:fld id="{5BCAD085-E8A6-8845-BD4E-CB4CCA059FC4}" type="datetimeFigureOut">
               <a:rPr lang="en-US" smtClean="0"/>
-              <a:t>1/27/13</a:t>
+              <a:t>9/16/26</a:t>
             </a:fld>
             <a:endParaRPr lang="en-US"/>
           </a:p>
@@ -689,7 +700,7 @@
           <a:p>
             <a:fld id="{C1FF6DA9-008F-8B48-92A6-B652298478BF}" type="slidenum">
               <a:rPr lang="en-US" smtClean="0"/>
-              <a:t>‹#›</a:t>
+              <a:t>‹Nº›</a:t>
             </a:fld>
             <a:endParaRPr lang="en-US"/>
           </a:p>
@@ -741,10 +752,9 @@
           <a:lstStyle/>
           <a:p>
             <a:r>
-              <a:rPr lang="en-US" smtClean="0"/>
+              <a:rPr lang="en-US"/>
               <a:t>Click to edit Master title style</a:t>
             </a:r>
-            <a:endParaRPr lang="en-US"/>
           </a:p>
         </p:txBody>
       </p:sp>
@@ -765,38 +775,37 @@
           <a:p>
             <a:pPr lvl="0"/>
             <a:r>
-              <a:rPr lang="en-US" smtClean="0"/>
+              <a:rPr lang="en-US"/>
               <a:t>Click to edit Master text styles</a:t>
             </a:r>
           </a:p>
           <a:p>
             <a:pPr lvl="1"/>
             <a:r>
-              <a:rPr lang="en-US" smtClean="0"/>
+              <a:rPr lang="en-US"/>
               <a:t>Second level</a:t>
             </a:r>
           </a:p>
           <a:p>
             <a:pPr lvl="2"/>
             <a:r>
-              <a:rPr lang="en-US" smtClean="0"/>
+              <a:rPr lang="en-US"/>
               <a:t>Third level</a:t>
             </a:r>
           </a:p>
           <a:p>
             <a:pPr lvl="3"/>
             <a:r>
-              <a:rPr lang="en-US" smtClean="0"/>
+              <a:rPr lang="en-US"/>
               <a:t>Fourth level</a:t>
             </a:r>
           </a:p>
           <a:p>
             <a:pPr lvl="4"/>
             <a:r>
-              <a:rPr lang="en-US" smtClean="0"/>
+              <a:rPr lang="en-US"/>
               <a:t>Fifth level</a:t>
             </a:r>
-            <a:endParaRPr lang="en-US"/>
           </a:p>
         </p:txBody>
       </p:sp>
@@ -817,7 +826,7 @@
           <a:p>
             <a:fld id="{5BCAD085-E8A6-8845-BD4E-CB4CCA059FC4}" type="datetimeFigureOut">
               <a:rPr lang="en-US" smtClean="0"/>
-              <a:t>1/27/13</a:t>
+              <a:t>9/16/26</a:t>
             </a:fld>
             <a:endParaRPr lang="en-US"/>
           </a:p>
@@ -859,7 +868,7 @@
           <a:p>
             <a:fld id="{C1FF6DA9-008F-8B48-92A6-B652298478BF}" type="slidenum">
               <a:rPr lang="en-US" smtClean="0"/>
-              <a:t>‹#›</a:t>
+              <a:t>‹Nº›</a:t>
             </a:fld>
             <a:endParaRPr lang="en-US"/>
           </a:p>
@@ -920,10 +929,9 @@
           </a:lstStyle>
           <a:p>
             <a:r>
-              <a:rPr lang="en-US" smtClean="0"/>
+              <a:rPr lang="en-US"/>
               <a:t>Click to edit Master title style</a:t>
             </a:r>
-            <a:endParaRPr lang="en-US"/>
           </a:p>
         </p:txBody>
       </p:sp>
@@ -1040,7 +1048,7 @@
           <a:p>
             <a:pPr lvl="0"/>
             <a:r>
-              <a:rPr lang="en-US" smtClean="0"/>
+              <a:rPr lang="en-US"/>
               <a:t>Click to edit Master text styles</a:t>
             </a:r>
           </a:p>
@@ -1063,7 +1071,7 @@
           <a:p>
             <a:fld id="{5BCAD085-E8A6-8845-BD4E-CB4CCA059FC4}" type="datetimeFigureOut">
               <a:rPr lang="en-US" smtClean="0"/>
-              <a:t>1/27/13</a:t>
+              <a:t>9/16/26</a:t>
             </a:fld>
             <a:endParaRPr lang="en-US"/>
           </a:p>
@@ -1105,7 +1113,7 @@
           <a:p>
             <a:fld id="{C1FF6DA9-008F-8B48-92A6-B652298478BF}" type="slidenum">
               <a:rPr lang="en-US" smtClean="0"/>
-              <a:t>‹#›</a:t>
+              <a:t>‹Nº›</a:t>
             </a:fld>
             <a:endParaRPr lang="en-US"/>
           </a:p>
@@ -1157,10 +1165,9 @@
           <a:lstStyle/>
           <a:p>
             <a:r>
-              <a:rPr lang="en-US" smtClean="0"/>
+              <a:rPr lang="en-US"/>
               <a:t>Click to edit Master title style</a:t>
             </a:r>
-            <a:endParaRPr lang="en-US"/>
           </a:p>
         </p:txBody>
       </p:sp>
@@ -1214,38 +1221,37 @@
           <a:p>
             <a:pPr lvl="0"/>
             <a:r>
-              <a:rPr lang="en-US" smtClean="0"/>
+              <a:rPr lang="en-US"/>
               <a:t>Click to edit Master text styles</a:t>
             </a:r>
           </a:p>
           <a:p>
             <a:pPr lvl="1"/>
             <a:r>
-              <a:rPr lang="en-US" smtClean="0"/>
+              <a:rPr lang="en-US"/>
               <a:t>Second level</a:t>
             </a:r>
           </a:p>
           <a:p>
             <a:pPr lvl="2"/>
             <a:r>
-              <a:rPr lang="en-US" smtClean="0"/>
+              <a:rPr lang="en-US"/>
               <a:t>Third level</a:t>
             </a:r>
           </a:p>
           <a:p>
             <a:pPr lvl="3"/>
             <a:r>
-              <a:rPr lang="en-US" smtClean="0"/>
+              <a:rPr lang="en-US"/>
               <a:t>Fourth level</a:t>
             </a:r>
           </a:p>
           <a:p>
             <a:pPr lvl="4"/>
             <a:r>
-              <a:rPr lang="en-US" smtClean="0"/>
+              <a:rPr lang="en-US"/>
               <a:t>Fifth level</a:t>
             </a:r>
-            <a:endParaRPr lang="en-US"/>
           </a:p>
         </p:txBody>
       </p:sp>
@@ -1299,38 +1305,37 @@
           <a:p>
             <a:pPr lvl="0"/>
             <a:r>
-              <a:rPr lang="en-US" smtClean="0"/>
+              <a:rPr lang="en-US"/>
               <a:t>Click to edit Master text styles</a:t>
             </a:r>
           </a:p>
           <a:p>
             <a:pPr lvl="1"/>
             <a:r>
-              <a:rPr lang="en-US" smtClean="0"/>
+              <a:rPr lang="en-US"/>
               <a:t>Second level</a:t>
             </a:r>
           </a:p>
           <a:p>
             <a:pPr lvl="2"/>
             <a:r>
-              <a:rPr lang="en-US" smtClean="0"/>
+              <a:rPr lang="en-US"/>
               <a:t>Third level</a:t>
             </a:r>
           </a:p>
           <a:p>
             <a:pPr lvl="3"/>
             <a:r>
-              <a:rPr lang="en-US" smtClean="0"/>
+              <a:rPr lang="en-US"/>
               <a:t>Fourth level</a:t>
             </a:r>
           </a:p>
           <a:p>
             <a:pPr lvl="4"/>
             <a:r>
-              <a:rPr lang="en-US" smtClean="0"/>
+              <a:rPr lang="en-US"/>
               <a:t>Fifth level</a:t>
             </a:r>
-            <a:endParaRPr lang="en-US"/>
           </a:p>
         </p:txBody>
       </p:sp>
@@ -1351,7 +1356,7 @@
           <a:p>
             <a:fld id="{5BCAD085-E8A6-8845-BD4E-CB4CCA059FC4}" type="datetimeFigureOut">
               <a:rPr lang="en-US" smtClean="0"/>
-              <a:t>1/27/13</a:t>
+              <a:t>9/16/26</a:t>
             </a:fld>
             <a:endParaRPr lang="en-US"/>
           </a:p>
@@ -1393,7 +1398,7 @@
           <a:p>
             <a:fld id="{C1FF6DA9-008F-8B48-92A6-B652298478BF}" type="slidenum">
               <a:rPr lang="en-US" smtClean="0"/>
-              <a:t>‹#›</a:t>
+              <a:t>‹Nº›</a:t>
             </a:fld>
             <a:endParaRPr lang="en-US"/>
           </a:p>
@@ -1449,10 +1454,9 @@
           </a:lstStyle>
           <a:p>
             <a:r>
-              <a:rPr lang="en-US" smtClean="0"/>
+              <a:rPr lang="en-US"/>
               <a:t>Click to edit Master title style</a:t>
             </a:r>
-            <a:endParaRPr lang="en-US"/>
           </a:p>
         </p:txBody>
       </p:sp>
@@ -1515,7 +1519,7 @@
           <a:p>
             <a:pPr lvl="0"/>
             <a:r>
-              <a:rPr lang="en-US" smtClean="0"/>
+              <a:rPr lang="en-US"/>
               <a:t>Click to edit Master text styles</a:t>
             </a:r>
           </a:p>
@@ -1571,38 +1575,37 @@
           <a:p>
             <a:pPr lvl="0"/>
             <a:r>
-              <a:rPr lang="en-US" smtClean="0"/>
+              <a:rPr lang="en-US"/>
               <a:t>Click to edit Master text styles</a:t>
             </a:r>
           </a:p>
           <a:p>
             <a:pPr lvl="1"/>
             <a:r>
-              <a:rPr lang="en-US" smtClean="0"/>
+              <a:rPr lang="en-US"/>
               <a:t>Second level</a:t>
             </a:r>
           </a:p>
           <a:p>
             <a:pPr lvl="2"/>
             <a:r>
-              <a:rPr lang="en-US" smtClean="0"/>
+              <a:rPr lang="en-US"/>
               <a:t>Third level</a:t>
             </a:r>
           </a:p>
           <a:p>
             <a:pPr lvl="3"/>
             <a:r>
-              <a:rPr lang="en-US" smtClean="0"/>
+              <a:rPr lang="en-US"/>
               <a:t>Fourth level</a:t>
             </a:r>
           </a:p>
           <a:p>
             <a:pPr lvl="4"/>
             <a:r>
-              <a:rPr lang="en-US" smtClean="0"/>
+              <a:rPr lang="en-US"/>
               <a:t>Fifth level</a:t>
             </a:r>
-            <a:endParaRPr lang="en-US"/>
           </a:p>
         </p:txBody>
       </p:sp>
@@ -1665,7 +1668,7 @@
           <a:p>
             <a:pPr lvl="0"/>
             <a:r>
-              <a:rPr lang="en-US" smtClean="0"/>
+              <a:rPr lang="en-US"/>
               <a:t>Click to edit Master text styles</a:t>
             </a:r>
           </a:p>
@@ -1721,38 +1724,37 @@
           <a:p>
             <a:pPr lvl="0"/>
             <a:r>
-              <a:rPr lang="en-US" smtClean="0"/>
+              <a:rPr lang="en-US"/>
               <a:t>Click to edit Master text styles</a:t>
             </a:r>
           </a:p>
           <a:p>
             <a:pPr lvl="1"/>
             <a:r>
-              <a:rPr lang="en-US" smtClean="0"/>
+              <a:rPr lang="en-US"/>
               <a:t>Second level</a:t>
             </a:r>
           </a:p>
           <a:p>
             <a:pPr lvl="2"/>
             <a:r>
-              <a:rPr lang="en-US" smtClean="0"/>
+              <a:rPr lang="en-US"/>
               <a:t>Third level</a:t>
             </a:r>
           </a:p>
           <a:p>
             <a:pPr lvl="3"/>
             <a:r>
-              <a:rPr lang="en-US" smtClean="0"/>
+              <a:rPr lang="en-US"/>
               <a:t>Fourth level</a:t>
             </a:r>
           </a:p>
           <a:p>
             <a:pPr lvl="4"/>
             <a:r>
-              <a:rPr lang="en-US" smtClean="0"/>
+              <a:rPr lang="en-US"/>
               <a:t>Fifth level</a:t>
             </a:r>
-            <a:endParaRPr lang="en-US"/>
           </a:p>
         </p:txBody>
       </p:sp>
@@ -1773,7 +1775,7 @@
           <a:p>
             <a:fld id="{5BCAD085-E8A6-8845-BD4E-CB4CCA059FC4}" type="datetimeFigureOut">
               <a:rPr lang="en-US" smtClean="0"/>
-              <a:t>1/27/13</a:t>
+              <a:t>9/16/26</a:t>
             </a:fld>
             <a:endParaRPr lang="en-US"/>
           </a:p>
@@ -1815,7 +1817,7 @@
           <a:p>
             <a:fld id="{C1FF6DA9-008F-8B48-92A6-B652298478BF}" type="slidenum">
               <a:rPr lang="en-US" smtClean="0"/>
-              <a:t>‹#›</a:t>
+              <a:t>‹Nº›</a:t>
             </a:fld>
             <a:endParaRPr lang="en-US"/>
           </a:p>
@@ -1867,10 +1869,9 @@
           <a:lstStyle/>
           <a:p>
             <a:r>
-              <a:rPr lang="en-US" smtClean="0"/>
+              <a:rPr lang="en-US"/>
               <a:t>Click to edit Master title style</a:t>
             </a:r>
-            <a:endParaRPr lang="en-US"/>
           </a:p>
         </p:txBody>
       </p:sp>
@@ -1891,7 +1892,7 @@
           <a:p>
             <a:fld id="{5BCAD085-E8A6-8845-BD4E-CB4CCA059FC4}" type="datetimeFigureOut">
               <a:rPr lang="en-US" smtClean="0"/>
-              <a:t>1/27/13</a:t>
+              <a:t>9/16/26</a:t>
             </a:fld>
             <a:endParaRPr lang="en-US"/>
           </a:p>
@@ -1933,7 +1934,7 @@
           <a:p>
             <a:fld id="{C1FF6DA9-008F-8B48-92A6-B652298478BF}" type="slidenum">
               <a:rPr lang="en-US" smtClean="0"/>
-              <a:t>‹#›</a:t>
+              <a:t>‹Nº›</a:t>
             </a:fld>
             <a:endParaRPr lang="en-US"/>
           </a:p>
@@ -1986,7 +1987,7 @@
           <a:p>
             <a:fld id="{5BCAD085-E8A6-8845-BD4E-CB4CCA059FC4}" type="datetimeFigureOut">
               <a:rPr lang="en-US" smtClean="0"/>
-              <a:t>1/27/13</a:t>
+              <a:t>9/16/26</a:t>
             </a:fld>
             <a:endParaRPr lang="en-US"/>
           </a:p>
@@ -2028,7 +2029,7 @@
           <a:p>
             <a:fld id="{C1FF6DA9-008F-8B48-92A6-B652298478BF}" type="slidenum">
               <a:rPr lang="en-US" smtClean="0"/>
-              <a:t>‹#›</a:t>
+              <a:t>‹Nº›</a:t>
             </a:fld>
             <a:endParaRPr lang="en-US"/>
           </a:p>
@@ -2089,10 +2090,9 @@
           </a:lstStyle>
           <a:p>
             <a:r>
-              <a:rPr lang="en-US" smtClean="0"/>
+              <a:rPr lang="en-US"/>
               <a:t>Click to edit Master title style</a:t>
             </a:r>
-            <a:endParaRPr lang="en-US"/>
           </a:p>
         </p:txBody>
       </p:sp>
@@ -2146,38 +2146,37 @@
           <a:p>
             <a:pPr lvl="0"/>
             <a:r>
-              <a:rPr lang="en-US" smtClean="0"/>
+              <a:rPr lang="en-US"/>
               <a:t>Click to edit Master text styles</a:t>
             </a:r>
           </a:p>
           <a:p>
             <a:pPr lvl="1"/>
             <a:r>
-              <a:rPr lang="en-US" smtClean="0"/>
+              <a:rPr lang="en-US"/>
               <a:t>Second level</a:t>
             </a:r>
           </a:p>
           <a:p>
             <a:pPr lvl="2"/>
             <a:r>
-              <a:rPr lang="en-US" smtClean="0"/>
+              <a:rPr lang="en-US"/>
               <a:t>Third level</a:t>
             </a:r>
           </a:p>
           <a:p>
             <a:pPr lvl="3"/>
             <a:r>
-              <a:rPr lang="en-US" smtClean="0"/>
+              <a:rPr lang="en-US"/>
               <a:t>Fourth level</a:t>
             </a:r>
           </a:p>
           <a:p>
             <a:pPr lvl="4"/>
             <a:r>
-              <a:rPr lang="en-US" smtClean="0"/>
+              <a:rPr lang="en-US"/>
               <a:t>Fifth level</a:t>
             </a:r>
-            <a:endParaRPr lang="en-US"/>
           </a:p>
         </p:txBody>
       </p:sp>
@@ -2240,7 +2239,7 @@
           <a:p>
             <a:pPr lvl="0"/>
             <a:r>
-              <a:rPr lang="en-US" smtClean="0"/>
+              <a:rPr lang="en-US"/>
               <a:t>Click to edit Master text styles</a:t>
             </a:r>
           </a:p>
@@ -2263,7 +2262,7 @@
           <a:p>
             <a:fld id="{5BCAD085-E8A6-8845-BD4E-CB4CCA059FC4}" type="datetimeFigureOut">
               <a:rPr lang="en-US" smtClean="0"/>
-              <a:t>1/27/13</a:t>
+              <a:t>9/16/26</a:t>
             </a:fld>
             <a:endParaRPr lang="en-US"/>
           </a:p>
@@ -2305,7 +2304,7 @@
           <a:p>
             <a:fld id="{C1FF6DA9-008F-8B48-92A6-B652298478BF}" type="slidenum">
               <a:rPr lang="en-US" smtClean="0"/>
-              <a:t>‹#›</a:t>
+              <a:t>‹Nº›</a:t>
             </a:fld>
             <a:endParaRPr lang="en-US"/>
           </a:p>
@@ -2366,10 +2365,9 @@
           </a:lstStyle>
           <a:p>
             <a:r>
-              <a:rPr lang="en-US" smtClean="0"/>
+              <a:rPr lang="en-US"/>
               <a:t>Click to edit Master title style</a:t>
             </a:r>
-            <a:endParaRPr lang="en-US"/>
           </a:p>
         </p:txBody>
       </p:sp>
@@ -2493,7 +2491,7 @@
           <a:p>
             <a:pPr lvl="0"/>
             <a:r>
-              <a:rPr lang="en-US" smtClean="0"/>
+              <a:rPr lang="en-US"/>
               <a:t>Click to edit Master text styles</a:t>
             </a:r>
           </a:p>
@@ -2516,7 +2514,7 @@
           <a:p>
             <a:fld id="{5BCAD085-E8A6-8845-BD4E-CB4CCA059FC4}" type="datetimeFigureOut">
               <a:rPr lang="en-US" smtClean="0"/>
-              <a:t>1/27/13</a:t>
+              <a:t>9/16/26</a:t>
             </a:fld>
             <a:endParaRPr lang="en-US"/>
           </a:p>
@@ -2558,7 +2556,7 @@
           <a:p>
             <a:fld id="{C1FF6DA9-008F-8B48-92A6-B652298478BF}" type="slidenum">
               <a:rPr lang="en-US" smtClean="0"/>
-              <a:t>‹#›</a:t>
+              <a:t>‹Nº›</a:t>
             </a:fld>
             <a:endParaRPr lang="en-US"/>
           </a:p>
@@ -2625,10 +2623,9 @@
           <a:lstStyle/>
           <a:p>
             <a:r>
-              <a:rPr lang="en-US" smtClean="0"/>
+              <a:rPr lang="en-US"/>
               <a:t>Click to edit Master title style</a:t>
             </a:r>
-            <a:endParaRPr lang="en-US"/>
           </a:p>
         </p:txBody>
       </p:sp>
@@ -2659,38 +2656,37 @@
           <a:p>
             <a:pPr lvl="0"/>
             <a:r>
-              <a:rPr lang="en-US" smtClean="0"/>
+              <a:rPr lang="en-US"/>
               <a:t>Click to edit Master text styles</a:t>
             </a:r>
           </a:p>
           <a:p>
             <a:pPr lvl="1"/>
             <a:r>
-              <a:rPr lang="en-US" smtClean="0"/>
+              <a:rPr lang="en-US"/>
               <a:t>Second level</a:t>
             </a:r>
           </a:p>
           <a:p>
             <a:pPr lvl="2"/>
             <a:r>
-              <a:rPr lang="en-US" smtClean="0"/>
+              <a:rPr lang="en-US"/>
               <a:t>Third level</a:t>
             </a:r>
           </a:p>
           <a:p>
             <a:pPr lvl="3"/>
             <a:r>
-              <a:rPr lang="en-US" smtClean="0"/>
+              <a:rPr lang="en-US"/>
               <a:t>Fourth level</a:t>
             </a:r>
           </a:p>
           <a:p>
             <a:pPr lvl="4"/>
             <a:r>
-              <a:rPr lang="en-US" smtClean="0"/>
+              <a:rPr lang="en-US"/>
               <a:t>Fifth level</a:t>
             </a:r>
-            <a:endParaRPr lang="en-US"/>
           </a:p>
         </p:txBody>
       </p:sp>
@@ -2729,7 +2725,7 @@
           <a:p>
             <a:fld id="{5BCAD085-E8A6-8845-BD4E-CB4CCA059FC4}" type="datetimeFigureOut">
               <a:rPr lang="en-US" smtClean="0"/>
-              <a:t>1/27/13</a:t>
+              <a:t>9/16/26</a:t>
             </a:fld>
             <a:endParaRPr lang="en-US"/>
           </a:p>
@@ -2807,7 +2803,7 @@
           <a:p>
             <a:fld id="{C1FF6DA9-008F-8B48-92A6-B652298478BF}" type="slidenum">
               <a:rPr lang="en-US" smtClean="0"/>
-              <a:t>‹#›</a:t>
+              <a:t>‹Nº›</a:t>
             </a:fld>
             <a:endParaRPr lang="en-US"/>
           </a:p>
@@ -3088,6 +3084,809 @@
 </file>
 
 <file path=ppt/slides/slide1.xml><?xml version="1.0" encoding="utf-8"?>
+<p:sld xmlns:a="http://schemas.openxmlformats.org/drawingml/2006/main" xmlns:r="http://schemas.openxmlformats.org/officeDocument/2006/relationships" xmlns:p="http://schemas.openxmlformats.org/presentationml/2006/main">
+  <p:cSld>
+    <p:bg>
+      <p:bgPr>
+        <a:solidFill>
+          <a:srgbClr val="06142C"/>
+        </a:solidFill>
+        <a:effectLst/>
+      </p:bgPr>
+    </p:bg>
+    <p:spTree>
+      <p:nvGrpSpPr>
+        <p:cNvPr id="1" name=""/>
+        <p:cNvGrpSpPr/>
+        <p:nvPr/>
+      </p:nvGrpSpPr>
+      <p:grpSpPr>
+        <a:xfrm>
+          <a:off x="0" y="0"/>
+          <a:ext cx="0" cy="0"/>
+          <a:chOff x="0" y="0"/>
+          <a:chExt cx="0" cy="0"/>
+        </a:xfrm>
+      </p:grpSpPr>
+      <p:sp>
+        <p:nvSpPr>
+          <p:cNvPr id="2" name="Rectangle 1"/>
+          <p:cNvSpPr/>
+          <p:nvPr/>
+        </p:nvSpPr>
+        <p:spPr>
+          <a:xfrm>
+            <a:off x="0" y="0"/>
+            <a:ext cx="228600" cy="6858000"/>
+          </a:xfrm>
+          <a:prstGeom prst="rect">
+            <a:avLst/>
+          </a:prstGeom>
+          <a:solidFill>
+            <a:srgbClr val="36B5FF"/>
+          </a:solidFill>
+          <a:ln>
+            <a:noFill/>
+          </a:ln>
+        </p:spPr>
+        <p:style>
+          <a:lnRef idx="1">
+            <a:schemeClr val="accent1"/>
+          </a:lnRef>
+          <a:fillRef idx="3">
+            <a:schemeClr val="accent1"/>
+          </a:fillRef>
+          <a:effectRef idx="2">
+            <a:schemeClr val="accent1"/>
+          </a:effectRef>
+          <a:fontRef idx="minor">
+            <a:schemeClr val="lt1"/>
+          </a:fontRef>
+        </p:style>
+        <p:txBody>
+          <a:bodyPr rtlCol="0" anchor="ctr"/>
+          <a:lstStyle/>
+          <a:p>
+            <a:pPr algn="ctr"/>
+            <a:endParaRPr/>
+          </a:p>
+        </p:txBody>
+      </p:sp>
+      <p:sp>
+        <p:nvSpPr>
+          <p:cNvPr id="3" name="Rounded Rectangle 2"/>
+          <p:cNvSpPr/>
+          <p:nvPr/>
+        </p:nvSpPr>
+        <p:spPr>
+          <a:xfrm>
+            <a:off x="914400" y="1737360"/>
+            <a:ext cx="1243584" cy="329184"/>
+          </a:xfrm>
+          <a:prstGeom prst="roundRect">
+            <a:avLst>
+              <a:gd name="adj" fmla="val 50000"/>
+            </a:avLst>
+          </a:prstGeom>
+          <a:solidFill>
+            <a:srgbClr val="0072BC"/>
+          </a:solidFill>
+          <a:ln>
+            <a:noFill/>
+          </a:ln>
+        </p:spPr>
+        <p:style>
+          <a:lnRef idx="1">
+            <a:schemeClr val="accent1"/>
+          </a:lnRef>
+          <a:fillRef idx="3">
+            <a:schemeClr val="accent1"/>
+          </a:fillRef>
+          <a:effectRef idx="2">
+            <a:schemeClr val="accent1"/>
+          </a:effectRef>
+          <a:fontRef idx="minor">
+            <a:schemeClr val="lt1"/>
+          </a:fontRef>
+        </p:style>
+        <p:txBody>
+          <a:bodyPr wrap="none" tIns="0" bIns="0" rtlCol="0" anchor="ctr"/>
+          <a:lstStyle/>
+          <a:p>
+            <a:pPr algn="ctr"/>
+            <a:r>
+              <a:rPr sz="1200" b="1">
+                <a:solidFill>
+                  <a:srgbClr val="FFFFFF"/>
+                </a:solidFill>
+                <a:latin typeface="Century Gothic"/>
+              </a:rPr>
+              <a:t>CLASE 1</a:t>
+            </a:r>
+          </a:p>
+        </p:txBody>
+      </p:sp>
+      <p:sp>
+        <p:nvSpPr>
+          <p:cNvPr id="4" name="TextBox 3"/>
+          <p:cNvSpPr txBox="1"/>
+          <p:nvPr/>
+        </p:nvSpPr>
+        <p:spPr>
+          <a:xfrm>
+            <a:off x="914400" y="2286000"/>
+            <a:ext cx="10058400" cy="1737360"/>
+          </a:xfrm>
+          <a:prstGeom prst="rect">
+            <a:avLst/>
+          </a:prstGeom>
+          <a:noFill/>
+        </p:spPr>
+        <p:txBody>
+          <a:bodyPr wrap="square" lIns="0" rIns="0" anchor="t">
+            <a:spAutoFit/>
+          </a:bodyPr>
+          <a:lstStyle/>
+          <a:p>
+            <a:pPr algn="l"/>
+            <a:r>
+              <a:rPr sz="4000" b="1">
+                <a:solidFill>
+                  <a:srgbClr val="FFFFFF"/>
+                </a:solidFill>
+                <a:latin typeface="Century Gothic"/>
+              </a:rPr>
+              <a:t>Fundamentos de Java y POO</a:t>
+            </a:r>
+          </a:p>
+        </p:txBody>
+      </p:sp>
+      <p:sp>
+        <p:nvSpPr>
+          <p:cNvPr id="5" name="TextBox 4"/>
+          <p:cNvSpPr txBox="1"/>
+          <p:nvPr/>
+        </p:nvSpPr>
+        <p:spPr>
+          <a:xfrm>
+            <a:off x="914400" y="3977639"/>
+            <a:ext cx="10058400" cy="822960"/>
+          </a:xfrm>
+          <a:prstGeom prst="rect">
+            <a:avLst/>
+          </a:prstGeom>
+          <a:noFill/>
+        </p:spPr>
+        <p:txBody>
+          <a:bodyPr wrap="square" lIns="0" rIns="0" anchor="t">
+            <a:spAutoFit/>
+          </a:bodyPr>
+          <a:lstStyle/>
+          <a:p>
+            <a:pPr algn="l"/>
+            <a:r>
+              <a:rPr sz="2200" b="0">
+                <a:solidFill>
+                  <a:srgbClr val="36B5FF"/>
+                </a:solidFill>
+                <a:latin typeface="Century Gothic"/>
+              </a:rPr>
+              <a:t>Lo que necesitas saber antes de automatizar</a:t>
+            </a:r>
+          </a:p>
+        </p:txBody>
+      </p:sp>
+      <p:sp>
+        <p:nvSpPr>
+          <p:cNvPr id="6" name="TextBox 5"/>
+          <p:cNvSpPr txBox="1"/>
+          <p:nvPr/>
+        </p:nvSpPr>
+        <p:spPr>
+          <a:xfrm>
+            <a:off x="914400" y="5120640"/>
+            <a:ext cx="10058400" cy="822960"/>
+          </a:xfrm>
+          <a:prstGeom prst="rect">
+            <a:avLst/>
+          </a:prstGeom>
+          <a:noFill/>
+        </p:spPr>
+        <p:txBody>
+          <a:bodyPr wrap="square" lIns="0" rIns="0" anchor="t">
+            <a:spAutoFit/>
+          </a:bodyPr>
+          <a:lstStyle/>
+          <a:p>
+            <a:pPr algn="l"/>
+            <a:r>
+              <a:rPr sz="1600" b="0">
+                <a:solidFill>
+                  <a:srgbClr val="C9D6E3"/>
+                </a:solidFill>
+                <a:latin typeface="Century Gothic"/>
+              </a:rPr>
+              <a:t>Lunes 21 de septiembre de 2026, 9:00 a.m. – 12:00 m.</a:t>
+            </a:r>
+          </a:p>
+          <a:p>
+            <a:pPr algn="l"/>
+            <a:r>
+              <a:rPr sz="1600" b="0">
+                <a:solidFill>
+                  <a:srgbClr val="C9D6E3"/>
+                </a:solidFill>
+                <a:latin typeface="Century Gothic"/>
+              </a:rPr>
+              <a:t>Diego Zapata (Equipo Transversal QS)</a:t>
+            </a:r>
+          </a:p>
+        </p:txBody>
+      </p:sp>
+    </p:spTree>
+  </p:cSld>
+  <p:clrMapOvr>
+    <a:masterClrMapping/>
+  </p:clrMapOvr>
+</p:sld>
+</file>
+
+<file path=ppt/slides/slide10.xml><?xml version="1.0" encoding="utf-8"?>
+<p:sld xmlns:a="http://schemas.openxmlformats.org/drawingml/2006/main" xmlns:r="http://schemas.openxmlformats.org/officeDocument/2006/relationships" xmlns:p="http://schemas.openxmlformats.org/presentationml/2006/main">
+  <p:cSld>
+    <p:bg>
+      <p:bgPr>
+        <a:solidFill>
+          <a:srgbClr val="06142C"/>
+        </a:solidFill>
+        <a:effectLst/>
+      </p:bgPr>
+    </p:bg>
+    <p:spTree>
+      <p:nvGrpSpPr>
+        <p:cNvPr id="1" name=""/>
+        <p:cNvGrpSpPr/>
+        <p:nvPr/>
+      </p:nvGrpSpPr>
+      <p:grpSpPr>
+        <a:xfrm>
+          <a:off x="0" y="0"/>
+          <a:ext cx="0" cy="0"/>
+          <a:chOff x="0" y="0"/>
+          <a:chExt cx="0" cy="0"/>
+        </a:xfrm>
+      </p:grpSpPr>
+      <p:sp>
+        <p:nvSpPr>
+          <p:cNvPr id="2" name="Rounded Rectangle 1"/>
+          <p:cNvSpPr/>
+          <p:nvPr/>
+        </p:nvSpPr>
+        <p:spPr>
+          <a:xfrm>
+            <a:off x="548640" y="411480"/>
+            <a:ext cx="1124712" cy="329184"/>
+          </a:xfrm>
+          <a:prstGeom prst="roundRect">
+            <a:avLst>
+              <a:gd name="adj" fmla="val 50000"/>
+            </a:avLst>
+          </a:prstGeom>
+          <a:solidFill>
+            <a:srgbClr val="0072BC"/>
+          </a:solidFill>
+          <a:ln>
+            <a:noFill/>
+          </a:ln>
+        </p:spPr>
+        <p:style>
+          <a:lnRef idx="1">
+            <a:schemeClr val="accent1"/>
+          </a:lnRef>
+          <a:fillRef idx="3">
+            <a:schemeClr val="accent1"/>
+          </a:fillRef>
+          <a:effectRef idx="2">
+            <a:schemeClr val="accent1"/>
+          </a:effectRef>
+          <a:fontRef idx="minor">
+            <a:schemeClr val="lt1"/>
+          </a:fontRef>
+        </p:style>
+        <p:txBody>
+          <a:bodyPr wrap="none" tIns="0" bIns="0" rtlCol="0" anchor="ctr"/>
+          <a:lstStyle/>
+          <a:p>
+            <a:pPr algn="ctr"/>
+            <a:r>
+              <a:rPr sz="1200" b="1">
+                <a:solidFill>
+                  <a:srgbClr val="FFFFFF"/>
+                </a:solidFill>
+                <a:latin typeface="Century Gothic"/>
+              </a:rPr>
+              <a:t>CIERRE</a:t>
+            </a:r>
+          </a:p>
+        </p:txBody>
+      </p:sp>
+      <p:sp>
+        <p:nvSpPr>
+          <p:cNvPr id="3" name="TextBox 2"/>
+          <p:cNvSpPr txBox="1"/>
+          <p:nvPr/>
+        </p:nvSpPr>
+        <p:spPr>
+          <a:xfrm>
+            <a:off x="548640" y="868680"/>
+            <a:ext cx="11094415" cy="731520"/>
+          </a:xfrm>
+          <a:prstGeom prst="rect">
+            <a:avLst/>
+          </a:prstGeom>
+          <a:noFill/>
+        </p:spPr>
+        <p:txBody>
+          <a:bodyPr wrap="square" lIns="0" rIns="0" anchor="t">
+            <a:spAutoFit/>
+          </a:bodyPr>
+          <a:lstStyle/>
+          <a:p>
+            <a:pPr algn="l"/>
+            <a:r>
+              <a:rPr sz="2800" b="1">
+                <a:solidFill>
+                  <a:srgbClr val="FFFFFF"/>
+                </a:solidFill>
+                <a:latin typeface="Century Gothic"/>
+              </a:rPr>
+              <a:t>Tu actividad</a:t>
+            </a:r>
+          </a:p>
+        </p:txBody>
+      </p:sp>
+      <p:sp>
+        <p:nvSpPr>
+          <p:cNvPr id="4" name="TextBox 3"/>
+          <p:cNvSpPr txBox="1"/>
+          <p:nvPr/>
+        </p:nvSpPr>
+        <p:spPr>
+          <a:xfrm>
+            <a:off x="548640" y="1737360"/>
+            <a:ext cx="6766560" cy="4114800"/>
+          </a:xfrm>
+          <a:prstGeom prst="rect">
+            <a:avLst/>
+          </a:prstGeom>
+          <a:noFill/>
+        </p:spPr>
+        <p:txBody>
+          <a:bodyPr wrap="square">
+            <a:spAutoFit/>
+          </a:bodyPr>
+          <a:lstStyle/>
+          <a:p>
+            <a:pPr>
+              <a:spcAft>
+                <a:spcPts val="1200"/>
+              </a:spcAft>
+            </a:pPr>
+            <a:r>
+              <a:rPr sz="1800" b="1">
+                <a:solidFill>
+                  <a:srgbClr val="36B5FF"/>
+                </a:solidFill>
+                <a:latin typeface="Century Gothic"/>
+              </a:rPr>
+              <a:t>✓  </a:t>
+            </a:r>
+            <a:r>
+              <a:rPr sz="1800" b="0">
+                <a:solidFill>
+                  <a:srgbClr val="FFFFFF"/>
+                </a:solidFill>
+                <a:latin typeface="Century Gothic"/>
+              </a:rPr>
+              <a:t>Clase </a:t>
+            </a:r>
+            <a:r>
+              <a:rPr sz="1800" b="0">
+                <a:solidFill>
+                  <a:srgbClr val="36B5FF"/>
+                </a:solidFill>
+                <a:latin typeface="Consolas"/>
+              </a:rPr>
+              <a:t>Producto</a:t>
+            </a:r>
+            <a:r>
+              <a:rPr sz="1800" b="0">
+                <a:solidFill>
+                  <a:srgbClr val="FFFFFF"/>
+                </a:solidFill>
+                <a:latin typeface="Century Gothic"/>
+              </a:rPr>
+              <a:t> con precio privado que no acepta negativos.</a:t>
+            </a:r>
+          </a:p>
+          <a:p>
+            <a:pPr>
+              <a:spcAft>
+                <a:spcPts val="1200"/>
+              </a:spcAft>
+            </a:pPr>
+            <a:r>
+              <a:rPr sz="1800" b="1">
+                <a:solidFill>
+                  <a:srgbClr val="36B5FF"/>
+                </a:solidFill>
+                <a:latin typeface="Century Gothic"/>
+              </a:rPr>
+              <a:t>✓  </a:t>
+            </a:r>
+            <a:r>
+              <a:rPr sz="1800" b="0">
+                <a:solidFill>
+                  <a:srgbClr val="FFFFFF"/>
+                </a:solidFill>
+                <a:latin typeface="Century Gothic"/>
+              </a:rPr>
+              <a:t>Descuento con </a:t>
+            </a:r>
+            <a:r>
+              <a:rPr sz="1800" b="0">
+                <a:solidFill>
+                  <a:srgbClr val="36B5FF"/>
+                </a:solidFill>
+                <a:latin typeface="Consolas"/>
+              </a:rPr>
+              <a:t>if</a:t>
+            </a:r>
+            <a:r>
+              <a:rPr sz="1800" b="0">
+                <a:solidFill>
+                  <a:srgbClr val="FFFFFF"/>
+                </a:solidFill>
+                <a:latin typeface="Century Gothic"/>
+              </a:rPr>
+              <a:t>.</a:t>
+            </a:r>
+          </a:p>
+          <a:p>
+            <a:pPr>
+              <a:spcAft>
+                <a:spcPts val="1200"/>
+              </a:spcAft>
+            </a:pPr>
+            <a:r>
+              <a:rPr sz="1800" b="1">
+                <a:solidFill>
+                  <a:srgbClr val="36B5FF"/>
+                </a:solidFill>
+                <a:latin typeface="Century Gothic"/>
+              </a:rPr>
+              <a:t>✓  </a:t>
+            </a:r>
+            <a:r>
+              <a:rPr sz="1800" b="0">
+                <a:solidFill>
+                  <a:srgbClr val="36B5FF"/>
+                </a:solidFill>
+                <a:latin typeface="Consolas"/>
+              </a:rPr>
+              <a:t>ProductoEnOferta</a:t>
+            </a:r>
+            <a:r>
+              <a:rPr sz="1800" b="0">
+                <a:solidFill>
+                  <a:srgbClr val="FFFFFF"/>
+                </a:solidFill>
+                <a:latin typeface="Century Gothic"/>
+              </a:rPr>
+              <a:t> que hereda y sobrescribe.</a:t>
+            </a:r>
+          </a:p>
+          <a:p>
+            <a:pPr>
+              <a:spcAft>
+                <a:spcPts val="1200"/>
+              </a:spcAft>
+            </a:pPr>
+            <a:r>
+              <a:rPr sz="1800" b="1">
+                <a:solidFill>
+                  <a:srgbClr val="36B5FF"/>
+                </a:solidFill>
+                <a:latin typeface="Century Gothic"/>
+              </a:rPr>
+              <a:t>✓  </a:t>
+            </a:r>
+            <a:r>
+              <a:rPr sz="1800" b="0">
+                <a:solidFill>
+                  <a:srgbClr val="FFFFFF"/>
+                </a:solidFill>
+                <a:latin typeface="Century Gothic"/>
+              </a:rPr>
+              <a:t>Clase </a:t>
+            </a:r>
+            <a:r>
+              <a:rPr sz="1800" b="0">
+                <a:solidFill>
+                  <a:srgbClr val="36B5FF"/>
+                </a:solidFill>
+                <a:latin typeface="Consolas"/>
+              </a:rPr>
+              <a:t>Tienda</a:t>
+            </a:r>
+            <a:r>
+              <a:rPr sz="1800" b="0">
+                <a:solidFill>
+                  <a:srgbClr val="FFFFFF"/>
+                </a:solidFill>
+                <a:latin typeface="Century Gothic"/>
+              </a:rPr>
+              <a:t> que imprime 4 casos con </a:t>
+            </a:r>
+            <a:r>
+              <a:rPr sz="1800" b="0">
+                <a:solidFill>
+                  <a:srgbClr val="36B5FF"/>
+                </a:solidFill>
+                <a:latin typeface="Consolas"/>
+              </a:rPr>
+              <a:t>gradle run</a:t>
+            </a:r>
+            <a:r>
+              <a:rPr sz="1800" b="0">
+                <a:solidFill>
+                  <a:srgbClr val="FFFFFF"/>
+                </a:solidFill>
+                <a:latin typeface="Century Gothic"/>
+              </a:rPr>
+              <a:t>.</a:t>
+            </a:r>
+          </a:p>
+        </p:txBody>
+      </p:sp>
+      <p:sp>
+        <p:nvSpPr>
+          <p:cNvPr id="5" name="Rounded Rectangle 4"/>
+          <p:cNvSpPr/>
+          <p:nvPr/>
+        </p:nvSpPr>
+        <p:spPr>
+          <a:xfrm>
+            <a:off x="7680960" y="1737360"/>
+            <a:ext cx="3962095" cy="3931920"/>
+          </a:xfrm>
+          <a:prstGeom prst="roundRect">
+            <a:avLst>
+              <a:gd name="adj" fmla="val 6000"/>
+            </a:avLst>
+          </a:prstGeom>
+          <a:solidFill>
+            <a:srgbClr val="0B2C59"/>
+          </a:solidFill>
+          <a:ln w="15875">
+            <a:solidFill>
+              <a:srgbClr val="5EA7D8"/>
+            </a:solidFill>
+          </a:ln>
+        </p:spPr>
+        <p:style>
+          <a:lnRef idx="1">
+            <a:schemeClr val="accent1"/>
+          </a:lnRef>
+          <a:fillRef idx="3">
+            <a:schemeClr val="accent1"/>
+          </a:fillRef>
+          <a:effectRef idx="2">
+            <a:schemeClr val="accent1"/>
+          </a:effectRef>
+          <a:fontRef idx="minor">
+            <a:schemeClr val="lt1"/>
+          </a:fontRef>
+        </p:style>
+        <p:txBody>
+          <a:bodyPr rtlCol="0" anchor="ctr"/>
+          <a:lstStyle/>
+          <a:p>
+            <a:endParaRPr/>
+          </a:p>
+        </p:txBody>
+      </p:sp>
+      <p:sp>
+        <p:nvSpPr>
+          <p:cNvPr id="6" name="TextBox 5"/>
+          <p:cNvSpPr txBox="1"/>
+          <p:nvPr/>
+        </p:nvSpPr>
+        <p:spPr>
+          <a:xfrm>
+            <a:off x="7909560" y="1965960"/>
+            <a:ext cx="3504895" cy="548640"/>
+          </a:xfrm>
+          <a:prstGeom prst="rect">
+            <a:avLst/>
+          </a:prstGeom>
+          <a:noFill/>
+        </p:spPr>
+        <p:txBody>
+          <a:bodyPr wrap="square" lIns="0" rIns="0" anchor="t">
+            <a:spAutoFit/>
+          </a:bodyPr>
+          <a:lstStyle/>
+          <a:p>
+            <a:pPr algn="l"/>
+            <a:r>
+              <a:rPr sz="1800" b="1">
+                <a:solidFill>
+                  <a:srgbClr val="FFFFFF"/>
+                </a:solidFill>
+                <a:latin typeface="Century Gothic"/>
+              </a:rPr>
+              <a:t>Entrega</a:t>
+            </a:r>
+          </a:p>
+        </p:txBody>
+      </p:sp>
+      <p:sp>
+        <p:nvSpPr>
+          <p:cNvPr id="7" name="TextBox 6"/>
+          <p:cNvSpPr txBox="1"/>
+          <p:nvPr/>
+        </p:nvSpPr>
+        <p:spPr>
+          <a:xfrm>
+            <a:off x="7909560" y="2468880"/>
+            <a:ext cx="3504895" cy="3017520"/>
+          </a:xfrm>
+          <a:prstGeom prst="rect">
+            <a:avLst/>
+          </a:prstGeom>
+          <a:noFill/>
+        </p:spPr>
+        <p:txBody>
+          <a:bodyPr wrap="square" lIns="0" rIns="0" anchor="t">
+            <a:spAutoFit/>
+          </a:bodyPr>
+          <a:lstStyle/>
+          <a:p>
+            <a:pPr algn="l"/>
+            <a:r>
+              <a:rPr sz="1400" b="0">
+                <a:solidFill>
+                  <a:srgbClr val="C9D6E3"/>
+                </a:solidFill>
+                <a:latin typeface="Century Gothic"/>
+              </a:rPr>
+              <a:t>Miércoles 23 de septiembre de 2026, 8:00 a.m.</a:t>
+            </a:r>
+          </a:p>
+          <a:p>
+            <a:pPr algn="l"/>
+            <a:r>
+              <a:rPr sz="1400" b="0">
+                <a:solidFill>
+                  <a:srgbClr val="C9D6E3"/>
+                </a:solidFill>
+                <a:latin typeface="Century Gothic"/>
+              </a:rPr>
+              <a:t>Repositorio en GitHub o .zip sin la carpeta build</a:t>
+            </a:r>
+          </a:p>
+          <a:p>
+            <a:pPr algn="l"/>
+            <a:r>
+              <a:rPr sz="1400" b="0">
+                <a:solidFill>
+                  <a:srgbClr val="C9D6E3"/>
+                </a:solidFill>
+                <a:latin typeface="Century Gothic"/>
+              </a:rPr>
+              <a:t>Captura de </a:t>
+            </a:r>
+            <a:r>
+              <a:rPr sz="1400" b="0">
+                <a:solidFill>
+                  <a:srgbClr val="36B5FF"/>
+                </a:solidFill>
+                <a:latin typeface="Consolas"/>
+              </a:rPr>
+              <a:t>gradle run</a:t>
+            </a:r>
+            <a:r>
+              <a:rPr sz="1400" b="0">
+                <a:solidFill>
+                  <a:srgbClr val="C9D6E3"/>
+                </a:solidFill>
+                <a:latin typeface="Century Gothic"/>
+              </a:rPr>
+              <a:t> con la salida</a:t>
+            </a:r>
+          </a:p>
+        </p:txBody>
+      </p:sp>
+      <p:sp>
+        <p:nvSpPr>
+          <p:cNvPr id="8" name="TextBox 7"/>
+          <p:cNvSpPr txBox="1"/>
+          <p:nvPr/>
+        </p:nvSpPr>
+        <p:spPr>
+          <a:xfrm>
+            <a:off x="548640" y="6400800"/>
+            <a:ext cx="8229600" cy="274320"/>
+          </a:xfrm>
+          <a:prstGeom prst="rect">
+            <a:avLst/>
+          </a:prstGeom>
+          <a:noFill/>
+        </p:spPr>
+        <p:txBody>
+          <a:bodyPr wrap="square" lIns="0" rIns="0" anchor="t">
+            <a:spAutoFit/>
+          </a:bodyPr>
+          <a:lstStyle/>
+          <a:p>
+            <a:pPr algn="l"/>
+            <a:r>
+              <a:rPr sz="1200" b="0">
+                <a:solidFill>
+                  <a:srgbClr val="C9D6E3"/>
+                </a:solidFill>
+                <a:latin typeface="Century Gothic"/>
+              </a:rPr>
+              <a:t>Semillero QA 2026 · Automatización Web · Clase 1 · 01-fundamentos-java-poo</a:t>
+            </a:r>
+          </a:p>
+        </p:txBody>
+      </p:sp>
+      <p:sp>
+        <p:nvSpPr>
+          <p:cNvPr id="9" name="TextBox 8"/>
+          <p:cNvSpPr txBox="1"/>
+          <p:nvPr/>
+        </p:nvSpPr>
+        <p:spPr>
+          <a:xfrm>
+            <a:off x="10728655" y="6400800"/>
+            <a:ext cx="914400" cy="274320"/>
+          </a:xfrm>
+          <a:prstGeom prst="rect">
+            <a:avLst/>
+          </a:prstGeom>
+          <a:noFill/>
+        </p:spPr>
+        <p:txBody>
+          <a:bodyPr wrap="square" lIns="0" rIns="0" anchor="t">
+            <a:spAutoFit/>
+          </a:bodyPr>
+          <a:lstStyle/>
+          <a:p>
+            <a:pPr algn="r"/>
+            <a:r>
+              <a:rPr sz="1200" b="0">
+                <a:solidFill>
+                  <a:srgbClr val="C9D6E3"/>
+                </a:solidFill>
+                <a:latin typeface="Century Gothic"/>
+              </a:rPr>
+              <a:t>11</a:t>
+            </a:r>
+          </a:p>
+        </p:txBody>
+      </p:sp>
+    </p:spTree>
+  </p:cSld>
+  <p:clrMapOvr>
+    <a:masterClrMapping/>
+  </p:clrMapOvr>
+</p:sld>
+</file>
+
+<file path=ppt/slides/slide11.xml><?xml version="1.0" encoding="utf-8"?>
 <p:sld xmlns:a="http://schemas.openxmlformats.org/drawingml/2006/main" xmlns:p="http://schemas.openxmlformats.org/presentationml/2006/main" xmlns:r="http://schemas.openxmlformats.org/officeDocument/2006/relationships">
   <p:cSld>
     <p:bg>
@@ -3107,20 +3906,22 @@
       <p:grpSpPr/>
       <p:sp>
         <p:nvSpPr>
-          <p:cNvPr id="2" name="Rectangle 1"/>
+          <p:cNvPr id="2" name="Rounded Rectangle 1"/>
           <p:cNvSpPr/>
           <p:nvPr/>
         </p:nvSpPr>
         <p:spPr>
           <a:xfrm>
-            <a:off x="0" y="0"/>
-            <a:ext cx="228600" cy="6858000"/>
-          </a:xfrm>
-          <a:prstGeom prst="rect">
-            <a:avLst/>
+            <a:off x="548640" y="411480"/>
+            <a:ext cx="1124712" cy="329184"/>
+          </a:xfrm>
+          <a:prstGeom prst="roundRect">
+            <a:avLst>
+              <a:gd name="adj" fmla="val 50000"/>
+            </a:avLst>
           </a:prstGeom>
           <a:solidFill>
-            <a:srgbClr val="36B5FF"/>
+            <a:srgbClr val="0072BC"/>
           </a:solidFill>
           <a:ln>
             <a:noFill/>
@@ -3141,34 +3942,80 @@
           </a:fontRef>
         </p:style>
         <p:txBody>
-          <a:bodyPr rtlCol="0" anchor="ctr"/>
+          <a:bodyPr wrap="none" tIns="0" bIns="0" rtlCol="0" anchor="ctr"/>
           <a:lstStyle/>
           <a:p>
             <a:pPr algn="ctr"/>
-          </a:p>
-        </p:txBody>
-      </p:sp>
-      <p:sp>
-        <p:nvSpPr>
-          <p:cNvPr id="3" name="Rounded Rectangle 2"/>
+            <a:r>
+              <a:rPr sz="1200" b="1">
+                <a:solidFill>
+                  <a:srgbClr val="FFFFFF"/>
+                </a:solidFill>
+                <a:latin typeface="Century Gothic"/>
+              </a:rPr>
+              <a:t>TEMA 3</a:t>
+            </a:r>
+          </a:p>
+        </p:txBody>
+      </p:sp>
+      <p:sp>
+        <p:nvSpPr>
+          <p:cNvPr id="3" name="TextBox 2"/>
+          <p:cNvSpPr txBox="1"/>
+          <p:nvPr/>
+        </p:nvSpPr>
+        <p:spPr>
+          <a:xfrm>
+            <a:off x="548640" y="868680"/>
+            <a:ext cx="11094415" cy="731520"/>
+          </a:xfrm>
+          <a:prstGeom prst="rect">
+            <a:avLst/>
+          </a:prstGeom>
+          <a:noFill/>
+        </p:spPr>
+        <p:txBody>
+          <a:bodyPr wrap="square" lIns="0" rIns="0" anchor="t">
+            <a:spAutoFit/>
+          </a:bodyPr>
+          <a:lstStyle/>
+          <a:p>
+            <a:pPr algn="l"/>
+            <a:r>
+              <a:rPr sz="2800" b="1">
+                <a:solidFill>
+                  <a:srgbClr val="FFFFFF"/>
+                </a:solidFill>
+                <a:latin typeface="Century Gothic"/>
+              </a:rPr>
+              <a:t>Polimorfismo: métodos sobrecargados</a:t>
+            </a:r>
+          </a:p>
+        </p:txBody>
+      </p:sp>
+      <p:sp>
+        <p:nvSpPr>
+          <p:cNvPr id="4" name="Rounded Rectangle 3"/>
           <p:cNvSpPr/>
           <p:nvPr/>
         </p:nvSpPr>
         <p:spPr>
           <a:xfrm>
-            <a:off x="914400" y="1737360"/>
-            <a:ext cx="1243584" cy="329184"/>
+            <a:off x="548640" y="1737360"/>
+            <a:ext cx="6949440" cy="4389120"/>
           </a:xfrm>
           <a:prstGeom prst="roundRect">
             <a:avLst>
-              <a:gd name="adj" fmla="val 50000"/>
+              <a:gd name="adj" fmla="val 3000"/>
             </a:avLst>
           </a:prstGeom>
           <a:solidFill>
-            <a:srgbClr val="0072BC"/>
+            <a:srgbClr val="0A1B33"/>
           </a:solidFill>
-          <a:ln>
-            <a:noFill/>
+          <a:ln w="12700">
+            <a:solidFill>
+              <a:srgbClr val="5EA7D8"/>
+            </a:solidFill>
           </a:ln>
         </p:spPr>
         <p:style>
@@ -3186,32 +4033,24 @@
           </a:fontRef>
         </p:style>
         <p:txBody>
-          <a:bodyPr rtlCol="0" anchor="ctr" tIns="0" bIns="0" wrap="none"/>
+          <a:bodyPr rtlCol="0" anchor="ctr"/>
           <a:lstStyle/>
           <a:p>
             <a:pPr algn="ctr"/>
-            <a:r>
-              <a:rPr b="1" sz="1200">
-                <a:solidFill>
-                  <a:srgbClr val="FFFFFF"/>
-                </a:solidFill>
-                <a:latin typeface="Century Gothic"/>
-              </a:rPr>
-              <a:t>CLASE 1</a:t>
-            </a:r>
-          </a:p>
-        </p:txBody>
-      </p:sp>
-      <p:sp>
-        <p:nvSpPr>
-          <p:cNvPr id="4" name="TextBox 3"/>
+            <a:endParaRPr/>
+          </a:p>
+        </p:txBody>
+      </p:sp>
+      <p:sp>
+        <p:nvSpPr>
+          <p:cNvPr id="5" name="TextBox 4"/>
           <p:cNvSpPr txBox="1"/>
           <p:nvPr/>
         </p:nvSpPr>
         <p:spPr>
           <a:xfrm>
-            <a:off x="914400" y="2286000"/>
-            <a:ext cx="10058400" cy="1737360"/>
+            <a:off x="777240" y="1847088"/>
+            <a:ext cx="2743200" cy="274320"/>
           </a:xfrm>
           <a:prstGeom prst="rect">
             <a:avLst/>
@@ -3219,34 +4058,34 @@
           <a:noFill/>
         </p:spPr>
         <p:txBody>
-          <a:bodyPr wrap="square" anchor="t" lIns="0" rIns="0">
+          <a:bodyPr wrap="square" lIns="0" rIns="0" anchor="t">
             <a:spAutoFit/>
           </a:bodyPr>
           <a:lstStyle/>
           <a:p>
             <a:pPr algn="l"/>
             <a:r>
-              <a:rPr b="1" sz="4000">
-                <a:solidFill>
-                  <a:srgbClr val="FFFFFF"/>
-                </a:solidFill>
-                <a:latin typeface="Century Gothic"/>
-              </a:rPr>
-              <a:t>Fundamentos de Java y POO</a:t>
-            </a:r>
-          </a:p>
-        </p:txBody>
-      </p:sp>
-      <p:sp>
-        <p:nvSpPr>
-          <p:cNvPr id="5" name="TextBox 4"/>
+              <a:rPr sz="1200" b="1">
+                <a:solidFill>
+                  <a:srgbClr val="36B5FF"/>
+                </a:solidFill>
+                <a:latin typeface="Century Gothic"/>
+              </a:rPr>
+              <a:t>Java</a:t>
+            </a:r>
+          </a:p>
+        </p:txBody>
+      </p:sp>
+      <p:sp>
+        <p:nvSpPr>
+          <p:cNvPr id="6" name="TextBox 5"/>
           <p:cNvSpPr txBox="1"/>
           <p:nvPr/>
         </p:nvSpPr>
         <p:spPr>
           <a:xfrm>
-            <a:off x="914400" y="3977639"/>
-            <a:ext cx="10058400" cy="822960"/>
+            <a:off x="777240" y="2194560"/>
+            <a:ext cx="6492240" cy="3840480"/>
           </a:xfrm>
           <a:prstGeom prst="rect">
             <a:avLst/>
@@ -3254,34 +4093,187 @@
           <a:noFill/>
         </p:spPr>
         <p:txBody>
-          <a:bodyPr wrap="square" anchor="t" lIns="0" rIns="0">
+          <a:bodyPr wrap="square">
             <a:spAutoFit/>
           </a:bodyPr>
           <a:lstStyle/>
           <a:p>
-            <a:pPr algn="l"/>
-            <a:r>
-              <a:rPr b="0" sz="2200">
-                <a:solidFill>
-                  <a:srgbClr val="36B5FF"/>
-                </a:solidFill>
-                <a:latin typeface="Century Gothic"/>
-              </a:rPr>
-              <a:t>Lo que necesitas saber antes de automatizar</a:t>
-            </a:r>
-          </a:p>
-        </p:txBody>
-      </p:sp>
-      <p:sp>
-        <p:nvSpPr>
-          <p:cNvPr id="6" name="TextBox 5"/>
+            <a:r>
+              <a:rPr sz="1300">
+                <a:solidFill>
+                  <a:srgbClr val="FFFFFF"/>
+                </a:solidFill>
+                <a:latin typeface="Consolas"/>
+              </a:rPr>
+              <a:t>public class Calculadora {</a:t>
+            </a:r>
+          </a:p>
+          <a:p>
+            <a:r>
+              <a:rPr sz="1300">
+                <a:solidFill>
+                  <a:srgbClr val="FFFFFF"/>
+                </a:solidFill>
+                <a:latin typeface="Consolas"/>
+              </a:rPr>
+              <a:t>    public int sumar(int a, int b) {</a:t>
+            </a:r>
+          </a:p>
+          <a:p>
+            <a:r>
+              <a:rPr sz="1300">
+                <a:solidFill>
+                  <a:srgbClr val="FFFFFF"/>
+                </a:solidFill>
+                <a:latin typeface="Consolas"/>
+              </a:rPr>
+              <a:t>        return a + b;</a:t>
+            </a:r>
+          </a:p>
+          <a:p>
+            <a:r>
+              <a:rPr sz="1300">
+                <a:solidFill>
+                  <a:srgbClr val="FFFFFF"/>
+                </a:solidFill>
+                <a:latin typeface="Consolas"/>
+              </a:rPr>
+              <a:t>    }</a:t>
+            </a:r>
+          </a:p>
+          <a:p>
+            <a:r>
+              <a:rPr sz="1300">
+                <a:solidFill>
+                  <a:srgbClr val="FFFFFF"/>
+                </a:solidFill>
+                <a:latin typeface="Consolas"/>
+              </a:rPr>
+              <a:t>    public int sumar(int a, int b, int c) {</a:t>
+            </a:r>
+          </a:p>
+          <a:p>
+            <a:r>
+              <a:rPr sz="1300">
+                <a:solidFill>
+                  <a:srgbClr val="FFFFFF"/>
+                </a:solidFill>
+                <a:latin typeface="Consolas"/>
+              </a:rPr>
+              <a:t>        return a + b + c;</a:t>
+            </a:r>
+          </a:p>
+          <a:p>
+            <a:r>
+              <a:rPr sz="1300">
+                <a:solidFill>
+                  <a:srgbClr val="FFFFFF"/>
+                </a:solidFill>
+                <a:latin typeface="Consolas"/>
+              </a:rPr>
+              <a:t>    }</a:t>
+            </a:r>
+          </a:p>
+          <a:p>
+            <a:r>
+              <a:rPr sz="1300">
+                <a:solidFill>
+                  <a:srgbClr val="FFFFFF"/>
+                </a:solidFill>
+                <a:latin typeface="Consolas"/>
+              </a:rPr>
+              <a:t>    public double sumar(double a, double b) {</a:t>
+            </a:r>
+          </a:p>
+          <a:p>
+            <a:r>
+              <a:rPr sz="1300">
+                <a:solidFill>
+                  <a:srgbClr val="FFFFFF"/>
+                </a:solidFill>
+                <a:latin typeface="Consolas"/>
+              </a:rPr>
+              <a:t>        return a + b;</a:t>
+            </a:r>
+          </a:p>
+          <a:p>
+            <a:r>
+              <a:rPr sz="1300">
+                <a:solidFill>
+                  <a:srgbClr val="FFFFFF"/>
+                </a:solidFill>
+                <a:latin typeface="Consolas"/>
+              </a:rPr>
+              <a:t>    }</a:t>
+            </a:r>
+          </a:p>
+          <a:p>
+            <a:r>
+              <a:rPr sz="1300">
+                <a:solidFill>
+                  <a:srgbClr val="FFFFFF"/>
+                </a:solidFill>
+                <a:latin typeface="Consolas"/>
+              </a:rPr>
+              <a:t>}</a:t>
+            </a:r>
+          </a:p>
+          <a:p>
+            <a:r>
+              <a:rPr sz="1300">
+                <a:solidFill>
+                  <a:srgbClr val="FFFFFF"/>
+                </a:solidFill>
+                <a:latin typeface="Consolas"/>
+              </a:rPr>
+              <a:t> </a:t>
+            </a:r>
+          </a:p>
+          <a:p>
+            <a:r>
+              <a:rPr sz="1300">
+                <a:solidFill>
+                  <a:srgbClr val="FFFFFF"/>
+                </a:solidFill>
+                <a:latin typeface="Consolas"/>
+              </a:rPr>
+              <a:t>calculadora.sumar(2, 3)       // 5</a:t>
+            </a:r>
+          </a:p>
+          <a:p>
+            <a:r>
+              <a:rPr sz="1300">
+                <a:solidFill>
+                  <a:srgbClr val="FFFFFF"/>
+                </a:solidFill>
+                <a:latin typeface="Consolas"/>
+              </a:rPr>
+              <a:t>calculadora.sumar(2, 3, 4)    // 9</a:t>
+            </a:r>
+          </a:p>
+          <a:p>
+            <a:r>
+              <a:rPr sz="1300">
+                <a:solidFill>
+                  <a:srgbClr val="FFFFFF"/>
+                </a:solidFill>
+                <a:latin typeface="Consolas"/>
+              </a:rPr>
+              <a:t>calculadora.sumar(2.5, 1.5)   // 4.0</a:t>
+            </a:r>
+          </a:p>
+        </p:txBody>
+      </p:sp>
+      <p:sp>
+        <p:nvSpPr>
+          <p:cNvPr id="7" name="TextBox 6"/>
           <p:cNvSpPr txBox="1"/>
           <p:nvPr/>
         </p:nvSpPr>
         <p:spPr>
           <a:xfrm>
-            <a:off x="914400" y="5120640"/>
-            <a:ext cx="10058400" cy="822960"/>
+            <a:off x="7863840" y="1737360"/>
+            <a:ext cx="3779215" cy="4389120"/>
           </a:xfrm>
           <a:prstGeom prst="rect">
             <a:avLst/>
@@ -3289,32 +4281,171 @@
           <a:noFill/>
         </p:spPr>
         <p:txBody>
-          <a:bodyPr wrap="square" anchor="t" lIns="0" rIns="0">
+          <a:bodyPr wrap="square">
             <a:spAutoFit/>
           </a:bodyPr>
           <a:lstStyle/>
           <a:p>
+            <a:pPr>
+              <a:spcAft>
+                <a:spcPts val="1000"/>
+              </a:spcAft>
+            </a:pPr>
+            <a:r>
+              <a:rPr sz="1600" b="1">
+                <a:solidFill>
+                  <a:srgbClr val="36B5FF"/>
+                </a:solidFill>
+                <a:latin typeface="Century Gothic"/>
+              </a:rPr>
+              <a:t>▸  </a:t>
+            </a:r>
+            <a:r>
+              <a:rPr sz="1600" b="0">
+                <a:solidFill>
+                  <a:srgbClr val="FFFFFF"/>
+                </a:solidFill>
+                <a:latin typeface="Century Gothic"/>
+              </a:rPr>
+              <a:t>Mismo nombre, datos distintos.</a:t>
+            </a:r>
+          </a:p>
+          <a:p>
+            <a:pPr>
+              <a:spcAft>
+                <a:spcPts val="1000"/>
+              </a:spcAft>
+            </a:pPr>
+            <a:r>
+              <a:rPr sz="1600" b="1">
+                <a:solidFill>
+                  <a:srgbClr val="36B5FF"/>
+                </a:solidFill>
+                <a:latin typeface="Century Gothic"/>
+              </a:rPr>
+              <a:t>▸  </a:t>
+            </a:r>
+            <a:r>
+              <a:rPr sz="1600" b="0">
+                <a:solidFill>
+                  <a:srgbClr val="FFFFFF"/>
+                </a:solidFill>
+                <a:latin typeface="Century Gothic"/>
+              </a:rPr>
+              <a:t>Java escoge cuál usar por la cantidad y el tipo de datos.</a:t>
+            </a:r>
+          </a:p>
+          <a:p>
+            <a:pPr>
+              <a:spcAft>
+                <a:spcPts val="1000"/>
+              </a:spcAft>
+            </a:pPr>
+            <a:r>
+              <a:rPr sz="1600" b="1">
+                <a:solidFill>
+                  <a:srgbClr val="36B5FF"/>
+                </a:solidFill>
+                <a:latin typeface="Century Gothic"/>
+              </a:rPr>
+              <a:t>▸  </a:t>
+            </a:r>
+            <a:r>
+              <a:rPr sz="1600" b="0">
+                <a:solidFill>
+                  <a:srgbClr val="FFFFFF"/>
+                </a:solidFill>
+                <a:latin typeface="Century Gothic"/>
+              </a:rPr>
+              <a:t>No es </a:t>
+            </a:r>
+            <a:r>
+              <a:rPr sz="1600" b="0">
+                <a:solidFill>
+                  <a:srgbClr val="36B5FF"/>
+                </a:solidFill>
+                <a:latin typeface="Consolas"/>
+              </a:rPr>
+              <a:t>@Override</a:t>
+            </a:r>
+            <a:r>
+              <a:rPr sz="1600" b="0">
+                <a:solidFill>
+                  <a:srgbClr val="FFFFFF"/>
+                </a:solidFill>
+                <a:latin typeface="Century Gothic"/>
+              </a:rPr>
+              <a:t>: sobrescribir es cambiar un método del padre.</a:t>
+            </a:r>
+          </a:p>
+        </p:txBody>
+      </p:sp>
+      <p:sp>
+        <p:nvSpPr>
+          <p:cNvPr id="8" name="TextBox 7"/>
+          <p:cNvSpPr txBox="1"/>
+          <p:nvPr/>
+        </p:nvSpPr>
+        <p:spPr>
+          <a:xfrm>
+            <a:off x="548640" y="6400800"/>
+            <a:ext cx="8229600" cy="274320"/>
+          </a:xfrm>
+          <a:prstGeom prst="rect">
+            <a:avLst/>
+          </a:prstGeom>
+          <a:noFill/>
+        </p:spPr>
+        <p:txBody>
+          <a:bodyPr wrap="square" lIns="0" rIns="0" anchor="t">
+            <a:spAutoFit/>
+          </a:bodyPr>
+          <a:lstStyle/>
+          <a:p>
             <a:pPr algn="l"/>
             <a:r>
-              <a:rPr b="0" sz="1600">
+              <a:rPr sz="1200" b="0">
                 <a:solidFill>
                   <a:srgbClr val="C9D6E3"/>
                 </a:solidFill>
                 <a:latin typeface="Century Gothic"/>
               </a:rPr>
-              <a:t>Lunes 21 de septiembre de 2026, 9:00 a.m. – 12:00 m.</a:t>
-            </a:r>
-          </a:p>
-          <a:p>
-            <a:pPr algn="l"/>
-            <a:r>
-              <a:rPr b="0" sz="1600">
+              <a:t>Semillero QA 2026 · Automatización Web · Clase 1 · 01-fundamentos-java-poo</a:t>
+            </a:r>
+          </a:p>
+        </p:txBody>
+      </p:sp>
+      <p:sp>
+        <p:nvSpPr>
+          <p:cNvPr id="9" name="TextBox 8"/>
+          <p:cNvSpPr txBox="1"/>
+          <p:nvPr/>
+        </p:nvSpPr>
+        <p:spPr>
+          <a:xfrm>
+            <a:off x="10728655" y="6400800"/>
+            <a:ext cx="914400" cy="274320"/>
+          </a:xfrm>
+          <a:prstGeom prst="rect">
+            <a:avLst/>
+          </a:prstGeom>
+          <a:noFill/>
+        </p:spPr>
+        <p:txBody>
+          <a:bodyPr wrap="square" lIns="0" rIns="0" anchor="t">
+            <a:spAutoFit/>
+          </a:bodyPr>
+          <a:lstStyle/>
+          <a:p>
+            <a:pPr algn="r"/>
+            <a:r>
+              <a:rPr sz="1200" b="0">
                 <a:solidFill>
                   <a:srgbClr val="C9D6E3"/>
                 </a:solidFill>
                 <a:latin typeface="Century Gothic"/>
               </a:rPr>
-              <a:t>Diego Zapata (Equipo Transversal QS)</a:t>
+              <a:t>9</a:t>
             </a:r>
           </a:p>
         </p:txBody>
@@ -3327,8 +4458,8 @@
 </p:sld>
 </file>
 
-<file path=ppt/slides/slide10.xml><?xml version="1.0" encoding="utf-8"?>
-<p:sld xmlns:a="http://schemas.openxmlformats.org/drawingml/2006/main" xmlns:p="http://schemas.openxmlformats.org/presentationml/2006/main" xmlns:r="http://schemas.openxmlformats.org/officeDocument/2006/relationships">
+<file path=ppt/slides/slide2.xml><?xml version="1.0" encoding="utf-8"?>
+<p:sld xmlns:a="http://schemas.openxmlformats.org/drawingml/2006/main" xmlns:r="http://schemas.openxmlformats.org/officeDocument/2006/relationships" xmlns:p="http://schemas.openxmlformats.org/presentationml/2006/main">
   <p:cSld>
     <p:bg>
       <p:bgPr>
@@ -3344,7 +4475,14 @@
         <p:cNvGrpSpPr/>
         <p:nvPr/>
       </p:nvGrpSpPr>
-      <p:grpSpPr/>
+      <p:grpSpPr>
+        <a:xfrm>
+          <a:off x="0" y="0"/>
+          <a:ext cx="0" cy="0"/>
+          <a:chOff x="0" y="0"/>
+          <a:chExt cx="0" cy="0"/>
+        </a:xfrm>
+      </p:grpSpPr>
       <p:sp>
         <p:nvSpPr>
           <p:cNvPr id="2" name="Rounded Rectangle 1"/>
@@ -3383,18 +4521,18 @@
           </a:fontRef>
         </p:style>
         <p:txBody>
-          <a:bodyPr rtlCol="0" anchor="ctr" tIns="0" bIns="0" wrap="none"/>
+          <a:bodyPr wrap="none" tIns="0" bIns="0" rtlCol="0" anchor="ctr"/>
           <a:lstStyle/>
           <a:p>
             <a:pPr algn="ctr"/>
             <a:r>
-              <a:rPr b="1" sz="1200">
-                <a:solidFill>
-                  <a:srgbClr val="FFFFFF"/>
-                </a:solidFill>
-                <a:latin typeface="Century Gothic"/>
-              </a:rPr>
-              <a:t>CIERRE</a:t>
+              <a:rPr sz="1200" b="1">
+                <a:solidFill>
+                  <a:srgbClr val="FFFFFF"/>
+                </a:solidFill>
+                <a:latin typeface="Century Gothic"/>
+              </a:rPr>
+              <a:t>AGENDA</a:t>
             </a:r>
           </a:p>
         </p:txBody>
@@ -3408,7 +4546,7 @@
         <p:spPr>
           <a:xfrm>
             <a:off x="548640" y="868680"/>
-            <a:ext cx="11094415" cy="731520"/>
+            <a:ext cx="11094415" cy="523220"/>
           </a:xfrm>
           <a:prstGeom prst="rect">
             <a:avLst/>
@@ -3416,238 +4554,49 @@
           <a:noFill/>
         </p:spPr>
         <p:txBody>
-          <a:bodyPr wrap="square" anchor="t" lIns="0" rIns="0">
+          <a:bodyPr wrap="square" lIns="0" rIns="0" anchor="t">
             <a:spAutoFit/>
           </a:bodyPr>
           <a:lstStyle/>
           <a:p>
             <a:pPr algn="l"/>
             <a:r>
-              <a:rPr b="1" sz="2800">
-                <a:solidFill>
-                  <a:srgbClr val="FFFFFF"/>
-                </a:solidFill>
-                <a:latin typeface="Century Gothic"/>
-              </a:rPr>
-              <a:t>Tu actividad</a:t>
-            </a:r>
-          </a:p>
-        </p:txBody>
-      </p:sp>
-      <p:sp>
-        <p:nvSpPr>
-          <p:cNvPr id="4" name="TextBox 3"/>
-          <p:cNvSpPr txBox="1"/>
+              <a:rPr sz="2800" b="1" dirty="0">
+                <a:solidFill>
+                  <a:srgbClr val="FFFFFF"/>
+                </a:solidFill>
+                <a:latin typeface="Century Gothic"/>
+              </a:rPr>
+              <a:t>Pla</a:t>
+            </a:r>
+            <a:r>
+              <a:rPr lang="es-419" sz="2800" b="1" dirty="0">
+                <a:solidFill>
+                  <a:srgbClr val="FFFFFF"/>
+                </a:solidFill>
+                <a:latin typeface="Century Gothic"/>
+              </a:rPr>
+              <a:t>n</a:t>
+            </a:r>
+            <a:endParaRPr sz="2800" b="1" dirty="0">
+              <a:solidFill>
+                <a:srgbClr val="FFFFFF"/>
+              </a:solidFill>
+              <a:latin typeface="Century Gothic"/>
+            </a:endParaRPr>
+          </a:p>
+        </p:txBody>
+      </p:sp>
+      <p:sp>
+        <p:nvSpPr>
+          <p:cNvPr id="4" name="Rounded Rectangle 3"/>
+          <p:cNvSpPr/>
           <p:nvPr/>
         </p:nvSpPr>
         <p:spPr>
           <a:xfrm>
             <a:off x="548640" y="1737360"/>
-            <a:ext cx="6766560" cy="4114800"/>
-          </a:xfrm>
-          <a:prstGeom prst="rect">
-            <a:avLst/>
-          </a:prstGeom>
-          <a:noFill/>
-        </p:spPr>
-        <p:txBody>
-          <a:bodyPr wrap="square">
-            <a:spAutoFit/>
-          </a:bodyPr>
-          <a:lstStyle/>
-          <a:p>
-            <a:pPr>
-              <a:spcAft>
-                <a:spcPts val="1200"/>
-              </a:spcAft>
-            </a:pPr>
-            <a:r>
-              <a:rPr b="1" sz="1800">
-                <a:solidFill>
-                  <a:srgbClr val="36B5FF"/>
-                </a:solidFill>
-                <a:latin typeface="Century Gothic"/>
-              </a:rPr>
-              <a:t>✓  </a:t>
-            </a:r>
-            <a:r>
-              <a:rPr b="0" sz="1800">
-                <a:solidFill>
-                  <a:srgbClr val="FFFFFF"/>
-                </a:solidFill>
-                <a:latin typeface="Century Gothic"/>
-              </a:rPr>
-              <a:t>Clase </a:t>
-            </a:r>
-            <a:r>
-              <a:rPr b="0" sz="1800">
-                <a:solidFill>
-                  <a:srgbClr val="36B5FF"/>
-                </a:solidFill>
-                <a:latin typeface="Consolas"/>
-              </a:rPr>
-              <a:t>Producto</a:t>
-            </a:r>
-            <a:r>
-              <a:rPr b="0" sz="1800">
-                <a:solidFill>
-                  <a:srgbClr val="FFFFFF"/>
-                </a:solidFill>
-                <a:latin typeface="Century Gothic"/>
-              </a:rPr>
-              <a:t> con precio privado que no acepta negativos.</a:t>
-            </a:r>
-          </a:p>
-          <a:p>
-            <a:pPr>
-              <a:spcAft>
-                <a:spcPts val="1200"/>
-              </a:spcAft>
-            </a:pPr>
-            <a:r>
-              <a:rPr b="1" sz="1800">
-                <a:solidFill>
-                  <a:srgbClr val="36B5FF"/>
-                </a:solidFill>
-                <a:latin typeface="Century Gothic"/>
-              </a:rPr>
-              <a:t>✓  </a:t>
-            </a:r>
-            <a:r>
-              <a:rPr b="0" sz="1800">
-                <a:solidFill>
-                  <a:srgbClr val="FFFFFF"/>
-                </a:solidFill>
-                <a:latin typeface="Century Gothic"/>
-              </a:rPr>
-              <a:t>Descuento con </a:t>
-            </a:r>
-            <a:r>
-              <a:rPr b="0" sz="1800">
-                <a:solidFill>
-                  <a:srgbClr val="36B5FF"/>
-                </a:solidFill>
-                <a:latin typeface="Consolas"/>
-              </a:rPr>
-              <a:t>if</a:t>
-            </a:r>
-            <a:r>
-              <a:rPr b="0" sz="1800">
-                <a:solidFill>
-                  <a:srgbClr val="FFFFFF"/>
-                </a:solidFill>
-                <a:latin typeface="Century Gothic"/>
-              </a:rPr>
-              <a:t>.</a:t>
-            </a:r>
-          </a:p>
-          <a:p>
-            <a:pPr>
-              <a:spcAft>
-                <a:spcPts val="1200"/>
-              </a:spcAft>
-            </a:pPr>
-            <a:r>
-              <a:rPr b="1" sz="1800">
-                <a:solidFill>
-                  <a:srgbClr val="36B5FF"/>
-                </a:solidFill>
-                <a:latin typeface="Century Gothic"/>
-              </a:rPr>
-              <a:t>✓  </a:t>
-            </a:r>
-            <a:r>
-              <a:rPr b="0" sz="1800">
-                <a:solidFill>
-                  <a:srgbClr val="36B5FF"/>
-                </a:solidFill>
-                <a:latin typeface="Consolas"/>
-              </a:rPr>
-              <a:t>ProductoEnOferta</a:t>
-            </a:r>
-            <a:r>
-              <a:rPr b="0" sz="1800">
-                <a:solidFill>
-                  <a:srgbClr val="FFFFFF"/>
-                </a:solidFill>
-                <a:latin typeface="Century Gothic"/>
-              </a:rPr>
-              <a:t> que hereda y sobrescribe.</a:t>
-            </a:r>
-          </a:p>
-          <a:p>
-            <a:pPr>
-              <a:spcAft>
-                <a:spcPts val="1200"/>
-              </a:spcAft>
-            </a:pPr>
-            <a:r>
-              <a:rPr b="1" sz="1800">
-                <a:solidFill>
-                  <a:srgbClr val="36B5FF"/>
-                </a:solidFill>
-                <a:latin typeface="Century Gothic"/>
-              </a:rPr>
-              <a:t>✓  </a:t>
-            </a:r>
-            <a:r>
-              <a:rPr b="0" sz="1800">
-                <a:solidFill>
-                  <a:srgbClr val="FFFFFF"/>
-                </a:solidFill>
-                <a:latin typeface="Century Gothic"/>
-              </a:rPr>
-              <a:t>Clase </a:t>
-            </a:r>
-            <a:r>
-              <a:rPr b="0" sz="1800">
-                <a:solidFill>
-                  <a:srgbClr val="36B5FF"/>
-                </a:solidFill>
-                <a:latin typeface="Consolas"/>
-              </a:rPr>
-              <a:t>Tienda</a:t>
-            </a:r>
-            <a:r>
-              <a:rPr b="0" sz="1800">
-                <a:solidFill>
-                  <a:srgbClr val="FFFFFF"/>
-                </a:solidFill>
-                <a:latin typeface="Century Gothic"/>
-              </a:rPr>
-              <a:t> que imprime 4 casos con </a:t>
-            </a:r>
-            <a:r>
-              <a:rPr b="0" sz="1800">
-                <a:solidFill>
-                  <a:srgbClr val="36B5FF"/>
-                </a:solidFill>
-                <a:latin typeface="Consolas"/>
-              </a:rPr>
-              <a:t>gradle run</a:t>
-            </a:r>
-            <a:r>
-              <a:rPr b="0" sz="1800">
-                <a:solidFill>
-                  <a:srgbClr val="FFFFFF"/>
-                </a:solidFill>
-                <a:latin typeface="Century Gothic"/>
-              </a:rPr>
-              <a:t>.</a:t>
-            </a:r>
-          </a:p>
-        </p:txBody>
-      </p:sp>
-      <p:sp>
-        <p:nvSpPr>
-          <p:cNvPr id="5" name="Rounded Rectangle 4"/>
-          <p:cNvSpPr/>
-          <p:nvPr/>
-        </p:nvSpPr>
-        <p:spPr>
-          <a:xfrm>
-            <a:off x="7680960" y="1737360"/>
-            <a:ext cx="3962095" cy="3931920"/>
+            <a:ext cx="3545738" cy="2080260"/>
           </a:xfrm>
           <a:prstGeom prst="roundRect">
             <a:avLst>
@@ -3680,7 +4629,44 @@
         <p:txBody>
           <a:bodyPr rtlCol="0" anchor="ctr"/>
           <a:lstStyle/>
-          <a:p/>
+          <a:p>
+            <a:endParaRPr/>
+          </a:p>
+        </p:txBody>
+      </p:sp>
+      <p:sp>
+        <p:nvSpPr>
+          <p:cNvPr id="5" name="TextBox 4"/>
+          <p:cNvSpPr txBox="1"/>
+          <p:nvPr/>
+        </p:nvSpPr>
+        <p:spPr>
+          <a:xfrm>
+            <a:off x="777240" y="1965960"/>
+            <a:ext cx="3088538" cy="548640"/>
+          </a:xfrm>
+          <a:prstGeom prst="rect">
+            <a:avLst/>
+          </a:prstGeom>
+          <a:noFill/>
+        </p:spPr>
+        <p:txBody>
+          <a:bodyPr wrap="square" lIns="0" rIns="0" anchor="t">
+            <a:spAutoFit/>
+          </a:bodyPr>
+          <a:lstStyle/>
+          <a:p>
+            <a:pPr algn="l"/>
+            <a:r>
+              <a:rPr sz="1800" b="1">
+                <a:solidFill>
+                  <a:srgbClr val="FFFFFF"/>
+                </a:solidFill>
+                <a:latin typeface="Century Gothic"/>
+              </a:rPr>
+              <a:t>9:00</a:t>
+            </a:r>
+          </a:p>
         </p:txBody>
       </p:sp>
       <p:sp>
@@ -3691,8 +4677,8 @@
         </p:nvSpPr>
         <p:spPr>
           <a:xfrm>
-            <a:off x="7909560" y="1965960"/>
-            <a:ext cx="3504895" cy="548640"/>
+            <a:off x="777240" y="2468880"/>
+            <a:ext cx="3088538" cy="1165860"/>
           </a:xfrm>
           <a:prstGeom prst="rect">
             <a:avLst/>
@@ -3700,34 +4686,102 @@
           <a:noFill/>
         </p:spPr>
         <p:txBody>
-          <a:bodyPr wrap="square" anchor="t" lIns="0" rIns="0">
+          <a:bodyPr wrap="square" lIns="0" rIns="0" anchor="t">
             <a:spAutoFit/>
           </a:bodyPr>
           <a:lstStyle/>
           <a:p>
             <a:pPr algn="l"/>
             <a:r>
-              <a:rPr b="1" sz="1800">
-                <a:solidFill>
-                  <a:srgbClr val="FFFFFF"/>
-                </a:solidFill>
-                <a:latin typeface="Century Gothic"/>
-              </a:rPr>
-              <a:t>Entrega</a:t>
-            </a:r>
-          </a:p>
-        </p:txBody>
-      </p:sp>
-      <p:sp>
-        <p:nvSpPr>
-          <p:cNvPr id="7" name="TextBox 6"/>
+              <a:rPr sz="1400" b="0">
+                <a:solidFill>
+                  <a:srgbClr val="C9D6E3"/>
+                </a:solidFill>
+                <a:latin typeface="Century Gothic"/>
+              </a:rPr>
+              <a:t>Entorno listo</a:t>
+            </a:r>
+          </a:p>
+          <a:p>
+            <a:pPr algn="l"/>
+            <a:r>
+              <a:rPr sz="1400" b="0">
+                <a:solidFill>
+                  <a:srgbClr val="36B5FF"/>
+                </a:solidFill>
+                <a:latin typeface="Consolas"/>
+              </a:rPr>
+              <a:t>gradle run</a:t>
+            </a:r>
+            <a:r>
+              <a:rPr sz="1400" b="0">
+                <a:solidFill>
+                  <a:srgbClr val="C9D6E3"/>
+                </a:solidFill>
+                <a:latin typeface="Century Gothic"/>
+              </a:rPr>
+              <a:t> por primera vez</a:t>
+            </a:r>
+          </a:p>
+        </p:txBody>
+      </p:sp>
+      <p:sp>
+        <p:nvSpPr>
+          <p:cNvPr id="7" name="Rounded Rectangle 6"/>
+          <p:cNvSpPr/>
+          <p:nvPr/>
+        </p:nvSpPr>
+        <p:spPr>
+          <a:xfrm>
+            <a:off x="4322978" y="1737360"/>
+            <a:ext cx="3545738" cy="2080260"/>
+          </a:xfrm>
+          <a:prstGeom prst="roundRect">
+            <a:avLst>
+              <a:gd name="adj" fmla="val 6000"/>
+            </a:avLst>
+          </a:prstGeom>
+          <a:solidFill>
+            <a:srgbClr val="08264F"/>
+          </a:solidFill>
+          <a:ln w="15875">
+            <a:solidFill>
+              <a:srgbClr val="5EA7D8"/>
+            </a:solidFill>
+          </a:ln>
+        </p:spPr>
+        <p:style>
+          <a:lnRef idx="1">
+            <a:schemeClr val="accent1"/>
+          </a:lnRef>
+          <a:fillRef idx="3">
+            <a:schemeClr val="accent1"/>
+          </a:fillRef>
+          <a:effectRef idx="2">
+            <a:schemeClr val="accent1"/>
+          </a:effectRef>
+          <a:fontRef idx="minor">
+            <a:schemeClr val="lt1"/>
+          </a:fontRef>
+        </p:style>
+        <p:txBody>
+          <a:bodyPr rtlCol="0" anchor="ctr"/>
+          <a:lstStyle/>
+          <a:p>
+            <a:endParaRPr/>
+          </a:p>
+        </p:txBody>
+      </p:sp>
+      <p:sp>
+        <p:nvSpPr>
+          <p:cNvPr id="8" name="TextBox 7"/>
           <p:cNvSpPr txBox="1"/>
           <p:nvPr/>
         </p:nvSpPr>
         <p:spPr>
           <a:xfrm>
-            <a:off x="7909560" y="2468880"/>
-            <a:ext cx="3504895" cy="3017520"/>
+            <a:off x="4551578" y="1965960"/>
+            <a:ext cx="3088538" cy="548640"/>
           </a:xfrm>
           <a:prstGeom prst="rect">
             <a:avLst/>
@@ -3735,69 +4789,458 @@
           <a:noFill/>
         </p:spPr>
         <p:txBody>
-          <a:bodyPr wrap="square" anchor="t" lIns="0" rIns="0">
+          <a:bodyPr wrap="square" lIns="0" rIns="0" anchor="t">
             <a:spAutoFit/>
           </a:bodyPr>
           <a:lstStyle/>
           <a:p>
             <a:pPr algn="l"/>
             <a:r>
-              <a:rPr b="0" sz="1400">
+              <a:rPr sz="1800" b="1">
+                <a:solidFill>
+                  <a:srgbClr val="FFFFFF"/>
+                </a:solidFill>
+                <a:latin typeface="Century Gothic"/>
+              </a:rPr>
+              <a:t>9:20</a:t>
+            </a:r>
+          </a:p>
+        </p:txBody>
+      </p:sp>
+      <p:sp>
+        <p:nvSpPr>
+          <p:cNvPr id="9" name="TextBox 8"/>
+          <p:cNvSpPr txBox="1"/>
+          <p:nvPr/>
+        </p:nvSpPr>
+        <p:spPr>
+          <a:xfrm>
+            <a:off x="4551578" y="2468880"/>
+            <a:ext cx="3088538" cy="1165860"/>
+          </a:xfrm>
+          <a:prstGeom prst="rect">
+            <a:avLst/>
+          </a:prstGeom>
+          <a:noFill/>
+        </p:spPr>
+        <p:txBody>
+          <a:bodyPr wrap="square" lIns="0" rIns="0" anchor="t">
+            <a:spAutoFit/>
+          </a:bodyPr>
+          <a:lstStyle/>
+          <a:p>
+            <a:pPr algn="l"/>
+            <a:r>
+              <a:rPr sz="1400" b="0">
                 <a:solidFill>
                   <a:srgbClr val="C9D6E3"/>
                 </a:solidFill>
                 <a:latin typeface="Century Gothic"/>
               </a:rPr>
-              <a:t>Miércoles 23 de septiembre de 2026, 8:00 a.m.</a:t>
+              <a:t>Variables</a:t>
             </a:r>
           </a:p>
           <a:p>
             <a:pPr algn="l"/>
             <a:r>
-              <a:rPr b="0" sz="1400">
+              <a:rPr sz="1400" b="0">
                 <a:solidFill>
                   <a:srgbClr val="C9D6E3"/>
                 </a:solidFill>
                 <a:latin typeface="Century Gothic"/>
               </a:rPr>
-              <a:t>Repositorio en GitHub o .zip sin la carpeta build</a:t>
-            </a:r>
-          </a:p>
+              <a:t>if, switch y ciclos</a:t>
+            </a:r>
+          </a:p>
+        </p:txBody>
+      </p:sp>
+      <p:sp>
+        <p:nvSpPr>
+          <p:cNvPr id="10" name="Rounded Rectangle 9"/>
+          <p:cNvSpPr/>
+          <p:nvPr/>
+        </p:nvSpPr>
+        <p:spPr>
+          <a:xfrm>
+            <a:off x="8097316" y="1737360"/>
+            <a:ext cx="3545738" cy="2080260"/>
+          </a:xfrm>
+          <a:prstGeom prst="roundRect">
+            <a:avLst>
+              <a:gd name="adj" fmla="val 6000"/>
+            </a:avLst>
+          </a:prstGeom>
+          <a:solidFill>
+            <a:srgbClr val="0B2C59"/>
+          </a:solidFill>
+          <a:ln w="15875">
+            <a:solidFill>
+              <a:srgbClr val="5EA7D8"/>
+            </a:solidFill>
+          </a:ln>
+        </p:spPr>
+        <p:style>
+          <a:lnRef idx="1">
+            <a:schemeClr val="accent1"/>
+          </a:lnRef>
+          <a:fillRef idx="3">
+            <a:schemeClr val="accent1"/>
+          </a:fillRef>
+          <a:effectRef idx="2">
+            <a:schemeClr val="accent1"/>
+          </a:effectRef>
+          <a:fontRef idx="minor">
+            <a:schemeClr val="lt1"/>
+          </a:fontRef>
+        </p:style>
+        <p:txBody>
+          <a:bodyPr rtlCol="0" anchor="ctr"/>
+          <a:lstStyle/>
+          <a:p>
+            <a:endParaRPr/>
+          </a:p>
+        </p:txBody>
+      </p:sp>
+      <p:sp>
+        <p:nvSpPr>
+          <p:cNvPr id="11" name="TextBox 10"/>
+          <p:cNvSpPr txBox="1"/>
+          <p:nvPr/>
+        </p:nvSpPr>
+        <p:spPr>
+          <a:xfrm>
+            <a:off x="8325916" y="1965960"/>
+            <a:ext cx="3088538" cy="548640"/>
+          </a:xfrm>
+          <a:prstGeom prst="rect">
+            <a:avLst/>
+          </a:prstGeom>
+          <a:noFill/>
+        </p:spPr>
+        <p:txBody>
+          <a:bodyPr wrap="square" lIns="0" rIns="0" anchor="t">
+            <a:spAutoFit/>
+          </a:bodyPr>
+          <a:lstStyle/>
           <a:p>
             <a:pPr algn="l"/>
             <a:r>
-              <a:rPr b="0" sz="1400">
+              <a:rPr sz="1800" b="1">
+                <a:solidFill>
+                  <a:srgbClr val="FFFFFF"/>
+                </a:solidFill>
+                <a:latin typeface="Century Gothic"/>
+              </a:rPr>
+              <a:t>10:00</a:t>
+            </a:r>
+          </a:p>
+        </p:txBody>
+      </p:sp>
+      <p:sp>
+        <p:nvSpPr>
+          <p:cNvPr id="12" name="TextBox 11"/>
+          <p:cNvSpPr txBox="1"/>
+          <p:nvPr/>
+        </p:nvSpPr>
+        <p:spPr>
+          <a:xfrm>
+            <a:off x="8325916" y="2468880"/>
+            <a:ext cx="3088538" cy="1165860"/>
+          </a:xfrm>
+          <a:prstGeom prst="rect">
+            <a:avLst/>
+          </a:prstGeom>
+          <a:noFill/>
+        </p:spPr>
+        <p:txBody>
+          <a:bodyPr wrap="square" lIns="0" rIns="0" anchor="t">
+            <a:spAutoFit/>
+          </a:bodyPr>
+          <a:lstStyle/>
+          <a:p>
+            <a:pPr algn="l"/>
+            <a:r>
+              <a:rPr sz="1400" b="0">
                 <a:solidFill>
                   <a:srgbClr val="C9D6E3"/>
                 </a:solidFill>
                 <a:latin typeface="Century Gothic"/>
               </a:rPr>
-              <a:t>Captura de </a:t>
-            </a:r>
-            <a:r>
-              <a:rPr b="0" sz="1400">
-                <a:solidFill>
-                  <a:srgbClr val="36B5FF"/>
-                </a:solidFill>
-                <a:latin typeface="Consolas"/>
-              </a:rPr>
-              <a:t>gradle run</a:t>
-            </a:r>
-            <a:r>
-              <a:rPr b="0" sz="1400">
+              <a:t>Clases y objetos</a:t>
+            </a:r>
+          </a:p>
+          <a:p>
+            <a:pPr algn="l"/>
+            <a:r>
+              <a:rPr sz="1400" b="0">
                 <a:solidFill>
                   <a:srgbClr val="C9D6E3"/>
                 </a:solidFill>
                 <a:latin typeface="Century Gothic"/>
               </a:rPr>
-              <a:t> con la salida</a:t>
-            </a:r>
-          </a:p>
-        </p:txBody>
-      </p:sp>
-      <p:sp>
-        <p:nvSpPr>
-          <p:cNvPr id="8" name="TextBox 7"/>
+              <a:t>Encapsulamiento</a:t>
+            </a:r>
+          </a:p>
+        </p:txBody>
+      </p:sp>
+      <p:sp>
+        <p:nvSpPr>
+          <p:cNvPr id="13" name="Rounded Rectangle 12"/>
+          <p:cNvSpPr/>
+          <p:nvPr/>
+        </p:nvSpPr>
+        <p:spPr>
+          <a:xfrm>
+            <a:off x="548640" y="4046220"/>
+            <a:ext cx="3545738" cy="2080260"/>
+          </a:xfrm>
+          <a:prstGeom prst="roundRect">
+            <a:avLst>
+              <a:gd name="adj" fmla="val 6000"/>
+            </a:avLst>
+          </a:prstGeom>
+          <a:solidFill>
+            <a:srgbClr val="08264F"/>
+          </a:solidFill>
+          <a:ln w="15875">
+            <a:solidFill>
+              <a:srgbClr val="5EA7D8"/>
+            </a:solidFill>
+          </a:ln>
+        </p:spPr>
+        <p:style>
+          <a:lnRef idx="1">
+            <a:schemeClr val="accent1"/>
+          </a:lnRef>
+          <a:fillRef idx="3">
+            <a:schemeClr val="accent1"/>
+          </a:fillRef>
+          <a:effectRef idx="2">
+            <a:schemeClr val="accent1"/>
+          </a:effectRef>
+          <a:fontRef idx="minor">
+            <a:schemeClr val="lt1"/>
+          </a:fontRef>
+        </p:style>
+        <p:txBody>
+          <a:bodyPr rtlCol="0" anchor="ctr"/>
+          <a:lstStyle/>
+          <a:p>
+            <a:endParaRPr/>
+          </a:p>
+        </p:txBody>
+      </p:sp>
+      <p:sp>
+        <p:nvSpPr>
+          <p:cNvPr id="14" name="TextBox 13"/>
+          <p:cNvSpPr txBox="1"/>
+          <p:nvPr/>
+        </p:nvSpPr>
+        <p:spPr>
+          <a:xfrm>
+            <a:off x="777240" y="4274820"/>
+            <a:ext cx="3088538" cy="548640"/>
+          </a:xfrm>
+          <a:prstGeom prst="rect">
+            <a:avLst/>
+          </a:prstGeom>
+          <a:noFill/>
+        </p:spPr>
+        <p:txBody>
+          <a:bodyPr wrap="square" lIns="0" rIns="0" anchor="t">
+            <a:spAutoFit/>
+          </a:bodyPr>
+          <a:lstStyle/>
+          <a:p>
+            <a:pPr algn="l"/>
+            <a:r>
+              <a:rPr sz="1800" b="1">
+                <a:solidFill>
+                  <a:srgbClr val="FFFFFF"/>
+                </a:solidFill>
+                <a:latin typeface="Century Gothic"/>
+              </a:rPr>
+              <a:t>10:40</a:t>
+            </a:r>
+          </a:p>
+        </p:txBody>
+      </p:sp>
+      <p:sp>
+        <p:nvSpPr>
+          <p:cNvPr id="15" name="TextBox 14"/>
+          <p:cNvSpPr txBox="1"/>
+          <p:nvPr/>
+        </p:nvSpPr>
+        <p:spPr>
+          <a:xfrm>
+            <a:off x="777240" y="4777740"/>
+            <a:ext cx="3088538" cy="1165860"/>
+          </a:xfrm>
+          <a:prstGeom prst="rect">
+            <a:avLst/>
+          </a:prstGeom>
+          <a:noFill/>
+        </p:spPr>
+        <p:txBody>
+          <a:bodyPr wrap="square" lIns="0" rIns="0" anchor="t">
+            <a:spAutoFit/>
+          </a:bodyPr>
+          <a:lstStyle/>
+          <a:p>
+            <a:pPr algn="l"/>
+            <a:r>
+              <a:rPr sz="1400" b="0">
+                <a:solidFill>
+                  <a:srgbClr val="C9D6E3"/>
+                </a:solidFill>
+                <a:latin typeface="Century Gothic"/>
+              </a:rPr>
+              <a:t>Pausa</a:t>
+            </a:r>
+          </a:p>
+          <a:p>
+            <a:pPr algn="l"/>
+            <a:r>
+              <a:rPr sz="1400" b="0">
+                <a:solidFill>
+                  <a:srgbClr val="C9D6E3"/>
+                </a:solidFill>
+                <a:latin typeface="Century Gothic"/>
+              </a:rPr>
+              <a:t>15 minutos</a:t>
+            </a:r>
+          </a:p>
+        </p:txBody>
+      </p:sp>
+      <p:sp>
+        <p:nvSpPr>
+          <p:cNvPr id="16" name="Rounded Rectangle 15"/>
+          <p:cNvSpPr/>
+          <p:nvPr/>
+        </p:nvSpPr>
+        <p:spPr>
+          <a:xfrm>
+            <a:off x="4322978" y="4046220"/>
+            <a:ext cx="3545738" cy="2080260"/>
+          </a:xfrm>
+          <a:prstGeom prst="roundRect">
+            <a:avLst>
+              <a:gd name="adj" fmla="val 6000"/>
+            </a:avLst>
+          </a:prstGeom>
+          <a:solidFill>
+            <a:srgbClr val="0B2C59"/>
+          </a:solidFill>
+          <a:ln w="15875">
+            <a:solidFill>
+              <a:srgbClr val="5EA7D8"/>
+            </a:solidFill>
+          </a:ln>
+        </p:spPr>
+        <p:style>
+          <a:lnRef idx="1">
+            <a:schemeClr val="accent1"/>
+          </a:lnRef>
+          <a:fillRef idx="3">
+            <a:schemeClr val="accent1"/>
+          </a:fillRef>
+          <a:effectRef idx="2">
+            <a:schemeClr val="accent1"/>
+          </a:effectRef>
+          <a:fontRef idx="minor">
+            <a:schemeClr val="lt1"/>
+          </a:fontRef>
+        </p:style>
+        <p:txBody>
+          <a:bodyPr rtlCol="0" anchor="ctr"/>
+          <a:lstStyle/>
+          <a:p>
+            <a:endParaRPr/>
+          </a:p>
+        </p:txBody>
+      </p:sp>
+      <p:sp>
+        <p:nvSpPr>
+          <p:cNvPr id="17" name="TextBox 16"/>
+          <p:cNvSpPr txBox="1"/>
+          <p:nvPr/>
+        </p:nvSpPr>
+        <p:spPr>
+          <a:xfrm>
+            <a:off x="4551578" y="4274820"/>
+            <a:ext cx="3088538" cy="548640"/>
+          </a:xfrm>
+          <a:prstGeom prst="rect">
+            <a:avLst/>
+          </a:prstGeom>
+          <a:noFill/>
+        </p:spPr>
+        <p:txBody>
+          <a:bodyPr wrap="square" lIns="0" rIns="0" anchor="t">
+            <a:spAutoFit/>
+          </a:bodyPr>
+          <a:lstStyle/>
+          <a:p>
+            <a:pPr algn="l"/>
+            <a:r>
+              <a:rPr sz="1800" b="1">
+                <a:solidFill>
+                  <a:srgbClr val="FFFFFF"/>
+                </a:solidFill>
+                <a:latin typeface="Century Gothic"/>
+              </a:rPr>
+              <a:t>10:55</a:t>
+            </a:r>
+          </a:p>
+        </p:txBody>
+      </p:sp>
+      <p:sp>
+        <p:nvSpPr>
+          <p:cNvPr id="18" name="TextBox 17"/>
+          <p:cNvSpPr txBox="1"/>
+          <p:nvPr/>
+        </p:nvSpPr>
+        <p:spPr>
+          <a:xfrm>
+            <a:off x="4551578" y="4777740"/>
+            <a:ext cx="3088538" cy="523220"/>
+          </a:xfrm>
+          <a:prstGeom prst="rect">
+            <a:avLst/>
+          </a:prstGeom>
+          <a:noFill/>
+        </p:spPr>
+        <p:txBody>
+          <a:bodyPr wrap="square" lIns="0" rIns="0" anchor="t">
+            <a:spAutoFit/>
+          </a:bodyPr>
+          <a:lstStyle/>
+          <a:p>
+            <a:pPr algn="l"/>
+            <a:r>
+              <a:rPr sz="1400" b="0" dirty="0">
+                <a:solidFill>
+                  <a:srgbClr val="C9D6E3"/>
+                </a:solidFill>
+                <a:latin typeface="Century Gothic"/>
+              </a:rPr>
+              <a:t>Herencia</a:t>
+            </a:r>
+          </a:p>
+          <a:p>
+            <a:pPr algn="l"/>
+            <a:endParaRPr sz="1400" b="0" dirty="0">
+              <a:solidFill>
+                <a:srgbClr val="C9D6E3"/>
+              </a:solidFill>
+              <a:latin typeface="Century Gothic"/>
+            </a:endParaRPr>
+          </a:p>
+        </p:txBody>
+      </p:sp>
+      <p:sp>
+        <p:nvSpPr>
+          <p:cNvPr id="22" name="TextBox 21"/>
           <p:cNvSpPr txBox="1"/>
           <p:nvPr/>
         </p:nvSpPr>
@@ -3812,14 +5255,14 @@
           <a:noFill/>
         </p:spPr>
         <p:txBody>
-          <a:bodyPr wrap="square" anchor="t" lIns="0" rIns="0">
+          <a:bodyPr wrap="square" lIns="0" rIns="0" anchor="t">
             <a:spAutoFit/>
           </a:bodyPr>
           <a:lstStyle/>
           <a:p>
             <a:pPr algn="l"/>
             <a:r>
-              <a:rPr b="0" sz="1200">
+              <a:rPr sz="1200" b="0">
                 <a:solidFill>
                   <a:srgbClr val="C9D6E3"/>
                 </a:solidFill>
@@ -3832,7 +5275,7 @@
       </p:sp>
       <p:sp>
         <p:nvSpPr>
-          <p:cNvPr id="9" name="TextBox 8"/>
+          <p:cNvPr id="23" name="TextBox 22"/>
           <p:cNvSpPr txBox="1"/>
           <p:nvPr/>
         </p:nvSpPr>
@@ -3847,20 +5290,20 @@
           <a:noFill/>
         </p:spPr>
         <p:txBody>
-          <a:bodyPr wrap="square" anchor="t" lIns="0" rIns="0">
+          <a:bodyPr wrap="square" lIns="0" rIns="0" anchor="t">
             <a:spAutoFit/>
           </a:bodyPr>
           <a:lstStyle/>
           <a:p>
             <a:pPr algn="r"/>
             <a:r>
-              <a:rPr b="0" sz="1200">
+              <a:rPr sz="1200" b="0">
                 <a:solidFill>
                   <a:srgbClr val="C9D6E3"/>
                 </a:solidFill>
                 <a:latin typeface="Century Gothic"/>
               </a:rPr>
-              <a:t>10</a:t>
+              <a:t>2</a:t>
             </a:r>
           </a:p>
         </p:txBody>
@@ -3873,8 +5316,8 @@
 </p:sld>
 </file>
 
-<file path=ppt/slides/slide2.xml><?xml version="1.0" encoding="utf-8"?>
-<p:sld xmlns:a="http://schemas.openxmlformats.org/drawingml/2006/main" xmlns:p="http://schemas.openxmlformats.org/presentationml/2006/main" xmlns:r="http://schemas.openxmlformats.org/officeDocument/2006/relationships">
+<file path=ppt/slides/slide3.xml><?xml version="1.0" encoding="utf-8"?>
+<p:sld xmlns:a="http://schemas.openxmlformats.org/drawingml/2006/main" xmlns:r="http://schemas.openxmlformats.org/officeDocument/2006/relationships" xmlns:p="http://schemas.openxmlformats.org/presentationml/2006/main">
   <p:cSld>
     <p:bg>
       <p:bgPr>
@@ -3890,7 +5333,14 @@
         <p:cNvGrpSpPr/>
         <p:nvPr/>
       </p:nvGrpSpPr>
-      <p:grpSpPr/>
+      <p:grpSpPr>
+        <a:xfrm>
+          <a:off x="0" y="0"/>
+          <a:ext cx="0" cy="0"/>
+          <a:chOff x="0" y="0"/>
+          <a:chExt cx="0" cy="0"/>
+        </a:xfrm>
+      </p:grpSpPr>
       <p:sp>
         <p:nvSpPr>
           <p:cNvPr id="2" name="Rounded Rectangle 1"/>
@@ -3929,18 +5379,18 @@
           </a:fontRef>
         </p:style>
         <p:txBody>
-          <a:bodyPr rtlCol="0" anchor="ctr" tIns="0" bIns="0" wrap="none"/>
+          <a:bodyPr wrap="none" tIns="0" bIns="0" rtlCol="0" anchor="ctr"/>
           <a:lstStyle/>
           <a:p>
             <a:pPr algn="ctr"/>
             <a:r>
-              <a:rPr b="1" sz="1200">
-                <a:solidFill>
-                  <a:srgbClr val="FFFFFF"/>
-                </a:solidFill>
-                <a:latin typeface="Century Gothic"/>
-              </a:rPr>
-              <a:t>AGENDA</a:t>
+              <a:rPr sz="1200" b="1">
+                <a:solidFill>
+                  <a:srgbClr val="FFFFFF"/>
+                </a:solidFill>
+                <a:latin typeface="Century Gothic"/>
+              </a:rPr>
+              <a:t>TEMA 1</a:t>
             </a:r>
           </a:p>
         </p:txBody>
@@ -3962,21 +5412,72 @@
           <a:noFill/>
         </p:spPr>
         <p:txBody>
-          <a:bodyPr wrap="square" anchor="t" lIns="0" rIns="0">
+          <a:bodyPr wrap="square" lIns="0" rIns="0" anchor="t">
             <a:spAutoFit/>
           </a:bodyPr>
           <a:lstStyle/>
           <a:p>
             <a:pPr algn="l"/>
             <a:r>
-              <a:rPr b="1" sz="2800">
-                <a:solidFill>
-                  <a:srgbClr val="FFFFFF"/>
-                </a:solidFill>
-                <a:latin typeface="Century Gothic"/>
-              </a:rPr>
-              <a:t>Plan de la mañana</a:t>
-            </a:r>
+              <a:rPr sz="2800" b="1" dirty="0">
+                <a:solidFill>
+                  <a:srgbClr val="FFFFFF"/>
+                </a:solidFill>
+                <a:latin typeface="Century Gothic"/>
+              </a:rPr>
+              <a:t>Una variable es </a:t>
+            </a:r>
+            <a:r>
+              <a:rPr sz="2800" b="1" dirty="0" err="1">
+                <a:solidFill>
+                  <a:srgbClr val="FFFFFF"/>
+                </a:solidFill>
+                <a:latin typeface="Century Gothic"/>
+              </a:rPr>
+              <a:t>una</a:t>
+            </a:r>
+            <a:r>
+              <a:rPr sz="2800" b="1" dirty="0">
+                <a:solidFill>
+                  <a:srgbClr val="FFFFFF"/>
+                </a:solidFill>
+                <a:latin typeface="Century Gothic"/>
+              </a:rPr>
+              <a:t> </a:t>
+            </a:r>
+            <a:r>
+              <a:rPr sz="2800" b="1" dirty="0" err="1">
+                <a:solidFill>
+                  <a:srgbClr val="FFFFFF"/>
+                </a:solidFill>
+                <a:latin typeface="Century Gothic"/>
+              </a:rPr>
+              <a:t>caja</a:t>
+            </a:r>
+            <a:r>
+              <a:rPr sz="2800" b="1" dirty="0">
+                <a:solidFill>
+                  <a:srgbClr val="FFFFFF"/>
+                </a:solidFill>
+                <a:latin typeface="Century Gothic"/>
+              </a:rPr>
+              <a:t> con </a:t>
+            </a:r>
+            <a:r>
+              <a:rPr sz="2800" b="1" dirty="0" err="1">
+                <a:solidFill>
+                  <a:srgbClr val="FFFFFF"/>
+                </a:solidFill>
+                <a:latin typeface="Century Gothic"/>
+              </a:rPr>
+              <a:t>etiqueta</a:t>
+            </a:r>
+            <a:endParaRPr sz="2800" b="1" dirty="0">
+              <a:solidFill>
+                <a:srgbClr val="FFFFFF"/>
+              </a:solidFill>
+              <a:latin typeface="Century Gothic"/>
+            </a:endParaRPr>
           </a:p>
         </p:txBody>
       </p:sp>
@@ -3989,17 +5490,17 @@
         <p:spPr>
           <a:xfrm>
             <a:off x="548640" y="1737360"/>
-            <a:ext cx="3545738" cy="2080260"/>
+            <a:ext cx="6949440" cy="4389120"/>
           </a:xfrm>
           <a:prstGeom prst="roundRect">
             <a:avLst>
-              <a:gd name="adj" fmla="val 6000"/>
+              <a:gd name="adj" fmla="val 3000"/>
             </a:avLst>
           </a:prstGeom>
           <a:solidFill>
-            <a:srgbClr val="0B2C59"/>
+            <a:srgbClr val="0A1B33"/>
           </a:solidFill>
-          <a:ln w="15875">
+          <a:ln w="12700">
             <a:solidFill>
               <a:srgbClr val="5EA7D8"/>
             </a:solidFill>
@@ -4022,7 +5523,10 @@
         <p:txBody>
           <a:bodyPr rtlCol="0" anchor="ctr"/>
           <a:lstStyle/>
-          <a:p/>
+          <a:p>
+            <a:pPr algn="ctr"/>
+            <a:endParaRPr/>
+          </a:p>
         </p:txBody>
       </p:sp>
       <p:sp>
@@ -4033,8 +5537,8 @@
         </p:nvSpPr>
         <p:spPr>
           <a:xfrm>
-            <a:off x="777240" y="1965960"/>
-            <a:ext cx="3088538" cy="548640"/>
+            <a:off x="777240" y="1847088"/>
+            <a:ext cx="2743200" cy="274320"/>
           </a:xfrm>
           <a:prstGeom prst="rect">
             <a:avLst/>
@@ -4042,20 +5546,20 @@
           <a:noFill/>
         </p:spPr>
         <p:txBody>
-          <a:bodyPr wrap="square" anchor="t" lIns="0" rIns="0">
+          <a:bodyPr wrap="square" lIns="0" rIns="0" anchor="t">
             <a:spAutoFit/>
           </a:bodyPr>
           <a:lstStyle/>
           <a:p>
             <a:pPr algn="l"/>
             <a:r>
-              <a:rPr b="1" sz="1800">
-                <a:solidFill>
-                  <a:srgbClr val="FFFFFF"/>
-                </a:solidFill>
-                <a:latin typeface="Century Gothic"/>
-              </a:rPr>
-              <a:t>9:00</a:t>
+              <a:rPr sz="1200" b="1">
+                <a:solidFill>
+                  <a:srgbClr val="36B5FF"/>
+                </a:solidFill>
+                <a:latin typeface="Century Gothic"/>
+              </a:rPr>
+              <a:t>Java</a:t>
             </a:r>
           </a:p>
         </p:txBody>
@@ -4068,8 +5572,8 @@
         </p:nvSpPr>
         <p:spPr>
           <a:xfrm>
-            <a:off x="777240" y="2468880"/>
-            <a:ext cx="3088538" cy="1165860"/>
+            <a:off x="777240" y="2194560"/>
+            <a:ext cx="6492240" cy="3840480"/>
           </a:xfrm>
           <a:prstGeom prst="rect">
             <a:avLst/>
@@ -4077,88 +5581,610 @@
           <a:noFill/>
         </p:spPr>
         <p:txBody>
-          <a:bodyPr wrap="square" anchor="t" lIns="0" rIns="0">
+          <a:bodyPr wrap="square">
             <a:spAutoFit/>
           </a:bodyPr>
           <a:lstStyle/>
           <a:p>
-            <a:pPr algn="l"/>
-            <a:r>
-              <a:rPr b="0" sz="1400">
-                <a:solidFill>
-                  <a:srgbClr val="C9D6E3"/>
-                </a:solidFill>
-                <a:latin typeface="Century Gothic"/>
-              </a:rPr>
-              <a:t>Entorno listo</a:t>
-            </a:r>
-          </a:p>
-          <a:p>
-            <a:pPr algn="l"/>
-            <a:r>
-              <a:rPr b="0" sz="1400">
+            <a:r>
+              <a:rPr sz="1300" dirty="0">
+                <a:solidFill>
+                  <a:srgbClr val="FFFFFF"/>
+                </a:solidFill>
+                <a:latin typeface="Consolas"/>
+              </a:rPr>
+              <a:t>int </a:t>
+            </a:r>
+            <a:r>
+              <a:rPr sz="1300" dirty="0" err="1">
+                <a:solidFill>
+                  <a:srgbClr val="FFFFFF"/>
+                </a:solidFill>
+                <a:latin typeface="Consolas"/>
+              </a:rPr>
+              <a:t>edad</a:t>
+            </a:r>
+            <a:r>
+              <a:rPr sz="1300" dirty="0">
+                <a:solidFill>
+                  <a:srgbClr val="FFFFFF"/>
+                </a:solidFill>
+                <a:latin typeface="Consolas"/>
+              </a:rPr>
+              <a:t> = 20;</a:t>
+            </a:r>
+          </a:p>
+          <a:p>
+            <a:r>
+              <a:rPr sz="1300" dirty="0">
+                <a:solidFill>
+                  <a:srgbClr val="FFFFFF"/>
+                </a:solidFill>
+                <a:latin typeface="Consolas"/>
+              </a:rPr>
+              <a:t>double </a:t>
+            </a:r>
+            <a:r>
+              <a:rPr sz="1300" dirty="0" err="1">
+                <a:solidFill>
+                  <a:srgbClr val="FFFFFF"/>
+                </a:solidFill>
+                <a:latin typeface="Consolas"/>
+              </a:rPr>
+              <a:t>precio</a:t>
+            </a:r>
+            <a:r>
+              <a:rPr sz="1300" dirty="0">
+                <a:solidFill>
+                  <a:srgbClr val="FFFFFF"/>
+                </a:solidFill>
+                <a:latin typeface="Consolas"/>
+              </a:rPr>
+              <a:t> = 15500.50;</a:t>
+            </a:r>
+          </a:p>
+          <a:p>
+            <a:r>
+              <a:rPr sz="1300" dirty="0" err="1">
+                <a:solidFill>
+                  <a:srgbClr val="FFFFFF"/>
+                </a:solidFill>
+                <a:latin typeface="Consolas"/>
+              </a:rPr>
+              <a:t>boolean</a:t>
+            </a:r>
+            <a:r>
+              <a:rPr sz="1300" dirty="0">
+                <a:solidFill>
+                  <a:srgbClr val="FFFFFF"/>
+                </a:solidFill>
+                <a:latin typeface="Consolas"/>
+              </a:rPr>
+              <a:t> </a:t>
+            </a:r>
+            <a:r>
+              <a:rPr sz="1300" dirty="0" err="1">
+                <a:solidFill>
+                  <a:srgbClr val="FFFFFF"/>
+                </a:solidFill>
+                <a:latin typeface="Consolas"/>
+              </a:rPr>
+              <a:t>estaActivo</a:t>
+            </a:r>
+            <a:r>
+              <a:rPr sz="1300" dirty="0">
+                <a:solidFill>
+                  <a:srgbClr val="FFFFFF"/>
+                </a:solidFill>
+                <a:latin typeface="Consolas"/>
+              </a:rPr>
+              <a:t> = true;</a:t>
+            </a:r>
+          </a:p>
+          <a:p>
+            <a:r>
+              <a:rPr sz="1300" dirty="0">
+                <a:solidFill>
+                  <a:srgbClr val="FFFFFF"/>
+                </a:solidFill>
+                <a:latin typeface="Consolas"/>
+              </a:rPr>
+              <a:t>char </a:t>
+            </a:r>
+            <a:r>
+              <a:rPr sz="1300" dirty="0" err="1">
+                <a:solidFill>
+                  <a:srgbClr val="FFFFFF"/>
+                </a:solidFill>
+                <a:latin typeface="Consolas"/>
+              </a:rPr>
+              <a:t>inicial</a:t>
+            </a:r>
+            <a:r>
+              <a:rPr sz="1300" dirty="0">
+                <a:solidFill>
+                  <a:srgbClr val="FFFFFF"/>
+                </a:solidFill>
+                <a:latin typeface="Consolas"/>
+              </a:rPr>
+              <a:t> = 'D';</a:t>
+            </a:r>
+          </a:p>
+          <a:p>
+            <a:r>
+              <a:rPr sz="1300" dirty="0">
+                <a:solidFill>
+                  <a:srgbClr val="FFFFFF"/>
+                </a:solidFill>
+                <a:latin typeface="Consolas"/>
+              </a:rPr>
+              <a:t>String </a:t>
+            </a:r>
+            <a:r>
+              <a:rPr sz="1300" dirty="0" err="1">
+                <a:solidFill>
+                  <a:srgbClr val="FFFFFF"/>
+                </a:solidFill>
+                <a:latin typeface="Consolas"/>
+              </a:rPr>
+              <a:t>nombre</a:t>
+            </a:r>
+            <a:r>
+              <a:rPr sz="1300" dirty="0">
+                <a:solidFill>
+                  <a:srgbClr val="FFFFFF"/>
+                </a:solidFill>
+                <a:latin typeface="Consolas"/>
+              </a:rPr>
+              <a:t> = "Diego";</a:t>
+            </a:r>
+          </a:p>
+          <a:p>
+            <a:r>
+              <a:rPr sz="1300" dirty="0">
+                <a:solidFill>
+                  <a:srgbClr val="FFFFFF"/>
+                </a:solidFill>
+                <a:latin typeface="Consolas"/>
+              </a:rPr>
+              <a:t> </a:t>
+            </a:r>
+          </a:p>
+          <a:p>
+            <a:r>
+              <a:rPr sz="1300" dirty="0">
+                <a:solidFill>
+                  <a:srgbClr val="FFFFFF"/>
+                </a:solidFill>
+                <a:latin typeface="Consolas"/>
+              </a:rPr>
+              <a:t>int </a:t>
+            </a:r>
+            <a:r>
+              <a:rPr sz="1300" dirty="0" err="1">
+                <a:solidFill>
+                  <a:srgbClr val="FFFFFF"/>
+                </a:solidFill>
+                <a:latin typeface="Consolas"/>
+              </a:rPr>
+              <a:t>edadEnCincoAnios</a:t>
+            </a:r>
+            <a:r>
+              <a:rPr sz="1300" dirty="0">
+                <a:solidFill>
+                  <a:srgbClr val="FFFFFF"/>
+                </a:solidFill>
+                <a:latin typeface="Consolas"/>
+              </a:rPr>
+              <a:t> = </a:t>
+            </a:r>
+            <a:r>
+              <a:rPr sz="1300" dirty="0" err="1">
+                <a:solidFill>
+                  <a:srgbClr val="FFFFFF"/>
+                </a:solidFill>
+                <a:latin typeface="Consolas"/>
+              </a:rPr>
+              <a:t>edad</a:t>
+            </a:r>
+            <a:r>
+              <a:rPr sz="1300" dirty="0">
+                <a:solidFill>
+                  <a:srgbClr val="FFFFFF"/>
+                </a:solidFill>
+                <a:latin typeface="Consolas"/>
+              </a:rPr>
+              <a:t> + 5;</a:t>
+            </a:r>
+          </a:p>
+          <a:p>
+            <a:r>
+              <a:rPr sz="1300" dirty="0">
+                <a:solidFill>
+                  <a:srgbClr val="FFFFFF"/>
+                </a:solidFill>
+                <a:latin typeface="Consolas"/>
+              </a:rPr>
+              <a:t>String </a:t>
+            </a:r>
+            <a:r>
+              <a:rPr sz="1300" dirty="0" err="1">
+                <a:solidFill>
+                  <a:srgbClr val="FFFFFF"/>
+                </a:solidFill>
+                <a:latin typeface="Consolas"/>
+              </a:rPr>
+              <a:t>saludo</a:t>
+            </a:r>
+            <a:r>
+              <a:rPr sz="1300" dirty="0">
+                <a:solidFill>
+                  <a:srgbClr val="FFFFFF"/>
+                </a:solidFill>
+                <a:latin typeface="Consolas"/>
+              </a:rPr>
+              <a:t> = "Hola, " + </a:t>
+            </a:r>
+            <a:r>
+              <a:rPr sz="1300" dirty="0" err="1">
+                <a:solidFill>
+                  <a:srgbClr val="FFFFFF"/>
+                </a:solidFill>
+                <a:latin typeface="Consolas"/>
+              </a:rPr>
+              <a:t>nombre</a:t>
+            </a:r>
+            <a:r>
+              <a:rPr sz="1300" dirty="0">
+                <a:solidFill>
+                  <a:srgbClr val="FFFFFF"/>
+                </a:solidFill>
+                <a:latin typeface="Consolas"/>
+              </a:rPr>
+              <a:t>;</a:t>
+            </a:r>
+          </a:p>
+        </p:txBody>
+      </p:sp>
+      <p:sp>
+        <p:nvSpPr>
+          <p:cNvPr id="7" name="TextBox 6"/>
+          <p:cNvSpPr txBox="1"/>
+          <p:nvPr/>
+        </p:nvSpPr>
+        <p:spPr>
+          <a:xfrm>
+            <a:off x="7863840" y="1737360"/>
+            <a:ext cx="3779215" cy="4389120"/>
+          </a:xfrm>
+          <a:prstGeom prst="rect">
+            <a:avLst/>
+          </a:prstGeom>
+          <a:noFill/>
+        </p:spPr>
+        <p:txBody>
+          <a:bodyPr wrap="square">
+            <a:spAutoFit/>
+          </a:bodyPr>
+          <a:lstStyle/>
+          <a:p>
+            <a:pPr>
+              <a:spcAft>
+                <a:spcPts val="1000"/>
+              </a:spcAft>
+            </a:pPr>
+            <a:r>
+              <a:rPr sz="1600" b="1" dirty="0">
                 <a:solidFill>
                   <a:srgbClr val="36B5FF"/>
                 </a:solidFill>
-                <a:latin typeface="Consolas"/>
-              </a:rPr>
-              <a:t>gradle run</a:t>
-            </a:r>
-            <a:r>
-              <a:rPr b="0" sz="1400">
-                <a:solidFill>
-                  <a:srgbClr val="C9D6E3"/>
-                </a:solidFill>
-                <a:latin typeface="Century Gothic"/>
-              </a:rPr>
-              <a:t> por primera vez</a:t>
-            </a:r>
-          </a:p>
-        </p:txBody>
-      </p:sp>
-      <p:sp>
-        <p:nvSpPr>
-          <p:cNvPr id="7" name="Rounded Rectangle 6"/>
-          <p:cNvSpPr/>
-          <p:nvPr/>
-        </p:nvSpPr>
-        <p:spPr>
-          <a:xfrm>
-            <a:off x="4322978" y="1737360"/>
-            <a:ext cx="3545738" cy="2080260"/>
-          </a:xfrm>
-          <a:prstGeom prst="roundRect">
-            <a:avLst>
-              <a:gd name="adj" fmla="val 6000"/>
-            </a:avLst>
-          </a:prstGeom>
-          <a:solidFill>
-            <a:srgbClr val="08264F"/>
-          </a:solidFill>
-          <a:ln w="15875">
-            <a:solidFill>
-              <a:srgbClr val="5EA7D8"/>
-            </a:solidFill>
-          </a:ln>
-        </p:spPr>
-        <p:style>
-          <a:lnRef idx="1">
-            <a:schemeClr val="accent1"/>
-          </a:lnRef>
-          <a:fillRef idx="3">
-            <a:schemeClr val="accent1"/>
-          </a:fillRef>
-          <a:effectRef idx="2">
-            <a:schemeClr val="accent1"/>
-          </a:effectRef>
-          <a:fontRef idx="minor">
-            <a:schemeClr val="lt1"/>
-          </a:fontRef>
-        </p:style>
-        <p:txBody>
-          <a:bodyPr rtlCol="0" anchor="ctr"/>
-          <a:lstStyle/>
-          <a:p/>
+                <a:latin typeface="Century Gothic"/>
+              </a:rPr>
+              <a:t>▸  </a:t>
+            </a:r>
+            <a:r>
+              <a:rPr sz="1600" b="0" dirty="0">
+                <a:solidFill>
+                  <a:srgbClr val="FFFFFF"/>
+                </a:solidFill>
+                <a:latin typeface="Century Gothic"/>
+              </a:rPr>
+              <a:t>El </a:t>
+            </a:r>
+            <a:r>
+              <a:rPr sz="1600" b="0" dirty="0" err="1">
+                <a:solidFill>
+                  <a:srgbClr val="FFFFFF"/>
+                </a:solidFill>
+                <a:latin typeface="Century Gothic"/>
+              </a:rPr>
+              <a:t>tipo</a:t>
+            </a:r>
+            <a:r>
+              <a:rPr sz="1600" b="0" dirty="0">
+                <a:solidFill>
+                  <a:srgbClr val="FFFFFF"/>
+                </a:solidFill>
+                <a:latin typeface="Century Gothic"/>
+              </a:rPr>
+              <a:t> </a:t>
+            </a:r>
+            <a:r>
+              <a:rPr sz="1600" b="0" dirty="0" err="1">
+                <a:solidFill>
+                  <a:srgbClr val="FFFFFF"/>
+                </a:solidFill>
+                <a:latin typeface="Century Gothic"/>
+              </a:rPr>
+              <a:t>va</a:t>
+            </a:r>
+            <a:r>
+              <a:rPr sz="1600" b="0" dirty="0">
+                <a:solidFill>
+                  <a:srgbClr val="FFFFFF"/>
+                </a:solidFill>
+                <a:latin typeface="Century Gothic"/>
+              </a:rPr>
+              <a:t> primero: dice </a:t>
+            </a:r>
+            <a:r>
+              <a:rPr sz="1600" b="0" dirty="0" err="1">
+                <a:solidFill>
+                  <a:srgbClr val="FFFFFF"/>
+                </a:solidFill>
+                <a:latin typeface="Century Gothic"/>
+              </a:rPr>
+              <a:t>qué</a:t>
+            </a:r>
+            <a:r>
+              <a:rPr sz="1600" b="0" dirty="0">
+                <a:solidFill>
+                  <a:srgbClr val="FFFFFF"/>
+                </a:solidFill>
+                <a:latin typeface="Century Gothic"/>
+              </a:rPr>
+              <a:t> </a:t>
+            </a:r>
+            <a:r>
+              <a:rPr sz="1600" b="0" dirty="0" err="1">
+                <a:solidFill>
+                  <a:srgbClr val="FFFFFF"/>
+                </a:solidFill>
+                <a:latin typeface="Century Gothic"/>
+              </a:rPr>
+              <a:t>cabe</a:t>
+            </a:r>
+            <a:r>
+              <a:rPr sz="1600" b="0" dirty="0">
+                <a:solidFill>
+                  <a:srgbClr val="FFFFFF"/>
+                </a:solidFill>
+                <a:latin typeface="Century Gothic"/>
+              </a:rPr>
+              <a:t> </a:t>
+            </a:r>
+            <a:r>
+              <a:rPr sz="1600" b="0" dirty="0" err="1">
+                <a:solidFill>
+                  <a:srgbClr val="FFFFFF"/>
+                </a:solidFill>
+                <a:latin typeface="Century Gothic"/>
+              </a:rPr>
+              <a:t>en</a:t>
+            </a:r>
+            <a:r>
+              <a:rPr sz="1600" b="0" dirty="0">
+                <a:solidFill>
+                  <a:srgbClr val="FFFFFF"/>
+                </a:solidFill>
+                <a:latin typeface="Century Gothic"/>
+              </a:rPr>
+              <a:t> la </a:t>
+            </a:r>
+            <a:r>
+              <a:rPr sz="1600" b="0" dirty="0" err="1">
+                <a:solidFill>
+                  <a:srgbClr val="FFFFFF"/>
+                </a:solidFill>
+                <a:latin typeface="Century Gothic"/>
+              </a:rPr>
+              <a:t>caja</a:t>
+            </a:r>
+            <a:r>
+              <a:rPr sz="1600" b="0" dirty="0">
+                <a:solidFill>
+                  <a:srgbClr val="FFFFFF"/>
+                </a:solidFill>
+                <a:latin typeface="Century Gothic"/>
+              </a:rPr>
+              <a:t>.</a:t>
+            </a:r>
+          </a:p>
+          <a:p>
+            <a:pPr>
+              <a:spcAft>
+                <a:spcPts val="1000"/>
+              </a:spcAft>
+            </a:pPr>
+            <a:r>
+              <a:rPr sz="1600" b="1" dirty="0">
+                <a:solidFill>
+                  <a:srgbClr val="36B5FF"/>
+                </a:solidFill>
+                <a:latin typeface="Century Gothic"/>
+              </a:rPr>
+              <a:t>▸  </a:t>
+            </a:r>
+            <a:r>
+              <a:rPr sz="1600" b="0" dirty="0">
+                <a:solidFill>
+                  <a:srgbClr val="FFFFFF"/>
+                </a:solidFill>
+                <a:latin typeface="Century Gothic"/>
+              </a:rPr>
+              <a:t>Cada </a:t>
+            </a:r>
+            <a:r>
+              <a:rPr sz="1600" b="0" dirty="0" err="1">
+                <a:solidFill>
+                  <a:srgbClr val="FFFFFF"/>
+                </a:solidFill>
+                <a:latin typeface="Century Gothic"/>
+              </a:rPr>
+              <a:t>instrucción</a:t>
+            </a:r>
+            <a:r>
+              <a:rPr sz="1600" b="0" dirty="0">
+                <a:solidFill>
+                  <a:srgbClr val="FFFFFF"/>
+                </a:solidFill>
+                <a:latin typeface="Century Gothic"/>
+              </a:rPr>
+              <a:t> termina </a:t>
+            </a:r>
+            <a:r>
+              <a:rPr sz="1600" b="0" dirty="0" err="1">
+                <a:solidFill>
+                  <a:srgbClr val="FFFFFF"/>
+                </a:solidFill>
+                <a:latin typeface="Century Gothic"/>
+              </a:rPr>
+              <a:t>en</a:t>
+            </a:r>
+            <a:r>
+              <a:rPr sz="1600" b="0" dirty="0">
+                <a:solidFill>
+                  <a:srgbClr val="FFFFFF"/>
+                </a:solidFill>
+                <a:latin typeface="Century Gothic"/>
+              </a:rPr>
+              <a:t> </a:t>
+            </a:r>
+            <a:r>
+              <a:rPr sz="1600" b="0" dirty="0">
+                <a:solidFill>
+                  <a:srgbClr val="36B5FF"/>
+                </a:solidFill>
+                <a:latin typeface="Consolas"/>
+              </a:rPr>
+              <a:t>;</a:t>
+            </a:r>
+            <a:r>
+              <a:rPr sz="1600" b="0" dirty="0">
+                <a:solidFill>
+                  <a:srgbClr val="FFFFFF"/>
+                </a:solidFill>
+                <a:latin typeface="Century Gothic"/>
+              </a:rPr>
+              <a:t>.</a:t>
+            </a:r>
+          </a:p>
+          <a:p>
+            <a:pPr>
+              <a:spcAft>
+                <a:spcPts val="1000"/>
+              </a:spcAft>
+            </a:pPr>
+            <a:r>
+              <a:rPr sz="1600" b="1" dirty="0">
+                <a:solidFill>
+                  <a:srgbClr val="36B5FF"/>
+                </a:solidFill>
+                <a:latin typeface="Century Gothic"/>
+              </a:rPr>
+              <a:t>▸  </a:t>
+            </a:r>
+            <a:r>
+              <a:rPr sz="1600" b="0" dirty="0">
+                <a:solidFill>
+                  <a:srgbClr val="36B5FF"/>
+                </a:solidFill>
+                <a:latin typeface="Consolas"/>
+              </a:rPr>
+              <a:t>+</a:t>
+            </a:r>
+            <a:r>
+              <a:rPr sz="1600" b="0" dirty="0">
+                <a:solidFill>
+                  <a:srgbClr val="FFFFFF"/>
+                </a:solidFill>
+                <a:latin typeface="Century Gothic"/>
+              </a:rPr>
+              <a:t> </a:t>
+            </a:r>
+            <a:r>
+              <a:rPr sz="1600" b="0" dirty="0" err="1">
+                <a:solidFill>
+                  <a:srgbClr val="FFFFFF"/>
+                </a:solidFill>
+                <a:latin typeface="Century Gothic"/>
+              </a:rPr>
+              <a:t>suma</a:t>
+            </a:r>
+            <a:r>
+              <a:rPr sz="1600" b="0" dirty="0">
+                <a:solidFill>
+                  <a:srgbClr val="FFFFFF"/>
+                </a:solidFill>
+                <a:latin typeface="Century Gothic"/>
+              </a:rPr>
+              <a:t> </a:t>
+            </a:r>
+            <a:r>
+              <a:rPr sz="1600" b="0" dirty="0" err="1">
+                <a:solidFill>
+                  <a:srgbClr val="FFFFFF"/>
+                </a:solidFill>
+                <a:latin typeface="Century Gothic"/>
+              </a:rPr>
+              <a:t>números</a:t>
+            </a:r>
+            <a:r>
+              <a:rPr sz="1600" b="0" dirty="0">
+                <a:solidFill>
+                  <a:srgbClr val="FFFFFF"/>
+                </a:solidFill>
+                <a:latin typeface="Century Gothic"/>
+              </a:rPr>
+              <a:t> y </a:t>
+            </a:r>
+            <a:r>
+              <a:rPr sz="1600" b="0" dirty="0" err="1">
+                <a:solidFill>
+                  <a:srgbClr val="FFFFFF"/>
+                </a:solidFill>
+                <a:latin typeface="Century Gothic"/>
+              </a:rPr>
+              <a:t>pega</a:t>
+            </a:r>
+            <a:r>
+              <a:rPr sz="1600" b="0" dirty="0">
+                <a:solidFill>
+                  <a:srgbClr val="FFFFFF"/>
+                </a:solidFill>
+                <a:latin typeface="Century Gothic"/>
+              </a:rPr>
+              <a:t> </a:t>
+            </a:r>
+            <a:r>
+              <a:rPr sz="1600" b="0" dirty="0" err="1">
+                <a:solidFill>
+                  <a:srgbClr val="FFFFFF"/>
+                </a:solidFill>
+                <a:latin typeface="Century Gothic"/>
+              </a:rPr>
+              <a:t>textos</a:t>
+            </a:r>
+            <a:r>
+              <a:rPr sz="1600" b="0" dirty="0">
+                <a:solidFill>
+                  <a:srgbClr val="FFFFFF"/>
+                </a:solidFill>
+                <a:latin typeface="Century Gothic"/>
+              </a:rPr>
+              <a:t>.</a:t>
+            </a:r>
+          </a:p>
         </p:txBody>
       </p:sp>
       <p:sp>
@@ -4169,8 +6195,8 @@
         </p:nvSpPr>
         <p:spPr>
           <a:xfrm>
-            <a:off x="4551578" y="1965960"/>
-            <a:ext cx="3088538" cy="548640"/>
+            <a:off x="548640" y="6400800"/>
+            <a:ext cx="8229600" cy="274320"/>
           </a:xfrm>
           <a:prstGeom prst="rect">
             <a:avLst/>
@@ -4178,20 +6204,20 @@
           <a:noFill/>
         </p:spPr>
         <p:txBody>
-          <a:bodyPr wrap="square" anchor="t" lIns="0" rIns="0">
+          <a:bodyPr wrap="square" lIns="0" rIns="0" anchor="t">
             <a:spAutoFit/>
           </a:bodyPr>
           <a:lstStyle/>
           <a:p>
             <a:pPr algn="l"/>
             <a:r>
-              <a:rPr b="1" sz="1800">
-                <a:solidFill>
-                  <a:srgbClr val="FFFFFF"/>
-                </a:solidFill>
-                <a:latin typeface="Century Gothic"/>
-              </a:rPr>
-              <a:t>9:20</a:t>
+              <a:rPr sz="1200" b="0">
+                <a:solidFill>
+                  <a:srgbClr val="C9D6E3"/>
+                </a:solidFill>
+                <a:latin typeface="Century Gothic"/>
+              </a:rPr>
+              <a:t>Semillero QA 2026 · Automatización Web · Clase 1 · 01-fundamentos-java-poo</a:t>
             </a:r>
           </a:p>
         </p:txBody>
@@ -4204,8 +6230,8 @@
         </p:nvSpPr>
         <p:spPr>
           <a:xfrm>
-            <a:off x="4551578" y="2468880"/>
-            <a:ext cx="3088538" cy="1165860"/>
+            <a:off x="10728655" y="6400800"/>
+            <a:ext cx="914400" cy="274320"/>
           </a:xfrm>
           <a:prstGeom prst="rect">
             <a:avLst/>
@@ -4213,610 +6239,20 @@
           <a:noFill/>
         </p:spPr>
         <p:txBody>
-          <a:bodyPr wrap="square" anchor="t" lIns="0" rIns="0">
+          <a:bodyPr wrap="square" lIns="0" rIns="0" anchor="t">
             <a:spAutoFit/>
           </a:bodyPr>
           <a:lstStyle/>
           <a:p>
-            <a:pPr algn="l"/>
-            <a:r>
-              <a:rPr b="0" sz="1400">
+            <a:pPr algn="r"/>
+            <a:r>
+              <a:rPr sz="1200" b="0">
                 <a:solidFill>
                   <a:srgbClr val="C9D6E3"/>
                 </a:solidFill>
                 <a:latin typeface="Century Gothic"/>
               </a:rPr>
-              <a:t>Variables</a:t>
-            </a:r>
-          </a:p>
-          <a:p>
-            <a:pPr algn="l"/>
-            <a:r>
-              <a:rPr b="0" sz="1400">
-                <a:solidFill>
-                  <a:srgbClr val="C9D6E3"/>
-                </a:solidFill>
-                <a:latin typeface="Century Gothic"/>
-              </a:rPr>
-              <a:t>if, switch y ciclos</a:t>
-            </a:r>
-          </a:p>
-        </p:txBody>
-      </p:sp>
-      <p:sp>
-        <p:nvSpPr>
-          <p:cNvPr id="10" name="Rounded Rectangle 9"/>
-          <p:cNvSpPr/>
-          <p:nvPr/>
-        </p:nvSpPr>
-        <p:spPr>
-          <a:xfrm>
-            <a:off x="8097316" y="1737360"/>
-            <a:ext cx="3545738" cy="2080260"/>
-          </a:xfrm>
-          <a:prstGeom prst="roundRect">
-            <a:avLst>
-              <a:gd name="adj" fmla="val 6000"/>
-            </a:avLst>
-          </a:prstGeom>
-          <a:solidFill>
-            <a:srgbClr val="0B2C59"/>
-          </a:solidFill>
-          <a:ln w="15875">
-            <a:solidFill>
-              <a:srgbClr val="5EA7D8"/>
-            </a:solidFill>
-          </a:ln>
-        </p:spPr>
-        <p:style>
-          <a:lnRef idx="1">
-            <a:schemeClr val="accent1"/>
-          </a:lnRef>
-          <a:fillRef idx="3">
-            <a:schemeClr val="accent1"/>
-          </a:fillRef>
-          <a:effectRef idx="2">
-            <a:schemeClr val="accent1"/>
-          </a:effectRef>
-          <a:fontRef idx="minor">
-            <a:schemeClr val="lt1"/>
-          </a:fontRef>
-        </p:style>
-        <p:txBody>
-          <a:bodyPr rtlCol="0" anchor="ctr"/>
-          <a:lstStyle/>
-          <a:p/>
-        </p:txBody>
-      </p:sp>
-      <p:sp>
-        <p:nvSpPr>
-          <p:cNvPr id="11" name="TextBox 10"/>
-          <p:cNvSpPr txBox="1"/>
-          <p:nvPr/>
-        </p:nvSpPr>
-        <p:spPr>
-          <a:xfrm>
-            <a:off x="8325916" y="1965960"/>
-            <a:ext cx="3088538" cy="548640"/>
-          </a:xfrm>
-          <a:prstGeom prst="rect">
-            <a:avLst/>
-          </a:prstGeom>
-          <a:noFill/>
-        </p:spPr>
-        <p:txBody>
-          <a:bodyPr wrap="square" anchor="t" lIns="0" rIns="0">
-            <a:spAutoFit/>
-          </a:bodyPr>
-          <a:lstStyle/>
-          <a:p>
-            <a:pPr algn="l"/>
-            <a:r>
-              <a:rPr b="1" sz="1800">
-                <a:solidFill>
-                  <a:srgbClr val="FFFFFF"/>
-                </a:solidFill>
-                <a:latin typeface="Century Gothic"/>
-              </a:rPr>
-              <a:t>10:00</a:t>
-            </a:r>
-          </a:p>
-        </p:txBody>
-      </p:sp>
-      <p:sp>
-        <p:nvSpPr>
-          <p:cNvPr id="12" name="TextBox 11"/>
-          <p:cNvSpPr txBox="1"/>
-          <p:nvPr/>
-        </p:nvSpPr>
-        <p:spPr>
-          <a:xfrm>
-            <a:off x="8325916" y="2468880"/>
-            <a:ext cx="3088538" cy="1165860"/>
-          </a:xfrm>
-          <a:prstGeom prst="rect">
-            <a:avLst/>
-          </a:prstGeom>
-          <a:noFill/>
-        </p:spPr>
-        <p:txBody>
-          <a:bodyPr wrap="square" anchor="t" lIns="0" rIns="0">
-            <a:spAutoFit/>
-          </a:bodyPr>
-          <a:lstStyle/>
-          <a:p>
-            <a:pPr algn="l"/>
-            <a:r>
-              <a:rPr b="0" sz="1400">
-                <a:solidFill>
-                  <a:srgbClr val="C9D6E3"/>
-                </a:solidFill>
-                <a:latin typeface="Century Gothic"/>
-              </a:rPr>
-              <a:t>Clases y objetos</a:t>
-            </a:r>
-          </a:p>
-          <a:p>
-            <a:pPr algn="l"/>
-            <a:r>
-              <a:rPr b="0" sz="1400">
-                <a:solidFill>
-                  <a:srgbClr val="C9D6E3"/>
-                </a:solidFill>
-                <a:latin typeface="Century Gothic"/>
-              </a:rPr>
-              <a:t>Encapsulamiento</a:t>
-            </a:r>
-          </a:p>
-        </p:txBody>
-      </p:sp>
-      <p:sp>
-        <p:nvSpPr>
-          <p:cNvPr id="13" name="Rounded Rectangle 12"/>
-          <p:cNvSpPr/>
-          <p:nvPr/>
-        </p:nvSpPr>
-        <p:spPr>
-          <a:xfrm>
-            <a:off x="548640" y="4046220"/>
-            <a:ext cx="3545738" cy="2080260"/>
-          </a:xfrm>
-          <a:prstGeom prst="roundRect">
-            <a:avLst>
-              <a:gd name="adj" fmla="val 6000"/>
-            </a:avLst>
-          </a:prstGeom>
-          <a:solidFill>
-            <a:srgbClr val="08264F"/>
-          </a:solidFill>
-          <a:ln w="15875">
-            <a:solidFill>
-              <a:srgbClr val="5EA7D8"/>
-            </a:solidFill>
-          </a:ln>
-        </p:spPr>
-        <p:style>
-          <a:lnRef idx="1">
-            <a:schemeClr val="accent1"/>
-          </a:lnRef>
-          <a:fillRef idx="3">
-            <a:schemeClr val="accent1"/>
-          </a:fillRef>
-          <a:effectRef idx="2">
-            <a:schemeClr val="accent1"/>
-          </a:effectRef>
-          <a:fontRef idx="minor">
-            <a:schemeClr val="lt1"/>
-          </a:fontRef>
-        </p:style>
-        <p:txBody>
-          <a:bodyPr rtlCol="0" anchor="ctr"/>
-          <a:lstStyle/>
-          <a:p/>
-        </p:txBody>
-      </p:sp>
-      <p:sp>
-        <p:nvSpPr>
-          <p:cNvPr id="14" name="TextBox 13"/>
-          <p:cNvSpPr txBox="1"/>
-          <p:nvPr/>
-        </p:nvSpPr>
-        <p:spPr>
-          <a:xfrm>
-            <a:off x="777240" y="4274820"/>
-            <a:ext cx="3088538" cy="548640"/>
-          </a:xfrm>
-          <a:prstGeom prst="rect">
-            <a:avLst/>
-          </a:prstGeom>
-          <a:noFill/>
-        </p:spPr>
-        <p:txBody>
-          <a:bodyPr wrap="square" anchor="t" lIns="0" rIns="0">
-            <a:spAutoFit/>
-          </a:bodyPr>
-          <a:lstStyle/>
-          <a:p>
-            <a:pPr algn="l"/>
-            <a:r>
-              <a:rPr b="1" sz="1800">
-                <a:solidFill>
-                  <a:srgbClr val="FFFFFF"/>
-                </a:solidFill>
-                <a:latin typeface="Century Gothic"/>
-              </a:rPr>
-              <a:t>10:40</a:t>
-            </a:r>
-          </a:p>
-        </p:txBody>
-      </p:sp>
-      <p:sp>
-        <p:nvSpPr>
-          <p:cNvPr id="15" name="TextBox 14"/>
-          <p:cNvSpPr txBox="1"/>
-          <p:nvPr/>
-        </p:nvSpPr>
-        <p:spPr>
-          <a:xfrm>
-            <a:off x="777240" y="4777740"/>
-            <a:ext cx="3088538" cy="1165860"/>
-          </a:xfrm>
-          <a:prstGeom prst="rect">
-            <a:avLst/>
-          </a:prstGeom>
-          <a:noFill/>
-        </p:spPr>
-        <p:txBody>
-          <a:bodyPr wrap="square" anchor="t" lIns="0" rIns="0">
-            <a:spAutoFit/>
-          </a:bodyPr>
-          <a:lstStyle/>
-          <a:p>
-            <a:pPr algn="l"/>
-            <a:r>
-              <a:rPr b="0" sz="1400">
-                <a:solidFill>
-                  <a:srgbClr val="C9D6E3"/>
-                </a:solidFill>
-                <a:latin typeface="Century Gothic"/>
-              </a:rPr>
-              <a:t>Pausa</a:t>
-            </a:r>
-          </a:p>
-          <a:p>
-            <a:pPr algn="l"/>
-            <a:r>
-              <a:rPr b="0" sz="1400">
-                <a:solidFill>
-                  <a:srgbClr val="C9D6E3"/>
-                </a:solidFill>
-                <a:latin typeface="Century Gothic"/>
-              </a:rPr>
-              <a:t>15 minutos</a:t>
-            </a:r>
-          </a:p>
-        </p:txBody>
-      </p:sp>
-      <p:sp>
-        <p:nvSpPr>
-          <p:cNvPr id="16" name="Rounded Rectangle 15"/>
-          <p:cNvSpPr/>
-          <p:nvPr/>
-        </p:nvSpPr>
-        <p:spPr>
-          <a:xfrm>
-            <a:off x="4322978" y="4046220"/>
-            <a:ext cx="3545738" cy="2080260"/>
-          </a:xfrm>
-          <a:prstGeom prst="roundRect">
-            <a:avLst>
-              <a:gd name="adj" fmla="val 6000"/>
-            </a:avLst>
-          </a:prstGeom>
-          <a:solidFill>
-            <a:srgbClr val="0B2C59"/>
-          </a:solidFill>
-          <a:ln w="15875">
-            <a:solidFill>
-              <a:srgbClr val="5EA7D8"/>
-            </a:solidFill>
-          </a:ln>
-        </p:spPr>
-        <p:style>
-          <a:lnRef idx="1">
-            <a:schemeClr val="accent1"/>
-          </a:lnRef>
-          <a:fillRef idx="3">
-            <a:schemeClr val="accent1"/>
-          </a:fillRef>
-          <a:effectRef idx="2">
-            <a:schemeClr val="accent1"/>
-          </a:effectRef>
-          <a:fontRef idx="minor">
-            <a:schemeClr val="lt1"/>
-          </a:fontRef>
-        </p:style>
-        <p:txBody>
-          <a:bodyPr rtlCol="0" anchor="ctr"/>
-          <a:lstStyle/>
-          <a:p/>
-        </p:txBody>
-      </p:sp>
-      <p:sp>
-        <p:nvSpPr>
-          <p:cNvPr id="17" name="TextBox 16"/>
-          <p:cNvSpPr txBox="1"/>
-          <p:nvPr/>
-        </p:nvSpPr>
-        <p:spPr>
-          <a:xfrm>
-            <a:off x="4551578" y="4274820"/>
-            <a:ext cx="3088538" cy="548640"/>
-          </a:xfrm>
-          <a:prstGeom prst="rect">
-            <a:avLst/>
-          </a:prstGeom>
-          <a:noFill/>
-        </p:spPr>
-        <p:txBody>
-          <a:bodyPr wrap="square" anchor="t" lIns="0" rIns="0">
-            <a:spAutoFit/>
-          </a:bodyPr>
-          <a:lstStyle/>
-          <a:p>
-            <a:pPr algn="l"/>
-            <a:r>
-              <a:rPr b="1" sz="1800">
-                <a:solidFill>
-                  <a:srgbClr val="FFFFFF"/>
-                </a:solidFill>
-                <a:latin typeface="Century Gothic"/>
-              </a:rPr>
-              <a:t>10:55</a:t>
-            </a:r>
-          </a:p>
-        </p:txBody>
-      </p:sp>
-      <p:sp>
-        <p:nvSpPr>
-          <p:cNvPr id="18" name="TextBox 17"/>
-          <p:cNvSpPr txBox="1"/>
-          <p:nvPr/>
-        </p:nvSpPr>
-        <p:spPr>
-          <a:xfrm>
-            <a:off x="4551578" y="4777740"/>
-            <a:ext cx="3088538" cy="1165860"/>
-          </a:xfrm>
-          <a:prstGeom prst="rect">
-            <a:avLst/>
-          </a:prstGeom>
-          <a:noFill/>
-        </p:spPr>
-        <p:txBody>
-          <a:bodyPr wrap="square" anchor="t" lIns="0" rIns="0">
-            <a:spAutoFit/>
-          </a:bodyPr>
-          <a:lstStyle/>
-          <a:p>
-            <a:pPr algn="l"/>
-            <a:r>
-              <a:rPr b="0" sz="1400">
-                <a:solidFill>
-                  <a:srgbClr val="C9D6E3"/>
-                </a:solidFill>
-                <a:latin typeface="Century Gothic"/>
-              </a:rPr>
-              <a:t>Herencia</a:t>
-            </a:r>
-          </a:p>
-          <a:p>
-            <a:pPr algn="l"/>
-            <a:r>
-              <a:rPr b="0" sz="1400">
-                <a:solidFill>
-                  <a:srgbClr val="C9D6E3"/>
-                </a:solidFill>
-                <a:latin typeface="Century Gothic"/>
-              </a:rPr>
-              <a:t>Polimorfismo</a:t>
-            </a:r>
-          </a:p>
-        </p:txBody>
-      </p:sp>
-      <p:sp>
-        <p:nvSpPr>
-          <p:cNvPr id="19" name="Rounded Rectangle 18"/>
-          <p:cNvSpPr/>
-          <p:nvPr/>
-        </p:nvSpPr>
-        <p:spPr>
-          <a:xfrm>
-            <a:off x="8097316" y="4046220"/>
-            <a:ext cx="3545738" cy="2080260"/>
-          </a:xfrm>
-          <a:prstGeom prst="roundRect">
-            <a:avLst>
-              <a:gd name="adj" fmla="val 6000"/>
-            </a:avLst>
-          </a:prstGeom>
-          <a:solidFill>
-            <a:srgbClr val="08264F"/>
-          </a:solidFill>
-          <a:ln w="15875">
-            <a:solidFill>
-              <a:srgbClr val="5EA7D8"/>
-            </a:solidFill>
-          </a:ln>
-        </p:spPr>
-        <p:style>
-          <a:lnRef idx="1">
-            <a:schemeClr val="accent1"/>
-          </a:lnRef>
-          <a:fillRef idx="3">
-            <a:schemeClr val="accent1"/>
-          </a:fillRef>
-          <a:effectRef idx="2">
-            <a:schemeClr val="accent1"/>
-          </a:effectRef>
-          <a:fontRef idx="minor">
-            <a:schemeClr val="lt1"/>
-          </a:fontRef>
-        </p:style>
-        <p:txBody>
-          <a:bodyPr rtlCol="0" anchor="ctr"/>
-          <a:lstStyle/>
-          <a:p/>
-        </p:txBody>
-      </p:sp>
-      <p:sp>
-        <p:nvSpPr>
-          <p:cNvPr id="20" name="TextBox 19"/>
-          <p:cNvSpPr txBox="1"/>
-          <p:nvPr/>
-        </p:nvSpPr>
-        <p:spPr>
-          <a:xfrm>
-            <a:off x="8325916" y="4274820"/>
-            <a:ext cx="3088538" cy="548640"/>
-          </a:xfrm>
-          <a:prstGeom prst="rect">
-            <a:avLst/>
-          </a:prstGeom>
-          <a:noFill/>
-        </p:spPr>
-        <p:txBody>
-          <a:bodyPr wrap="square" anchor="t" lIns="0" rIns="0">
-            <a:spAutoFit/>
-          </a:bodyPr>
-          <a:lstStyle/>
-          <a:p>
-            <a:pPr algn="l"/>
-            <a:r>
-              <a:rPr b="1" sz="1800">
-                <a:solidFill>
-                  <a:srgbClr val="FFFFFF"/>
-                </a:solidFill>
-                <a:latin typeface="Century Gothic"/>
-              </a:rPr>
-              <a:t>11:30</a:t>
-            </a:r>
-          </a:p>
-        </p:txBody>
-      </p:sp>
-      <p:sp>
-        <p:nvSpPr>
-          <p:cNvPr id="21" name="TextBox 20"/>
-          <p:cNvSpPr txBox="1"/>
-          <p:nvPr/>
-        </p:nvSpPr>
-        <p:spPr>
-          <a:xfrm>
-            <a:off x="8325916" y="4777740"/>
-            <a:ext cx="3088538" cy="1165860"/>
-          </a:xfrm>
-          <a:prstGeom prst="rect">
-            <a:avLst/>
-          </a:prstGeom>
-          <a:noFill/>
-        </p:spPr>
-        <p:txBody>
-          <a:bodyPr wrap="square" anchor="t" lIns="0" rIns="0">
-            <a:spAutoFit/>
-          </a:bodyPr>
-          <a:lstStyle/>
-          <a:p>
-            <a:pPr algn="l"/>
-            <a:r>
-              <a:rPr b="0" sz="1400">
-                <a:solidFill>
-                  <a:srgbClr val="C9D6E3"/>
-                </a:solidFill>
-                <a:latin typeface="Century Gothic"/>
-              </a:rPr>
-              <a:t>Práctica guiada</a:t>
-            </a:r>
-          </a:p>
-          <a:p>
-            <a:pPr algn="l"/>
-            <a:r>
-              <a:rPr b="0" sz="1400">
-                <a:solidFill>
-                  <a:srgbClr val="C9D6E3"/>
-                </a:solidFill>
-                <a:latin typeface="Century Gothic"/>
-              </a:rPr>
-              <a:t>Modificar ejemplos y leer errores</a:t>
-            </a:r>
-          </a:p>
-        </p:txBody>
-      </p:sp>
-      <p:sp>
-        <p:nvSpPr>
-          <p:cNvPr id="22" name="TextBox 21"/>
-          <p:cNvSpPr txBox="1"/>
-          <p:nvPr/>
-        </p:nvSpPr>
-        <p:spPr>
-          <a:xfrm>
-            <a:off x="548640" y="6400800"/>
-            <a:ext cx="8229600" cy="274320"/>
-          </a:xfrm>
-          <a:prstGeom prst="rect">
-            <a:avLst/>
-          </a:prstGeom>
-          <a:noFill/>
-        </p:spPr>
-        <p:txBody>
-          <a:bodyPr wrap="square" anchor="t" lIns="0" rIns="0">
-            <a:spAutoFit/>
-          </a:bodyPr>
-          <a:lstStyle/>
-          <a:p>
-            <a:pPr algn="l"/>
-            <a:r>
-              <a:rPr b="0" sz="1200">
-                <a:solidFill>
-                  <a:srgbClr val="C9D6E3"/>
-                </a:solidFill>
-                <a:latin typeface="Century Gothic"/>
-              </a:rPr>
-              <a:t>Semillero QA 2026 · Automatización Web · Clase 1 · 01-fundamentos-java-poo</a:t>
-            </a:r>
-          </a:p>
-        </p:txBody>
-      </p:sp>
-      <p:sp>
-        <p:nvSpPr>
-          <p:cNvPr id="23" name="TextBox 22"/>
-          <p:cNvSpPr txBox="1"/>
-          <p:nvPr/>
-        </p:nvSpPr>
-        <p:spPr>
-          <a:xfrm>
-            <a:off x="10728655" y="6400800"/>
-            <a:ext cx="914400" cy="274320"/>
-          </a:xfrm>
-          <a:prstGeom prst="rect">
-            <a:avLst/>
-          </a:prstGeom>
-          <a:noFill/>
-        </p:spPr>
-        <p:txBody>
-          <a:bodyPr wrap="square" anchor="t" lIns="0" rIns="0">
-            <a:spAutoFit/>
-          </a:bodyPr>
-          <a:lstStyle/>
-          <a:p>
-            <a:pPr algn="r"/>
-            <a:r>
-              <a:rPr b="0" sz="1200">
-                <a:solidFill>
-                  <a:srgbClr val="C9D6E3"/>
-                </a:solidFill>
-                <a:latin typeface="Century Gothic"/>
-              </a:rPr>
-              <a:t>2</a:t>
+              <a:t>3</a:t>
             </a:r>
           </a:p>
         </p:txBody>
@@ -4829,8 +6265,8 @@
 </p:sld>
 </file>
 
-<file path=ppt/slides/slide3.xml><?xml version="1.0" encoding="utf-8"?>
-<p:sld xmlns:a="http://schemas.openxmlformats.org/drawingml/2006/main" xmlns:p="http://schemas.openxmlformats.org/presentationml/2006/main" xmlns:r="http://schemas.openxmlformats.org/officeDocument/2006/relationships">
+<file path=ppt/slides/slide4.xml><?xml version="1.0" encoding="utf-8"?>
+<p:sld xmlns:a="http://schemas.openxmlformats.org/drawingml/2006/main" xmlns:r="http://schemas.openxmlformats.org/officeDocument/2006/relationships" xmlns:p="http://schemas.openxmlformats.org/presentationml/2006/main">
   <p:cSld>
     <p:bg>
       <p:bgPr>
@@ -4846,7 +6282,14 @@
         <p:cNvGrpSpPr/>
         <p:nvPr/>
       </p:nvGrpSpPr>
-      <p:grpSpPr/>
+      <p:grpSpPr>
+        <a:xfrm>
+          <a:off x="0" y="0"/>
+          <a:ext cx="0" cy="0"/>
+          <a:chOff x="0" y="0"/>
+          <a:chExt cx="0" cy="0"/>
+        </a:xfrm>
+      </p:grpSpPr>
       <p:sp>
         <p:nvSpPr>
           <p:cNvPr id="2" name="Rounded Rectangle 1"/>
@@ -4885,12 +6328,12 @@
           </a:fontRef>
         </p:style>
         <p:txBody>
-          <a:bodyPr rtlCol="0" anchor="ctr" tIns="0" bIns="0" wrap="none"/>
+          <a:bodyPr wrap="none" tIns="0" bIns="0" rtlCol="0" anchor="ctr"/>
           <a:lstStyle/>
           <a:p>
             <a:pPr algn="ctr"/>
             <a:r>
-              <a:rPr b="1" sz="1200">
+              <a:rPr sz="1200" b="1">
                 <a:solidFill>
                   <a:srgbClr val="FFFFFF"/>
                 </a:solidFill>
@@ -4918,20 +6361,20 @@
           <a:noFill/>
         </p:spPr>
         <p:txBody>
-          <a:bodyPr wrap="square" anchor="t" lIns="0" rIns="0">
+          <a:bodyPr wrap="square" lIns="0" rIns="0" anchor="t">
             <a:spAutoFit/>
           </a:bodyPr>
           <a:lstStyle/>
           <a:p>
             <a:pPr algn="l"/>
             <a:r>
-              <a:rPr b="1" sz="2800">
-                <a:solidFill>
-                  <a:srgbClr val="FFFFFF"/>
-                </a:solidFill>
-                <a:latin typeface="Century Gothic"/>
-              </a:rPr>
-              <a:t>Una variable es una caja con etiqueta</a:t>
+              <a:rPr sz="2800" b="1">
+                <a:solidFill>
+                  <a:srgbClr val="FFFFFF"/>
+                </a:solidFill>
+                <a:latin typeface="Century Gothic"/>
+              </a:rPr>
+              <a:t>El programa toma decisiones</a:t>
             </a:r>
           </a:p>
         </p:txBody>
@@ -4980,6 +6423,7 @@
           <a:lstStyle/>
           <a:p>
             <a:pPr algn="ctr"/>
+            <a:endParaRPr/>
           </a:p>
         </p:txBody>
       </p:sp>
@@ -5000,14 +6444,14 @@
           <a:noFill/>
         </p:spPr>
         <p:txBody>
-          <a:bodyPr wrap="square" anchor="t" lIns="0" rIns="0">
+          <a:bodyPr wrap="square" lIns="0" rIns="0" anchor="t">
             <a:spAutoFit/>
           </a:bodyPr>
           <a:lstStyle/>
           <a:p>
             <a:pPr algn="l"/>
             <a:r>
-              <a:rPr b="1" sz="1200">
+              <a:rPr sz="1200" b="1">
                 <a:solidFill>
                   <a:srgbClr val="36B5FF"/>
                 </a:solidFill>
@@ -5047,7 +6491,7 @@
                 </a:solidFill>
                 <a:latin typeface="Consolas"/>
               </a:rPr>
-              <a:t>int edad = 20;</a:t>
+              <a:t>if (nota &gt;= NOTA_MINIMA) {</a:t>
             </a:r>
           </a:p>
           <a:p>
@@ -5058,7 +6502,7 @@
                 </a:solidFill>
                 <a:latin typeface="Consolas"/>
               </a:rPr>
-              <a:t>double precio = 15500.50;</a:t>
+              <a:t>    return "Aprobado";</a:t>
             </a:r>
           </a:p>
           <a:p>
@@ -5069,7 +6513,7 @@
                 </a:solidFill>
                 <a:latin typeface="Consolas"/>
               </a:rPr>
-              <a:t>boolean estaActivo = true;</a:t>
+              <a:t>} else {</a:t>
             </a:r>
           </a:p>
           <a:p>
@@ -5080,7 +6524,7 @@
                 </a:solidFill>
                 <a:latin typeface="Consolas"/>
               </a:rPr>
-              <a:t>char inicial = 'D';</a:t>
+              <a:t>    return "Reprobado";</a:t>
             </a:r>
           </a:p>
           <a:p>
@@ -5091,7 +6535,7 @@
                 </a:solidFill>
                 <a:latin typeface="Consolas"/>
               </a:rPr>
-              <a:t>String nombre = "Diego";</a:t>
+              <a:t>}</a:t>
             </a:r>
           </a:p>
           <a:p>
@@ -5113,7 +6557,7 @@
                 </a:solidFill>
                 <a:latin typeface="Consolas"/>
               </a:rPr>
-              <a:t>int edadEnCincoAnios = edad + 5;</a:t>
+              <a:t>switch (color) {</a:t>
             </a:r>
           </a:p>
           <a:p>
@@ -5124,7 +6568,62 @@
                 </a:solidFill>
                 <a:latin typeface="Consolas"/>
               </a:rPr>
-              <a:t>String saludo = "Hola, " + nombre;</a:t>
+              <a:t>    case "verde":</a:t>
+            </a:r>
+          </a:p>
+          <a:p>
+            <a:r>
+              <a:rPr sz="1300">
+                <a:solidFill>
+                  <a:srgbClr val="FFFFFF"/>
+                </a:solidFill>
+                <a:latin typeface="Consolas"/>
+              </a:rPr>
+              <a:t>        return "Siga";</a:t>
+            </a:r>
+          </a:p>
+          <a:p>
+            <a:r>
+              <a:rPr sz="1300">
+                <a:solidFill>
+                  <a:srgbClr val="FFFFFF"/>
+                </a:solidFill>
+                <a:latin typeface="Consolas"/>
+              </a:rPr>
+              <a:t>    case "amarillo":</a:t>
+            </a:r>
+          </a:p>
+          <a:p>
+            <a:r>
+              <a:rPr sz="1300">
+                <a:solidFill>
+                  <a:srgbClr val="FFFFFF"/>
+                </a:solidFill>
+                <a:latin typeface="Consolas"/>
+              </a:rPr>
+              <a:t>        return "Despacio";</a:t>
+            </a:r>
+          </a:p>
+          <a:p>
+            <a:r>
+              <a:rPr sz="1300">
+                <a:solidFill>
+                  <a:srgbClr val="FFFFFF"/>
+                </a:solidFill>
+                <a:latin typeface="Consolas"/>
+              </a:rPr>
+              <a:t>    ...</a:t>
+            </a:r>
+          </a:p>
+          <a:p>
+            <a:r>
+              <a:rPr sz="1300">
+                <a:solidFill>
+                  <a:srgbClr val="FFFFFF"/>
+                </a:solidFill>
+                <a:latin typeface="Consolas"/>
+              </a:rPr>
+              <a:t>}</a:t>
             </a:r>
           </a:p>
         </p:txBody>
@@ -5157,7 +6656,7 @@
               </a:spcAft>
             </a:pPr>
             <a:r>
-              <a:rPr b="1" sz="1600">
+              <a:rPr sz="1600" b="1">
                 <a:solidFill>
                   <a:srgbClr val="36B5FF"/>
                 </a:solidFill>
@@ -5166,13 +6665,22 @@
               <a:t>▸  </a:t>
             </a:r>
             <a:r>
-              <a:rPr b="0" sz="1600">
-                <a:solidFill>
-                  <a:srgbClr val="FFFFFF"/>
-                </a:solidFill>
-                <a:latin typeface="Century Gothic"/>
-              </a:rPr>
-              <a:t>El tipo va primero: dice qué cabe en la caja.</a:t>
+              <a:rPr sz="1600" b="0">
+                <a:solidFill>
+                  <a:srgbClr val="36B5FF"/>
+                </a:solidFill>
+                <a:latin typeface="Consolas"/>
+              </a:rPr>
+              <a:t>if</a:t>
+            </a:r>
+            <a:r>
+              <a:rPr sz="1600" b="0">
+                <a:solidFill>
+                  <a:srgbClr val="FFFFFF"/>
+                </a:solidFill>
+                <a:latin typeface="Century Gothic"/>
+              </a:rPr>
+              <a:t>: una pregunta de sí o no.</a:t>
             </a:r>
           </a:p>
           <a:p>
@@ -5182,7 +6690,7 @@
               </a:spcAft>
             </a:pPr>
             <a:r>
-              <a:rPr b="1" sz="1600">
+              <a:rPr sz="1600" b="1">
                 <a:solidFill>
                   <a:srgbClr val="36B5FF"/>
                 </a:solidFill>
@@ -5191,31 +6699,22 @@
               <a:t>▸  </a:t>
             </a:r>
             <a:r>
-              <a:rPr b="0" sz="1600">
-                <a:solidFill>
-                  <a:srgbClr val="FFFFFF"/>
-                </a:solidFill>
-                <a:latin typeface="Century Gothic"/>
-              </a:rPr>
-              <a:t>Cada instrucción termina en </a:t>
-            </a:r>
-            <a:r>
-              <a:rPr b="0" sz="1600">
+              <a:rPr sz="1600" b="0">
                 <a:solidFill>
                   <a:srgbClr val="36B5FF"/>
                 </a:solidFill>
                 <a:latin typeface="Consolas"/>
               </a:rPr>
-              <a:t>;</a:t>
-            </a:r>
-            <a:r>
-              <a:rPr b="0" sz="1600">
-                <a:solidFill>
-                  <a:srgbClr val="FFFFFF"/>
-                </a:solidFill>
-                <a:latin typeface="Century Gothic"/>
-              </a:rPr>
-              <a:t>.</a:t>
+              <a:t>&gt;=</a:t>
+            </a:r>
+            <a:r>
+              <a:rPr sz="1600" b="0">
+                <a:solidFill>
+                  <a:srgbClr val="FFFFFF"/>
+                </a:solidFill>
+                <a:latin typeface="Century Gothic"/>
+              </a:rPr>
+              <a:t> es mayor o igual: 3.0 aprueba.</a:t>
             </a:r>
           </a:p>
           <a:p>
@@ -5225,7 +6724,7 @@
               </a:spcAft>
             </a:pPr>
             <a:r>
-              <a:rPr b="1" sz="1600">
+              <a:rPr sz="1600" b="1">
                 <a:solidFill>
                   <a:srgbClr val="36B5FF"/>
                 </a:solidFill>
@@ -5234,22 +6733,56 @@
               <a:t>▸  </a:t>
             </a:r>
             <a:r>
-              <a:rPr b="0" sz="1600">
+              <a:rPr sz="1600" b="0">
                 <a:solidFill>
                   <a:srgbClr val="36B5FF"/>
                 </a:solidFill>
                 <a:latin typeface="Consolas"/>
               </a:rPr>
-              <a:t>+</a:t>
-            </a:r>
-            <a:r>
-              <a:rPr b="0" sz="1600">
-                <a:solidFill>
-                  <a:srgbClr val="FFFFFF"/>
-                </a:solidFill>
-                <a:latin typeface="Century Gothic"/>
-              </a:rPr>
-              <a:t> suma números y pega textos.</a:t>
+              <a:t>switch</a:t>
+            </a:r>
+            <a:r>
+              <a:rPr sz="1600" b="0">
+                <a:solidFill>
+                  <a:srgbClr val="FFFFFF"/>
+                </a:solidFill>
+                <a:latin typeface="Century Gothic"/>
+              </a:rPr>
+              <a:t>: varias opciones, como un semáforo.</a:t>
+            </a:r>
+          </a:p>
+          <a:p>
+            <a:pPr>
+              <a:spcAft>
+                <a:spcPts val="1000"/>
+              </a:spcAft>
+            </a:pPr>
+            <a:r>
+              <a:rPr sz="1600" b="1">
+                <a:solidFill>
+                  <a:srgbClr val="36B5FF"/>
+                </a:solidFill>
+                <a:latin typeface="Century Gothic"/>
+              </a:rPr>
+              <a:t>▸  </a:t>
+            </a:r>
+            <a:r>
+              <a:rPr sz="1600" b="0">
+                <a:solidFill>
+                  <a:srgbClr val="36B5FF"/>
+                </a:solidFill>
+                <a:latin typeface="Consolas"/>
+              </a:rPr>
+              <a:t>default</a:t>
+            </a:r>
+            <a:r>
+              <a:rPr sz="1600" b="0">
+                <a:solidFill>
+                  <a:srgbClr val="FFFFFF"/>
+                </a:solidFill>
+                <a:latin typeface="Century Gothic"/>
+              </a:rPr>
+              <a:t>: lo que no está en la lista.</a:t>
             </a:r>
           </a:p>
         </p:txBody>
@@ -5271,14 +6804,14 @@
           <a:noFill/>
         </p:spPr>
         <p:txBody>
-          <a:bodyPr wrap="square" anchor="t" lIns="0" rIns="0">
+          <a:bodyPr wrap="square" lIns="0" rIns="0" anchor="t">
             <a:spAutoFit/>
           </a:bodyPr>
           <a:lstStyle/>
           <a:p>
             <a:pPr algn="l"/>
             <a:r>
-              <a:rPr b="0" sz="1200">
+              <a:rPr sz="1200" b="0">
                 <a:solidFill>
                   <a:srgbClr val="C9D6E3"/>
                 </a:solidFill>
@@ -5306,20 +6839,20 @@
           <a:noFill/>
         </p:spPr>
         <p:txBody>
-          <a:bodyPr wrap="square" anchor="t" lIns="0" rIns="0">
+          <a:bodyPr wrap="square" lIns="0" rIns="0" anchor="t">
             <a:spAutoFit/>
           </a:bodyPr>
           <a:lstStyle/>
           <a:p>
             <a:pPr algn="r"/>
             <a:r>
-              <a:rPr b="0" sz="1200">
+              <a:rPr sz="1200" b="0">
                 <a:solidFill>
                   <a:srgbClr val="C9D6E3"/>
                 </a:solidFill>
                 <a:latin typeface="Century Gothic"/>
               </a:rPr>
-              <a:t>3</a:t>
+              <a:t>4</a:t>
             </a:r>
           </a:p>
         </p:txBody>
@@ -5332,8 +6865,8 @@
 </p:sld>
 </file>
 
-<file path=ppt/slides/slide4.xml><?xml version="1.0" encoding="utf-8"?>
-<p:sld xmlns:a="http://schemas.openxmlformats.org/drawingml/2006/main" xmlns:p="http://schemas.openxmlformats.org/presentationml/2006/main" xmlns:r="http://schemas.openxmlformats.org/officeDocument/2006/relationships">
+<file path=ppt/slides/slide5.xml><?xml version="1.0" encoding="utf-8"?>
+<p:sld xmlns:a="http://schemas.openxmlformats.org/drawingml/2006/main" xmlns:r="http://schemas.openxmlformats.org/officeDocument/2006/relationships" xmlns:p="http://schemas.openxmlformats.org/presentationml/2006/main">
   <p:cSld>
     <p:bg>
       <p:bgPr>
@@ -5349,7 +6882,14 @@
         <p:cNvGrpSpPr/>
         <p:nvPr/>
       </p:nvGrpSpPr>
-      <p:grpSpPr/>
+      <p:grpSpPr>
+        <a:xfrm>
+          <a:off x="0" y="0"/>
+          <a:ext cx="0" cy="0"/>
+          <a:chOff x="0" y="0"/>
+          <a:chExt cx="0" cy="0"/>
+        </a:xfrm>
+      </p:grpSpPr>
       <p:sp>
         <p:nvSpPr>
           <p:cNvPr id="2" name="Rounded Rectangle 1"/>
@@ -5388,12 +6928,12 @@
           </a:fontRef>
         </p:style>
         <p:txBody>
-          <a:bodyPr rtlCol="0" anchor="ctr" tIns="0" bIns="0" wrap="none"/>
+          <a:bodyPr wrap="none" tIns="0" bIns="0" rtlCol="0" anchor="ctr"/>
           <a:lstStyle/>
           <a:p>
             <a:pPr algn="ctr"/>
             <a:r>
-              <a:rPr b="1" sz="1200">
+              <a:rPr sz="1200" b="1">
                 <a:solidFill>
                   <a:srgbClr val="FFFFFF"/>
                 </a:solidFill>
@@ -5421,20 +6961,20 @@
           <a:noFill/>
         </p:spPr>
         <p:txBody>
-          <a:bodyPr wrap="square" anchor="t" lIns="0" rIns="0">
+          <a:bodyPr wrap="square" lIns="0" rIns="0" anchor="t">
             <a:spAutoFit/>
           </a:bodyPr>
           <a:lstStyle/>
           <a:p>
             <a:pPr algn="l"/>
             <a:r>
-              <a:rPr b="1" sz="2800">
-                <a:solidFill>
-                  <a:srgbClr val="FFFFFF"/>
-                </a:solidFill>
-                <a:latin typeface="Century Gothic"/>
-              </a:rPr>
-              <a:t>El programa toma decisiones</a:t>
+              <a:rPr sz="2800" b="1">
+                <a:solidFill>
+                  <a:srgbClr val="FFFFFF"/>
+                </a:solidFill>
+                <a:latin typeface="Century Gothic"/>
+              </a:rPr>
+              <a:t>Repetir sin copiar y pegar</a:t>
             </a:r>
           </a:p>
         </p:txBody>
@@ -5483,6 +7023,7 @@
           <a:lstStyle/>
           <a:p>
             <a:pPr algn="ctr"/>
+            <a:endParaRPr/>
           </a:p>
         </p:txBody>
       </p:sp>
@@ -5503,14 +7044,14 @@
           <a:noFill/>
         </p:spPr>
         <p:txBody>
-          <a:bodyPr wrap="square" anchor="t" lIns="0" rIns="0">
+          <a:bodyPr wrap="square" lIns="0" rIns="0" anchor="t">
             <a:spAutoFit/>
           </a:bodyPr>
           <a:lstStyle/>
           <a:p>
             <a:pPr algn="l"/>
             <a:r>
-              <a:rPr b="1" sz="1200">
+              <a:rPr sz="1200" b="1">
                 <a:solidFill>
                   <a:srgbClr val="36B5FF"/>
                 </a:solidFill>
@@ -5550,7 +7091,7 @@
                 </a:solidFill>
                 <a:latin typeface="Consolas"/>
               </a:rPr>
-              <a:t>if (nota &gt;= NOTA_MINIMA) {</a:t>
+              <a:t>for (int i = 1; i &lt;= 5; i++) {</a:t>
             </a:r>
           </a:p>
           <a:p>
@@ -5561,7 +7102,7 @@
                 </a:solidFill>
                 <a:latin typeface="Consolas"/>
               </a:rPr>
-              <a:t>    return "Aprobado";</a:t>
+              <a:t>    System.out.println("Vuelta numero " + i);</a:t>
             </a:r>
           </a:p>
           <a:p>
@@ -5572,7 +7113,7 @@
                 </a:solidFill>
                 <a:latin typeface="Consolas"/>
               </a:rPr>
-              <a:t>} else {</a:t>
+              <a:t>}</a:t>
             </a:r>
           </a:p>
           <a:p>
@@ -5583,7 +7124,7 @@
                 </a:solidFill>
                 <a:latin typeface="Consolas"/>
               </a:rPr>
-              <a:t>    return "Reprobado";</a:t>
+              <a:t> </a:t>
             </a:r>
           </a:p>
           <a:p>
@@ -5594,6 +7135,50 @@
                 </a:solidFill>
                 <a:latin typeface="Consolas"/>
               </a:rPr>
+              <a:t>int intento = 1;</a:t>
+            </a:r>
+          </a:p>
+          <a:p>
+            <a:r>
+              <a:rPr sz="1300">
+                <a:solidFill>
+                  <a:srgbClr val="FFFFFF"/>
+                </a:solidFill>
+                <a:latin typeface="Consolas"/>
+              </a:rPr>
+              <a:t>while (intento &lt;= 3) {</a:t>
+            </a:r>
+          </a:p>
+          <a:p>
+            <a:r>
+              <a:rPr sz="1300">
+                <a:solidFill>
+                  <a:srgbClr val="FFFFFF"/>
+                </a:solidFill>
+                <a:latin typeface="Consolas"/>
+              </a:rPr>
+              <a:t>    System.out.println("Intento de login " + intento);</a:t>
+            </a:r>
+          </a:p>
+          <a:p>
+            <a:r>
+              <a:rPr sz="1300">
+                <a:solidFill>
+                  <a:srgbClr val="FFFFFF"/>
+                </a:solidFill>
+                <a:latin typeface="Consolas"/>
+              </a:rPr>
+              <a:t>    intento++;</a:t>
+            </a:r>
+          </a:p>
+          <a:p>
+            <a:r>
+              <a:rPr sz="1300">
+                <a:solidFill>
+                  <a:srgbClr val="FFFFFF"/>
+                </a:solidFill>
+                <a:latin typeface="Consolas"/>
+              </a:rPr>
               <a:t>}</a:t>
             </a:r>
           </a:p>
@@ -5616,7 +7201,7 @@
                 </a:solidFill>
                 <a:latin typeface="Consolas"/>
               </a:rPr>
-              <a:t>switch (color) {</a:t>
+              <a:t>for (String nombre : nombres) {</a:t>
             </a:r>
           </a:p>
           <a:p>
@@ -5627,51 +7212,7 @@
                 </a:solidFill>
                 <a:latin typeface="Consolas"/>
               </a:rPr>
-              <a:t>    case "verde":</a:t>
-            </a:r>
-          </a:p>
-          <a:p>
-            <a:r>
-              <a:rPr sz="1300">
-                <a:solidFill>
-                  <a:srgbClr val="FFFFFF"/>
-                </a:solidFill>
-                <a:latin typeface="Consolas"/>
-              </a:rPr>
-              <a:t>        return "Siga";</a:t>
-            </a:r>
-          </a:p>
-          <a:p>
-            <a:r>
-              <a:rPr sz="1300">
-                <a:solidFill>
-                  <a:srgbClr val="FFFFFF"/>
-                </a:solidFill>
-                <a:latin typeface="Consolas"/>
-              </a:rPr>
-              <a:t>    case "amarillo":</a:t>
-            </a:r>
-          </a:p>
-          <a:p>
-            <a:r>
-              <a:rPr sz="1300">
-                <a:solidFill>
-                  <a:srgbClr val="FFFFFF"/>
-                </a:solidFill>
-                <a:latin typeface="Consolas"/>
-              </a:rPr>
-              <a:t>        return "Despacio";</a:t>
-            </a:r>
-          </a:p>
-          <a:p>
-            <a:r>
-              <a:rPr sz="1300">
-                <a:solidFill>
-                  <a:srgbClr val="FFFFFF"/>
-                </a:solidFill>
-                <a:latin typeface="Consolas"/>
-              </a:rPr>
-              <a:t>    ...</a:t>
+              <a:t>    System.out.println("Hola, " + nombre);</a:t>
             </a:r>
           </a:p>
           <a:p>
@@ -5715,7 +7256,7 @@
               </a:spcAft>
             </a:pPr>
             <a:r>
-              <a:rPr b="1" sz="1600">
+              <a:rPr sz="1600" b="1">
                 <a:solidFill>
                   <a:srgbClr val="36B5FF"/>
                 </a:solidFill>
@@ -5724,22 +7265,22 @@
               <a:t>▸  </a:t>
             </a:r>
             <a:r>
-              <a:rPr b="0" sz="1600">
+              <a:rPr sz="1600" b="0">
                 <a:solidFill>
                   <a:srgbClr val="36B5FF"/>
                 </a:solidFill>
                 <a:latin typeface="Consolas"/>
               </a:rPr>
-              <a:t>if</a:t>
-            </a:r>
-            <a:r>
-              <a:rPr b="0" sz="1600">
-                <a:solidFill>
-                  <a:srgbClr val="FFFFFF"/>
-                </a:solidFill>
-                <a:latin typeface="Century Gothic"/>
-              </a:rPr>
-              <a:t>: una pregunta de sí o no.</a:t>
+              <a:t>for</a:t>
+            </a:r>
+            <a:r>
+              <a:rPr sz="1600" b="0">
+                <a:solidFill>
+                  <a:srgbClr val="FFFFFF"/>
+                </a:solidFill>
+                <a:latin typeface="Century Gothic"/>
+              </a:rPr>
+              <a:t>: sé cuántas vueltas quiero.</a:t>
             </a:r>
           </a:p>
           <a:p>
@@ -5749,7 +7290,7 @@
               </a:spcAft>
             </a:pPr>
             <a:r>
-              <a:rPr b="1" sz="1600">
+              <a:rPr sz="1600" b="1">
                 <a:solidFill>
                   <a:srgbClr val="36B5FF"/>
                 </a:solidFill>
@@ -5758,22 +7299,22 @@
               <a:t>▸  </a:t>
             </a:r>
             <a:r>
-              <a:rPr b="0" sz="1600">
+              <a:rPr sz="1600" b="0">
                 <a:solidFill>
                   <a:srgbClr val="36B5FF"/>
                 </a:solidFill>
                 <a:latin typeface="Consolas"/>
               </a:rPr>
-              <a:t>&gt;=</a:t>
-            </a:r>
-            <a:r>
-              <a:rPr b="0" sz="1600">
-                <a:solidFill>
-                  <a:srgbClr val="FFFFFF"/>
-                </a:solidFill>
-                <a:latin typeface="Century Gothic"/>
-              </a:rPr>
-              <a:t> es mayor o igual: 3.0 aprueba.</a:t>
+              <a:t>while</a:t>
+            </a:r>
+            <a:r>
+              <a:rPr sz="1600" b="0">
+                <a:solidFill>
+                  <a:srgbClr val="FFFFFF"/>
+                </a:solidFill>
+                <a:latin typeface="Century Gothic"/>
+              </a:rPr>
+              <a:t>: repito mientras algo sea cierto.</a:t>
             </a:r>
           </a:p>
           <a:p>
@@ -5783,7 +7324,7 @@
               </a:spcAft>
             </a:pPr>
             <a:r>
-              <a:rPr b="1" sz="1600">
+              <a:rPr sz="1600" b="1">
                 <a:solidFill>
                   <a:srgbClr val="36B5FF"/>
                 </a:solidFill>
@@ -5792,56 +7333,22 @@
               <a:t>▸  </a:t>
             </a:r>
             <a:r>
-              <a:rPr b="0" sz="1600">
+              <a:rPr sz="1600" b="0">
                 <a:solidFill>
                   <a:srgbClr val="36B5FF"/>
                 </a:solidFill>
                 <a:latin typeface="Consolas"/>
               </a:rPr>
-              <a:t>switch</a:t>
-            </a:r>
-            <a:r>
-              <a:rPr b="0" sz="1600">
-                <a:solidFill>
-                  <a:srgbClr val="FFFFFF"/>
-                </a:solidFill>
-                <a:latin typeface="Century Gothic"/>
-              </a:rPr>
-              <a:t>: varias opciones, como un semáforo.</a:t>
-            </a:r>
-          </a:p>
-          <a:p>
-            <a:pPr>
-              <a:spcAft>
-                <a:spcPts val="1000"/>
-              </a:spcAft>
-            </a:pPr>
-            <a:r>
-              <a:rPr b="1" sz="1600">
-                <a:solidFill>
-                  <a:srgbClr val="36B5FF"/>
-                </a:solidFill>
-                <a:latin typeface="Century Gothic"/>
-              </a:rPr>
-              <a:t>▸  </a:t>
-            </a:r>
-            <a:r>
-              <a:rPr b="0" sz="1600">
-                <a:solidFill>
-                  <a:srgbClr val="36B5FF"/>
-                </a:solidFill>
-                <a:latin typeface="Consolas"/>
-              </a:rPr>
-              <a:t>default</a:t>
-            </a:r>
-            <a:r>
-              <a:rPr b="0" sz="1600">
-                <a:solidFill>
-                  <a:srgbClr val="FFFFFF"/>
-                </a:solidFill>
-                <a:latin typeface="Century Gothic"/>
-              </a:rPr>
-              <a:t>: lo que no está en la lista.</a:t>
+              <a:t>for-each</a:t>
+            </a:r>
+            <a:r>
+              <a:rPr sz="1600" b="0">
+                <a:solidFill>
+                  <a:srgbClr val="FFFFFF"/>
+                </a:solidFill>
+                <a:latin typeface="Century Gothic"/>
+              </a:rPr>
+              <a:t>: recorro una lista completa.</a:t>
             </a:r>
           </a:p>
         </p:txBody>
@@ -5863,14 +7370,14 @@
           <a:noFill/>
         </p:spPr>
         <p:txBody>
-          <a:bodyPr wrap="square" anchor="t" lIns="0" rIns="0">
+          <a:bodyPr wrap="square" lIns="0" rIns="0" anchor="t">
             <a:spAutoFit/>
           </a:bodyPr>
           <a:lstStyle/>
           <a:p>
             <a:pPr algn="l"/>
             <a:r>
-              <a:rPr b="0" sz="1200">
+              <a:rPr sz="1200" b="0">
                 <a:solidFill>
                   <a:srgbClr val="C9D6E3"/>
                 </a:solidFill>
@@ -5898,20 +7405,20 @@
           <a:noFill/>
         </p:spPr>
         <p:txBody>
-          <a:bodyPr wrap="square" anchor="t" lIns="0" rIns="0">
+          <a:bodyPr wrap="square" lIns="0" rIns="0" anchor="t">
             <a:spAutoFit/>
           </a:bodyPr>
           <a:lstStyle/>
           <a:p>
             <a:pPr algn="r"/>
             <a:r>
-              <a:rPr b="0" sz="1200">
+              <a:rPr sz="1200" b="0">
                 <a:solidFill>
                   <a:srgbClr val="C9D6E3"/>
                 </a:solidFill>
                 <a:latin typeface="Century Gothic"/>
               </a:rPr>
-              <a:t>4</a:t>
+              <a:t>5</a:t>
             </a:r>
           </a:p>
         </p:txBody>
@@ -5924,8 +7431,8 @@
 </p:sld>
 </file>
 
-<file path=ppt/slides/slide5.xml><?xml version="1.0" encoding="utf-8"?>
-<p:sld xmlns:a="http://schemas.openxmlformats.org/drawingml/2006/main" xmlns:p="http://schemas.openxmlformats.org/presentationml/2006/main" xmlns:r="http://schemas.openxmlformats.org/officeDocument/2006/relationships">
+<file path=ppt/slides/slide6.xml><?xml version="1.0" encoding="utf-8"?>
+<p:sld xmlns:a="http://schemas.openxmlformats.org/drawingml/2006/main" xmlns:r="http://schemas.openxmlformats.org/officeDocument/2006/relationships" xmlns:p="http://schemas.openxmlformats.org/presentationml/2006/main">
   <p:cSld>
     <p:bg>
       <p:bgPr>
@@ -5941,7 +7448,14 @@
         <p:cNvGrpSpPr/>
         <p:nvPr/>
       </p:nvGrpSpPr>
-      <p:grpSpPr/>
+      <p:grpSpPr>
+        <a:xfrm>
+          <a:off x="0" y="0"/>
+          <a:ext cx="0" cy="0"/>
+          <a:chOff x="0" y="0"/>
+          <a:chExt cx="0" cy="0"/>
+        </a:xfrm>
+      </p:grpSpPr>
       <p:sp>
         <p:nvSpPr>
           <p:cNvPr id="2" name="Rounded Rectangle 1"/>
@@ -5980,18 +7494,18 @@
           </a:fontRef>
         </p:style>
         <p:txBody>
-          <a:bodyPr rtlCol="0" anchor="ctr" tIns="0" bIns="0" wrap="none"/>
+          <a:bodyPr wrap="none" tIns="0" bIns="0" rtlCol="0" anchor="ctr"/>
           <a:lstStyle/>
           <a:p>
             <a:pPr algn="ctr"/>
             <a:r>
-              <a:rPr b="1" sz="1200">
-                <a:solidFill>
-                  <a:srgbClr val="FFFFFF"/>
-                </a:solidFill>
-                <a:latin typeface="Century Gothic"/>
-              </a:rPr>
-              <a:t>TEMA 1</a:t>
+              <a:rPr sz="1200" b="1">
+                <a:solidFill>
+                  <a:srgbClr val="FFFFFF"/>
+                </a:solidFill>
+                <a:latin typeface="Century Gothic"/>
+              </a:rPr>
+              <a:t>TEMA 2</a:t>
             </a:r>
           </a:p>
         </p:txBody>
@@ -6013,20 +7527,20 @@
           <a:noFill/>
         </p:spPr>
         <p:txBody>
-          <a:bodyPr wrap="square" anchor="t" lIns="0" rIns="0">
+          <a:bodyPr wrap="square" lIns="0" rIns="0" anchor="t">
             <a:spAutoFit/>
           </a:bodyPr>
           <a:lstStyle/>
           <a:p>
             <a:pPr algn="l"/>
             <a:r>
-              <a:rPr b="1" sz="2800">
-                <a:solidFill>
-                  <a:srgbClr val="FFFFFF"/>
-                </a:solidFill>
-                <a:latin typeface="Century Gothic"/>
-              </a:rPr>
-              <a:t>Repetir sin copiar y pegar</a:t>
+              <a:rPr sz="2800" b="1">
+                <a:solidFill>
+                  <a:srgbClr val="FFFFFF"/>
+                </a:solidFill>
+                <a:latin typeface="Century Gothic"/>
+              </a:rPr>
+              <a:t>La clase es el plano, el objeto es la casa</a:t>
             </a:r>
           </a:p>
         </p:txBody>
@@ -6075,6 +7589,7 @@
           <a:lstStyle/>
           <a:p>
             <a:pPr algn="ctr"/>
+            <a:endParaRPr/>
           </a:p>
         </p:txBody>
       </p:sp>
@@ -6095,14 +7610,14 @@
           <a:noFill/>
         </p:spPr>
         <p:txBody>
-          <a:bodyPr wrap="square" anchor="t" lIns="0" rIns="0">
+          <a:bodyPr wrap="square" lIns="0" rIns="0" anchor="t">
             <a:spAutoFit/>
           </a:bodyPr>
           <a:lstStyle/>
           <a:p>
             <a:pPr algn="l"/>
             <a:r>
-              <a:rPr b="1" sz="1200">
+              <a:rPr sz="1200" b="1">
                 <a:solidFill>
                   <a:srgbClr val="36B5FF"/>
                 </a:solidFill>
@@ -6142,7 +7657,7 @@
                 </a:solidFill>
                 <a:latin typeface="Consolas"/>
               </a:rPr>
-              <a:t>for (int i = 1; i &lt;= 5; i++) {</a:t>
+              <a:t>public class Estudiante {</a:t>
             </a:r>
           </a:p>
           <a:p>
@@ -6153,7 +7668,7 @@
                 </a:solidFill>
                 <a:latin typeface="Consolas"/>
               </a:rPr>
-              <a:t>    System.out.println("Vuelta numero " + i);</a:t>
+              <a:t>    private String nombre;</a:t>
             </a:r>
           </a:p>
           <a:p>
@@ -6164,6 +7679,72 @@
                 </a:solidFill>
                 <a:latin typeface="Consolas"/>
               </a:rPr>
+              <a:t>    private double nota;</a:t>
+            </a:r>
+          </a:p>
+          <a:p>
+            <a:r>
+              <a:rPr sz="1300">
+                <a:solidFill>
+                  <a:srgbClr val="FFFFFF"/>
+                </a:solidFill>
+                <a:latin typeface="Consolas"/>
+              </a:rPr>
+              <a:t> </a:t>
+            </a:r>
+          </a:p>
+          <a:p>
+            <a:r>
+              <a:rPr sz="1300">
+                <a:solidFill>
+                  <a:srgbClr val="FFFFFF"/>
+                </a:solidFill>
+                <a:latin typeface="Consolas"/>
+              </a:rPr>
+              <a:t>    public Estudiante(String nombre, double nota) {</a:t>
+            </a:r>
+          </a:p>
+          <a:p>
+            <a:r>
+              <a:rPr sz="1300">
+                <a:solidFill>
+                  <a:srgbClr val="FFFFFF"/>
+                </a:solidFill>
+                <a:latin typeface="Consolas"/>
+              </a:rPr>
+              <a:t>        this.nombre = nombre;</a:t>
+            </a:r>
+          </a:p>
+          <a:p>
+            <a:r>
+              <a:rPr sz="1300">
+                <a:solidFill>
+                  <a:srgbClr val="FFFFFF"/>
+                </a:solidFill>
+                <a:latin typeface="Consolas"/>
+              </a:rPr>
+              <a:t>        this.nota = nota;</a:t>
+            </a:r>
+          </a:p>
+          <a:p>
+            <a:r>
+              <a:rPr sz="1300">
+                <a:solidFill>
+                  <a:srgbClr val="FFFFFF"/>
+                </a:solidFill>
+                <a:latin typeface="Consolas"/>
+              </a:rPr>
+              <a:t>    }</a:t>
+            </a:r>
+          </a:p>
+          <a:p>
+            <a:r>
+              <a:rPr sz="1300">
+                <a:solidFill>
+                  <a:srgbClr val="FFFFFF"/>
+                </a:solidFill>
+                <a:latin typeface="Consolas"/>
+              </a:rPr>
               <a:t>}</a:t>
             </a:r>
           </a:p>
@@ -6186,7 +7767,7 @@
                 </a:solidFill>
                 <a:latin typeface="Consolas"/>
               </a:rPr>
-              <a:t>int intento = 1;</a:t>
+              <a:t>Estudiante ana = new Estudiante("Ana", 4.5);</a:t>
             </a:r>
           </a:p>
           <a:p>
@@ -6197,84 +7778,7 @@
                 </a:solidFill>
                 <a:latin typeface="Consolas"/>
               </a:rPr>
-              <a:t>while (intento &lt;= 3) {</a:t>
-            </a:r>
-          </a:p>
-          <a:p>
-            <a:r>
-              <a:rPr sz="1300">
-                <a:solidFill>
-                  <a:srgbClr val="FFFFFF"/>
-                </a:solidFill>
-                <a:latin typeface="Consolas"/>
-              </a:rPr>
-              <a:t>    System.out.println("Intento de login " + intento);</a:t>
-            </a:r>
-          </a:p>
-          <a:p>
-            <a:r>
-              <a:rPr sz="1300">
-                <a:solidFill>
-                  <a:srgbClr val="FFFFFF"/>
-                </a:solidFill>
-                <a:latin typeface="Consolas"/>
-              </a:rPr>
-              <a:t>    intento++;</a:t>
-            </a:r>
-          </a:p>
-          <a:p>
-            <a:r>
-              <a:rPr sz="1300">
-                <a:solidFill>
-                  <a:srgbClr val="FFFFFF"/>
-                </a:solidFill>
-                <a:latin typeface="Consolas"/>
-              </a:rPr>
-              <a:t>}</a:t>
-            </a:r>
-          </a:p>
-          <a:p>
-            <a:r>
-              <a:rPr sz="1300">
-                <a:solidFill>
-                  <a:srgbClr val="FFFFFF"/>
-                </a:solidFill>
-                <a:latin typeface="Consolas"/>
-              </a:rPr>
-              <a:t> </a:t>
-            </a:r>
-          </a:p>
-          <a:p>
-            <a:r>
-              <a:rPr sz="1300">
-                <a:solidFill>
-                  <a:srgbClr val="FFFFFF"/>
-                </a:solidFill>
-                <a:latin typeface="Consolas"/>
-              </a:rPr>
-              <a:t>for (String nombre : nombres) {</a:t>
-            </a:r>
-          </a:p>
-          <a:p>
-            <a:r>
-              <a:rPr sz="1300">
-                <a:solidFill>
-                  <a:srgbClr val="FFFFFF"/>
-                </a:solidFill>
-                <a:latin typeface="Consolas"/>
-              </a:rPr>
-              <a:t>    System.out.println("Hola, " + nombre);</a:t>
-            </a:r>
-          </a:p>
-          <a:p>
-            <a:r>
-              <a:rPr sz="1300">
-                <a:solidFill>
-                  <a:srgbClr val="FFFFFF"/>
-                </a:solidFill>
-                <a:latin typeface="Consolas"/>
-              </a:rPr>
-              <a:t>}</a:t>
+              <a:t>Estudiante luis = new Estudiante("Luis", 2.8);</a:t>
             </a:r>
           </a:p>
         </p:txBody>
@@ -6307,7 +7811,7 @@
               </a:spcAft>
             </a:pPr>
             <a:r>
-              <a:rPr b="1" sz="1600">
+              <a:rPr sz="1600" b="1">
                 <a:solidFill>
                   <a:srgbClr val="36B5FF"/>
                 </a:solidFill>
@@ -6316,22 +7820,31 @@
               <a:t>▸  </a:t>
             </a:r>
             <a:r>
-              <a:rPr b="0" sz="1600">
+              <a:rPr sz="1600" b="0">
+                <a:solidFill>
+                  <a:srgbClr val="FFFFFF"/>
+                </a:solidFill>
+                <a:latin typeface="Century Gothic"/>
+              </a:rPr>
+              <a:t>Un solo plano: </a:t>
+            </a:r>
+            <a:r>
+              <a:rPr sz="1600" b="0">
                 <a:solidFill>
                   <a:srgbClr val="36B5FF"/>
                 </a:solidFill>
                 <a:latin typeface="Consolas"/>
               </a:rPr>
-              <a:t>for</a:t>
-            </a:r>
-            <a:r>
-              <a:rPr b="0" sz="1600">
-                <a:solidFill>
-                  <a:srgbClr val="FFFFFF"/>
-                </a:solidFill>
-                <a:latin typeface="Century Gothic"/>
-              </a:rPr>
-              <a:t>: sé cuántas vueltas quiero.</a:t>
+              <a:t>Estudiante</a:t>
+            </a:r>
+            <a:r>
+              <a:rPr sz="1600" b="0">
+                <a:solidFill>
+                  <a:srgbClr val="FFFFFF"/>
+                </a:solidFill>
+                <a:latin typeface="Century Gothic"/>
+              </a:rPr>
+              <a:t>.</a:t>
             </a:r>
           </a:p>
           <a:p>
@@ -6341,7 +7854,7 @@
               </a:spcAft>
             </a:pPr>
             <a:r>
-              <a:rPr b="1" sz="1600">
+              <a:rPr sz="1600" b="1">
                 <a:solidFill>
                   <a:srgbClr val="36B5FF"/>
                 </a:solidFill>
@@ -6350,22 +7863,31 @@
               <a:t>▸  </a:t>
             </a:r>
             <a:r>
-              <a:rPr b="0" sz="1600">
+              <a:rPr sz="1600" b="0">
+                <a:solidFill>
+                  <a:srgbClr val="FFFFFF"/>
+                </a:solidFill>
+                <a:latin typeface="Century Gothic"/>
+              </a:rPr>
+              <a:t>Dos objetos con </a:t>
+            </a:r>
+            <a:r>
+              <a:rPr sz="1600" b="0">
                 <a:solidFill>
                   <a:srgbClr val="36B5FF"/>
                 </a:solidFill>
                 <a:latin typeface="Consolas"/>
               </a:rPr>
-              <a:t>while</a:t>
-            </a:r>
-            <a:r>
-              <a:rPr b="0" sz="1600">
-                <a:solidFill>
-                  <a:srgbClr val="FFFFFF"/>
-                </a:solidFill>
-                <a:latin typeface="Century Gothic"/>
-              </a:rPr>
-              <a:t>: repito mientras algo sea cierto.</a:t>
+              <a:t>new</a:t>
+            </a:r>
+            <a:r>
+              <a:rPr sz="1600" b="0">
+                <a:solidFill>
+                  <a:srgbClr val="FFFFFF"/>
+                </a:solidFill>
+                <a:latin typeface="Century Gothic"/>
+              </a:rPr>
+              <a:t>: Ana y Luis.</a:t>
             </a:r>
           </a:p>
           <a:p>
@@ -6375,7 +7897,7 @@
               </a:spcAft>
             </a:pPr>
             <a:r>
-              <a:rPr b="1" sz="1600">
+              <a:rPr sz="1600" b="1">
                 <a:solidFill>
                   <a:srgbClr val="36B5FF"/>
                 </a:solidFill>
@@ -6384,22 +7906,13 @@
               <a:t>▸  </a:t>
             </a:r>
             <a:r>
-              <a:rPr b="0" sz="1600">
-                <a:solidFill>
-                  <a:srgbClr val="36B5FF"/>
-                </a:solidFill>
-                <a:latin typeface="Consolas"/>
-              </a:rPr>
-              <a:t>for-each</a:t>
-            </a:r>
-            <a:r>
-              <a:rPr b="0" sz="1600">
-                <a:solidFill>
-                  <a:srgbClr val="FFFFFF"/>
-                </a:solidFill>
-                <a:latin typeface="Century Gothic"/>
-              </a:rPr>
-              <a:t>: recorro una lista completa.</a:t>
+              <a:rPr sz="1600" b="0">
+                <a:solidFill>
+                  <a:srgbClr val="FFFFFF"/>
+                </a:solidFill>
+                <a:latin typeface="Century Gothic"/>
+              </a:rPr>
+              <a:t>El constructor llena los datos de cada uno.</a:t>
             </a:r>
           </a:p>
         </p:txBody>
@@ -6421,14 +7934,14 @@
           <a:noFill/>
         </p:spPr>
         <p:txBody>
-          <a:bodyPr wrap="square" anchor="t" lIns="0" rIns="0">
+          <a:bodyPr wrap="square" lIns="0" rIns="0" anchor="t">
             <a:spAutoFit/>
           </a:bodyPr>
           <a:lstStyle/>
           <a:p>
             <a:pPr algn="l"/>
             <a:r>
-              <a:rPr b="0" sz="1200">
+              <a:rPr sz="1200" b="0">
                 <a:solidFill>
                   <a:srgbClr val="C9D6E3"/>
                 </a:solidFill>
@@ -6456,20 +7969,20 @@
           <a:noFill/>
         </p:spPr>
         <p:txBody>
-          <a:bodyPr wrap="square" anchor="t" lIns="0" rIns="0">
+          <a:bodyPr wrap="square" lIns="0" rIns="0" anchor="t">
             <a:spAutoFit/>
           </a:bodyPr>
           <a:lstStyle/>
           <a:p>
             <a:pPr algn="r"/>
             <a:r>
-              <a:rPr b="0" sz="1200">
+              <a:rPr sz="1200" b="0">
                 <a:solidFill>
                   <a:srgbClr val="C9D6E3"/>
                 </a:solidFill>
                 <a:latin typeface="Century Gothic"/>
               </a:rPr>
-              <a:t>5</a:t>
+              <a:t>6</a:t>
             </a:r>
           </a:p>
         </p:txBody>
@@ -6482,8 +7995,8 @@
 </p:sld>
 </file>
 
-<file path=ppt/slides/slide6.xml><?xml version="1.0" encoding="utf-8"?>
-<p:sld xmlns:a="http://schemas.openxmlformats.org/drawingml/2006/main" xmlns:p="http://schemas.openxmlformats.org/presentationml/2006/main" xmlns:r="http://schemas.openxmlformats.org/officeDocument/2006/relationships">
+<file path=ppt/slides/slide7.xml><?xml version="1.0" encoding="utf-8"?>
+<p:sld xmlns:a="http://schemas.openxmlformats.org/drawingml/2006/main" xmlns:r="http://schemas.openxmlformats.org/officeDocument/2006/relationships" xmlns:p="http://schemas.openxmlformats.org/presentationml/2006/main">
   <p:cSld>
     <p:bg>
       <p:bgPr>
@@ -6499,7 +8012,14 @@
         <p:cNvGrpSpPr/>
         <p:nvPr/>
       </p:nvGrpSpPr>
-      <p:grpSpPr/>
+      <p:grpSpPr>
+        <a:xfrm>
+          <a:off x="0" y="0"/>
+          <a:ext cx="0" cy="0"/>
+          <a:chOff x="0" y="0"/>
+          <a:chExt cx="0" cy="0"/>
+        </a:xfrm>
+      </p:grpSpPr>
       <p:sp>
         <p:nvSpPr>
           <p:cNvPr id="2" name="Rounded Rectangle 1"/>
@@ -6538,12 +8058,12 @@
           </a:fontRef>
         </p:style>
         <p:txBody>
-          <a:bodyPr rtlCol="0" anchor="ctr" tIns="0" bIns="0" wrap="none"/>
+          <a:bodyPr wrap="none" tIns="0" bIns="0" rtlCol="0" anchor="ctr"/>
           <a:lstStyle/>
           <a:p>
             <a:pPr algn="ctr"/>
             <a:r>
-              <a:rPr b="1" sz="1200">
+              <a:rPr sz="1200" b="1">
                 <a:solidFill>
                   <a:srgbClr val="FFFFFF"/>
                 </a:solidFill>
@@ -6571,20 +8091,20 @@
           <a:noFill/>
         </p:spPr>
         <p:txBody>
-          <a:bodyPr wrap="square" anchor="t" lIns="0" rIns="0">
+          <a:bodyPr wrap="square" lIns="0" rIns="0" anchor="t">
             <a:spAutoFit/>
           </a:bodyPr>
           <a:lstStyle/>
           <a:p>
             <a:pPr algn="l"/>
             <a:r>
-              <a:rPr b="1" sz="2800">
-                <a:solidFill>
-                  <a:srgbClr val="FFFFFF"/>
-                </a:solidFill>
-                <a:latin typeface="Century Gothic"/>
-              </a:rPr>
-              <a:t>La clase es el plano, el objeto es la casa</a:t>
+              <a:rPr sz="2800" b="1">
+                <a:solidFill>
+                  <a:srgbClr val="FFFFFF"/>
+                </a:solidFill>
+                <a:latin typeface="Century Gothic"/>
+              </a:rPr>
+              <a:t>Encapsular: el saldo no se toca a mano</a:t>
             </a:r>
           </a:p>
         </p:txBody>
@@ -6633,6 +8153,7 @@
           <a:lstStyle/>
           <a:p>
             <a:pPr algn="ctr"/>
+            <a:endParaRPr/>
           </a:p>
         </p:txBody>
       </p:sp>
@@ -6653,14 +8174,14 @@
           <a:noFill/>
         </p:spPr>
         <p:txBody>
-          <a:bodyPr wrap="square" anchor="t" lIns="0" rIns="0">
+          <a:bodyPr wrap="square" lIns="0" rIns="0" anchor="t">
             <a:spAutoFit/>
           </a:bodyPr>
           <a:lstStyle/>
           <a:p>
             <a:pPr algn="l"/>
             <a:r>
-              <a:rPr b="1" sz="1200">
+              <a:rPr sz="1200" b="1">
                 <a:solidFill>
                   <a:srgbClr val="36B5FF"/>
                 </a:solidFill>
@@ -6700,7 +8221,7 @@
                 </a:solidFill>
                 <a:latin typeface="Consolas"/>
               </a:rPr>
-              <a:t>public class Estudiante {</a:t>
+              <a:t>private double saldo;</a:t>
             </a:r>
           </a:p>
           <a:p>
@@ -6711,7 +8232,7 @@
                 </a:solidFill>
                 <a:latin typeface="Consolas"/>
               </a:rPr>
-              <a:t>    private String nombre;</a:t>
+              <a:t> </a:t>
             </a:r>
           </a:p>
           <a:p>
@@ -6722,7 +8243,7 @@
                 </a:solidFill>
                 <a:latin typeface="Consolas"/>
               </a:rPr>
-              <a:t>    private double nota;</a:t>
+              <a:t>public boolean retirar(double valor) {</a:t>
             </a:r>
           </a:p>
           <a:p>
@@ -6733,6 +8254,72 @@
                 </a:solidFill>
                 <a:latin typeface="Consolas"/>
               </a:rPr>
+              <a:t>    if (valor &gt; 0 &amp;&amp; valor &lt;= saldo) {</a:t>
+            </a:r>
+          </a:p>
+          <a:p>
+            <a:r>
+              <a:rPr sz="1300">
+                <a:solidFill>
+                  <a:srgbClr val="FFFFFF"/>
+                </a:solidFill>
+                <a:latin typeface="Consolas"/>
+              </a:rPr>
+              <a:t>        saldo = saldo - valor;</a:t>
+            </a:r>
+          </a:p>
+          <a:p>
+            <a:r>
+              <a:rPr sz="1300">
+                <a:solidFill>
+                  <a:srgbClr val="FFFFFF"/>
+                </a:solidFill>
+                <a:latin typeface="Consolas"/>
+              </a:rPr>
+              <a:t>        return true;</a:t>
+            </a:r>
+          </a:p>
+          <a:p>
+            <a:r>
+              <a:rPr sz="1300">
+                <a:solidFill>
+                  <a:srgbClr val="FFFFFF"/>
+                </a:solidFill>
+                <a:latin typeface="Consolas"/>
+              </a:rPr>
+              <a:t>    }</a:t>
+            </a:r>
+          </a:p>
+          <a:p>
+            <a:r>
+              <a:rPr sz="1300">
+                <a:solidFill>
+                  <a:srgbClr val="FFFFFF"/>
+                </a:solidFill>
+                <a:latin typeface="Consolas"/>
+              </a:rPr>
+              <a:t>    return false;</a:t>
+            </a:r>
+          </a:p>
+          <a:p>
+            <a:r>
+              <a:rPr sz="1300">
+                <a:solidFill>
+                  <a:srgbClr val="FFFFFF"/>
+                </a:solidFill>
+                <a:latin typeface="Consolas"/>
+              </a:rPr>
+              <a:t>}</a:t>
+            </a:r>
+          </a:p>
+          <a:p>
+            <a:r>
+              <a:rPr sz="1300">
+                <a:solidFill>
+                  <a:srgbClr val="FFFFFF"/>
+                </a:solidFill>
+                <a:latin typeface="Consolas"/>
+              </a:rPr>
               <a:t> </a:t>
             </a:r>
           </a:p>
@@ -6744,7 +8331,7 @@
                 </a:solidFill>
                 <a:latin typeface="Consolas"/>
               </a:rPr>
-              <a:t>    public Estudiante(String nombre, double nota) {</a:t>
+              <a:t>public double getSaldo() {</a:t>
             </a:r>
           </a:p>
           <a:p>
@@ -6755,7 +8342,7 @@
                 </a:solidFill>
                 <a:latin typeface="Consolas"/>
               </a:rPr>
-              <a:t>        this.nombre = nombre;</a:t>
+              <a:t>    return saldo;</a:t>
             </a:r>
           </a:p>
           <a:p>
@@ -6766,62 +8353,7 @@
                 </a:solidFill>
                 <a:latin typeface="Consolas"/>
               </a:rPr>
-              <a:t>        this.nota = nota;</a:t>
-            </a:r>
-          </a:p>
-          <a:p>
-            <a:r>
-              <a:rPr sz="1300">
-                <a:solidFill>
-                  <a:srgbClr val="FFFFFF"/>
-                </a:solidFill>
-                <a:latin typeface="Consolas"/>
-              </a:rPr>
-              <a:t>    }</a:t>
-            </a:r>
-          </a:p>
-          <a:p>
-            <a:r>
-              <a:rPr sz="1300">
-                <a:solidFill>
-                  <a:srgbClr val="FFFFFF"/>
-                </a:solidFill>
-                <a:latin typeface="Consolas"/>
-              </a:rPr>
               <a:t>}</a:t>
-            </a:r>
-          </a:p>
-          <a:p>
-            <a:r>
-              <a:rPr sz="1300">
-                <a:solidFill>
-                  <a:srgbClr val="FFFFFF"/>
-                </a:solidFill>
-                <a:latin typeface="Consolas"/>
-              </a:rPr>
-              <a:t> </a:t>
-            </a:r>
-          </a:p>
-          <a:p>
-            <a:r>
-              <a:rPr sz="1300">
-                <a:solidFill>
-                  <a:srgbClr val="FFFFFF"/>
-                </a:solidFill>
-                <a:latin typeface="Consolas"/>
-              </a:rPr>
-              <a:t>Estudiante ana = new Estudiante("Ana", 4.5);</a:t>
-            </a:r>
-          </a:p>
-          <a:p>
-            <a:r>
-              <a:rPr sz="1300">
-                <a:solidFill>
-                  <a:srgbClr val="FFFFFF"/>
-                </a:solidFill>
-                <a:latin typeface="Consolas"/>
-              </a:rPr>
-              <a:t>Estudiante luis = new Estudiante("Luis", 2.8);</a:t>
             </a:r>
           </a:p>
         </p:txBody>
@@ -6854,7 +8386,7 @@
               </a:spcAft>
             </a:pPr>
             <a:r>
-              <a:rPr b="1" sz="1600">
+              <a:rPr sz="1600" b="1">
                 <a:solidFill>
                   <a:srgbClr val="36B5FF"/>
                 </a:solidFill>
@@ -6863,31 +8395,22 @@
               <a:t>▸  </a:t>
             </a:r>
             <a:r>
-              <a:rPr b="0" sz="1600">
-                <a:solidFill>
-                  <a:srgbClr val="FFFFFF"/>
-                </a:solidFill>
-                <a:latin typeface="Century Gothic"/>
-              </a:rPr>
-              <a:t>Un solo plano: </a:t>
-            </a:r>
-            <a:r>
-              <a:rPr b="0" sz="1600">
+              <a:rPr sz="1600" b="0">
                 <a:solidFill>
                   <a:srgbClr val="36B5FF"/>
                 </a:solidFill>
                 <a:latin typeface="Consolas"/>
               </a:rPr>
-              <a:t>Estudiante</a:t>
-            </a:r>
-            <a:r>
-              <a:rPr b="0" sz="1600">
-                <a:solidFill>
-                  <a:srgbClr val="FFFFFF"/>
-                </a:solidFill>
-                <a:latin typeface="Century Gothic"/>
-              </a:rPr>
-              <a:t>.</a:t>
+              <a:t>private</a:t>
+            </a:r>
+            <a:r>
+              <a:rPr sz="1600" b="0">
+                <a:solidFill>
+                  <a:srgbClr val="FFFFFF"/>
+                </a:solidFill>
+                <a:latin typeface="Century Gothic"/>
+              </a:rPr>
+              <a:t>: nadie de afuera lo cambia.</a:t>
             </a:r>
           </a:p>
           <a:p>
@@ -6897,7 +8420,7 @@
               </a:spcAft>
             </a:pPr>
             <a:r>
-              <a:rPr b="1" sz="1600">
+              <a:rPr sz="1600" b="1">
                 <a:solidFill>
                   <a:srgbClr val="36B5FF"/>
                 </a:solidFill>
@@ -6906,31 +8429,13 @@
               <a:t>▸  </a:t>
             </a:r>
             <a:r>
-              <a:rPr b="0" sz="1600">
-                <a:solidFill>
-                  <a:srgbClr val="FFFFFF"/>
-                </a:solidFill>
-                <a:latin typeface="Century Gothic"/>
-              </a:rPr>
-              <a:t>Dos objetos con </a:t>
-            </a:r>
-            <a:r>
-              <a:rPr b="0" sz="1600">
-                <a:solidFill>
-                  <a:srgbClr val="36B5FF"/>
-                </a:solidFill>
-                <a:latin typeface="Consolas"/>
-              </a:rPr>
-              <a:t>new</a:t>
-            </a:r>
-            <a:r>
-              <a:rPr b="0" sz="1600">
-                <a:solidFill>
-                  <a:srgbClr val="FFFFFF"/>
-                </a:solidFill>
-                <a:latin typeface="Century Gothic"/>
-              </a:rPr>
-              <a:t>: Ana y Luis.</a:t>
+              <a:rPr sz="1600" b="0">
+                <a:solidFill>
+                  <a:srgbClr val="FFFFFF"/>
+                </a:solidFill>
+                <a:latin typeface="Century Gothic"/>
+              </a:rPr>
+              <a:t>Se usa por métodos que validan.</a:t>
             </a:r>
           </a:p>
           <a:p>
@@ -6940,7 +8445,7 @@
               </a:spcAft>
             </a:pPr>
             <a:r>
-              <a:rPr b="1" sz="1600">
+              <a:rPr sz="1600" b="1">
                 <a:solidFill>
                   <a:srgbClr val="36B5FF"/>
                 </a:solidFill>
@@ -6949,13 +8454,13 @@
               <a:t>▸  </a:t>
             </a:r>
             <a:r>
-              <a:rPr b="0" sz="1600">
-                <a:solidFill>
-                  <a:srgbClr val="FFFFFF"/>
-                </a:solidFill>
-                <a:latin typeface="Century Gothic"/>
-              </a:rPr>
-              <a:t>El constructor llena los datos de cada uno.</a:t>
+              <a:rPr sz="1600" b="0">
+                <a:solidFill>
+                  <a:srgbClr val="FFFFFF"/>
+                </a:solidFill>
+                <a:latin typeface="Century Gothic"/>
+              </a:rPr>
+              <a:t>Como un cajero: tú no abres la caja fuerte.</a:t>
             </a:r>
           </a:p>
         </p:txBody>
@@ -6977,14 +8482,14 @@
           <a:noFill/>
         </p:spPr>
         <p:txBody>
-          <a:bodyPr wrap="square" anchor="t" lIns="0" rIns="0">
+          <a:bodyPr wrap="square" lIns="0" rIns="0" anchor="t">
             <a:spAutoFit/>
           </a:bodyPr>
           <a:lstStyle/>
           <a:p>
             <a:pPr algn="l"/>
             <a:r>
-              <a:rPr b="0" sz="1200">
+              <a:rPr sz="1200" b="0">
                 <a:solidFill>
                   <a:srgbClr val="C9D6E3"/>
                 </a:solidFill>
@@ -7012,20 +8517,20 @@
           <a:noFill/>
         </p:spPr>
         <p:txBody>
-          <a:bodyPr wrap="square" anchor="t" lIns="0" rIns="0">
+          <a:bodyPr wrap="square" lIns="0" rIns="0" anchor="t">
             <a:spAutoFit/>
           </a:bodyPr>
           <a:lstStyle/>
           <a:p>
             <a:pPr algn="r"/>
             <a:r>
-              <a:rPr b="0" sz="1200">
+              <a:rPr sz="1200" b="0">
                 <a:solidFill>
                   <a:srgbClr val="C9D6E3"/>
                 </a:solidFill>
                 <a:latin typeface="Century Gothic"/>
               </a:rPr>
-              <a:t>6</a:t>
+              <a:t>7</a:t>
             </a:r>
           </a:p>
         </p:txBody>
@@ -7038,8 +8543,8 @@
 </p:sld>
 </file>
 
-<file path=ppt/slides/slide7.xml><?xml version="1.0" encoding="utf-8"?>
-<p:sld xmlns:a="http://schemas.openxmlformats.org/drawingml/2006/main" xmlns:p="http://schemas.openxmlformats.org/presentationml/2006/main" xmlns:r="http://schemas.openxmlformats.org/officeDocument/2006/relationships">
+<file path=ppt/slides/slide8.xml><?xml version="1.0" encoding="utf-8"?>
+<p:sld xmlns:a="http://schemas.openxmlformats.org/drawingml/2006/main" xmlns:r="http://schemas.openxmlformats.org/officeDocument/2006/relationships" xmlns:p="http://schemas.openxmlformats.org/presentationml/2006/main">
   <p:cSld>
     <p:bg>
       <p:bgPr>
@@ -7055,7 +8560,14 @@
         <p:cNvGrpSpPr/>
         <p:nvPr/>
       </p:nvGrpSpPr>
-      <p:grpSpPr/>
+      <p:grpSpPr>
+        <a:xfrm>
+          <a:off x="0" y="0"/>
+          <a:ext cx="0" cy="0"/>
+          <a:chOff x="0" y="0"/>
+          <a:chExt cx="0" cy="0"/>
+        </a:xfrm>
+      </p:grpSpPr>
       <p:sp>
         <p:nvSpPr>
           <p:cNvPr id="2" name="Rounded Rectangle 1"/>
@@ -7094,18 +8606,18 @@
           </a:fontRef>
         </p:style>
         <p:txBody>
-          <a:bodyPr rtlCol="0" anchor="ctr" tIns="0" bIns="0" wrap="none"/>
+          <a:bodyPr wrap="none" tIns="0" bIns="0" rtlCol="0" anchor="ctr"/>
           <a:lstStyle/>
           <a:p>
             <a:pPr algn="ctr"/>
             <a:r>
-              <a:rPr b="1" sz="1200">
-                <a:solidFill>
-                  <a:srgbClr val="FFFFFF"/>
-                </a:solidFill>
-                <a:latin typeface="Century Gothic"/>
-              </a:rPr>
-              <a:t>TEMA 2</a:t>
+              <a:rPr sz="1200" b="1">
+                <a:solidFill>
+                  <a:srgbClr val="FFFFFF"/>
+                </a:solidFill>
+                <a:latin typeface="Century Gothic"/>
+              </a:rPr>
+              <a:t>TEMA 3</a:t>
             </a:r>
           </a:p>
         </p:txBody>
@@ -7127,20 +8639,20 @@
           <a:noFill/>
         </p:spPr>
         <p:txBody>
-          <a:bodyPr wrap="square" anchor="t" lIns="0" rIns="0">
+          <a:bodyPr wrap="square" lIns="0" rIns="0" anchor="t">
             <a:spAutoFit/>
           </a:bodyPr>
           <a:lstStyle/>
           <a:p>
             <a:pPr algn="l"/>
             <a:r>
-              <a:rPr b="1" sz="2800">
-                <a:solidFill>
-                  <a:srgbClr val="FFFFFF"/>
-                </a:solidFill>
-                <a:latin typeface="Century Gothic"/>
-              </a:rPr>
-              <a:t>Encapsular: el saldo no se toca a mano</a:t>
+              <a:rPr sz="2800" b="1">
+                <a:solidFill>
+                  <a:srgbClr val="FFFFFF"/>
+                </a:solidFill>
+                <a:latin typeface="Century Gothic"/>
+              </a:rPr>
+              <a:t>Herencia: el hijo recibe lo del padre</a:t>
             </a:r>
           </a:p>
         </p:txBody>
@@ -7189,6 +8701,7 @@
           <a:lstStyle/>
           <a:p>
             <a:pPr algn="ctr"/>
+            <a:endParaRPr/>
           </a:p>
         </p:txBody>
       </p:sp>
@@ -7209,14 +8722,14 @@
           <a:noFill/>
         </p:spPr>
         <p:txBody>
-          <a:bodyPr wrap="square" anchor="t" lIns="0" rIns="0">
+          <a:bodyPr wrap="square" lIns="0" rIns="0" anchor="t">
             <a:spAutoFit/>
           </a:bodyPr>
           <a:lstStyle/>
           <a:p>
             <a:pPr algn="l"/>
             <a:r>
-              <a:rPr b="1" sz="1200">
+              <a:rPr sz="1200" b="1">
                 <a:solidFill>
                   <a:srgbClr val="36B5FF"/>
                 </a:solidFill>
@@ -7256,7 +8769,7 @@
                 </a:solidFill>
                 <a:latin typeface="Consolas"/>
               </a:rPr>
-              <a:t>private double saldo;</a:t>
+              <a:t>public class Perro extends Animal {</a:t>
             </a:r>
           </a:p>
           <a:p>
@@ -7278,7 +8791,7 @@
                 </a:solidFill>
                 <a:latin typeface="Consolas"/>
               </a:rPr>
-              <a:t>public boolean retirar(double valor) {</a:t>
+              <a:t>    public Perro(String nombre) {</a:t>
             </a:r>
           </a:p>
           <a:p>
@@ -7289,7 +8802,7 @@
                 </a:solidFill>
                 <a:latin typeface="Consolas"/>
               </a:rPr>
-              <a:t>    if (valor &gt; 0 &amp;&amp; valor &lt;= saldo) {</a:t>
+              <a:t>        super(nombre);</a:t>
             </a:r>
           </a:p>
           <a:p>
@@ -7300,7 +8813,7 @@
                 </a:solidFill>
                 <a:latin typeface="Consolas"/>
               </a:rPr>
-              <a:t>        saldo = saldo - valor;</a:t>
+              <a:t>    }</a:t>
             </a:r>
           </a:p>
           <a:p>
@@ -7311,7 +8824,7 @@
                 </a:solidFill>
                 <a:latin typeface="Consolas"/>
               </a:rPr>
-              <a:t>        return true;</a:t>
+              <a:t> </a:t>
             </a:r>
           </a:p>
           <a:p>
@@ -7322,6 +8835,39 @@
                 </a:solidFill>
                 <a:latin typeface="Consolas"/>
               </a:rPr>
+              <a:t>    @Override</a:t>
+            </a:r>
+          </a:p>
+          <a:p>
+            <a:r>
+              <a:rPr sz="1300">
+                <a:solidFill>
+                  <a:srgbClr val="FFFFFF"/>
+                </a:solidFill>
+                <a:latin typeface="Consolas"/>
+              </a:rPr>
+              <a:t>    public String hacerSonido() {</a:t>
+            </a:r>
+          </a:p>
+          <a:p>
+            <a:r>
+              <a:rPr sz="1300">
+                <a:solidFill>
+                  <a:srgbClr val="FFFFFF"/>
+                </a:solidFill>
+                <a:latin typeface="Consolas"/>
+              </a:rPr>
+              <a:t>        return "Guau";</a:t>
+            </a:r>
+          </a:p>
+          <a:p>
+            <a:r>
+              <a:rPr sz="1300">
+                <a:solidFill>
+                  <a:srgbClr val="FFFFFF"/>
+                </a:solidFill>
+                <a:latin typeface="Consolas"/>
+              </a:rPr>
               <a:t>    }</a:t>
             </a:r>
           </a:p>
@@ -7333,7 +8879,7 @@
                 </a:solidFill>
                 <a:latin typeface="Consolas"/>
               </a:rPr>
-              <a:t>    return false;</a:t>
+              <a:t>}</a:t>
             </a:r>
           </a:p>
           <a:p>
@@ -7344,7 +8890,7 @@
                 </a:solidFill>
                 <a:latin typeface="Consolas"/>
               </a:rPr>
-              <a:t>}</a:t>
+              <a:t> </a:t>
             </a:r>
           </a:p>
           <a:p>
@@ -7355,7 +8901,7 @@
                 </a:solidFill>
                 <a:latin typeface="Consolas"/>
               </a:rPr>
-              <a:t> </a:t>
+              <a:t>Perro perro = new Perro("Firulais");</a:t>
             </a:r>
           </a:p>
           <a:p>
@@ -7366,7 +8912,7 @@
                 </a:solidFill>
                 <a:latin typeface="Consolas"/>
               </a:rPr>
-              <a:t>public double getSaldo() {</a:t>
+              <a:t>System.out.println(perro.getNombre()</a:t>
             </a:r>
           </a:p>
           <a:p>
@@ -7377,18 +8923,7 @@
                 </a:solidFill>
                 <a:latin typeface="Consolas"/>
               </a:rPr>
-              <a:t>    return saldo;</a:t>
-            </a:r>
-          </a:p>
-          <a:p>
-            <a:r>
-              <a:rPr sz="1300">
-                <a:solidFill>
-                  <a:srgbClr val="FFFFFF"/>
-                </a:solidFill>
-                <a:latin typeface="Consolas"/>
-              </a:rPr>
-              <a:t>}</a:t>
+              <a:t>        + " dice " + perro.hacerSonido());</a:t>
             </a:r>
           </a:p>
         </p:txBody>
@@ -7421,7 +8956,7 @@
               </a:spcAft>
             </a:pPr>
             <a:r>
-              <a:rPr b="1" sz="1600">
+              <a:rPr sz="1600" b="1">
                 <a:solidFill>
                   <a:srgbClr val="36B5FF"/>
                 </a:solidFill>
@@ -7430,22 +8965,40 @@
               <a:t>▸  </a:t>
             </a:r>
             <a:r>
-              <a:rPr b="0" sz="1600">
+              <a:rPr sz="1600" b="0">
                 <a:solidFill>
                   <a:srgbClr val="36B5FF"/>
                 </a:solidFill>
                 <a:latin typeface="Consolas"/>
               </a:rPr>
-              <a:t>private</a:t>
-            </a:r>
-            <a:r>
-              <a:rPr b="0" sz="1600">
-                <a:solidFill>
-                  <a:srgbClr val="FFFFFF"/>
-                </a:solidFill>
-                <a:latin typeface="Century Gothic"/>
-              </a:rPr>
-              <a:t>: nadie de afuera lo cambia.</a:t>
+              <a:t>extends</a:t>
+            </a:r>
+            <a:r>
+              <a:rPr sz="1600" b="0">
+                <a:solidFill>
+                  <a:srgbClr val="FFFFFF"/>
+                </a:solidFill>
+                <a:latin typeface="Century Gothic"/>
+              </a:rPr>
+              <a:t>: Perro recibe el nombre y </a:t>
+            </a:r>
+            <a:r>
+              <a:rPr sz="1600" b="0">
+                <a:solidFill>
+                  <a:srgbClr val="36B5FF"/>
+                </a:solidFill>
+                <a:latin typeface="Consolas"/>
+              </a:rPr>
+              <a:t>getNombre()</a:t>
+            </a:r>
+            <a:r>
+              <a:rPr sz="1600" b="0">
+                <a:solidFill>
+                  <a:srgbClr val="FFFFFF"/>
+                </a:solidFill>
+                <a:latin typeface="Century Gothic"/>
+              </a:rPr>
+              <a:t> de Animal.</a:t>
             </a:r>
           </a:p>
           <a:p>
@@ -7455,7 +9008,7 @@
               </a:spcAft>
             </a:pPr>
             <a:r>
-              <a:rPr b="1" sz="1600">
+              <a:rPr sz="1600" b="1">
                 <a:solidFill>
                   <a:srgbClr val="36B5FF"/>
                 </a:solidFill>
@@ -7464,13 +9017,22 @@
               <a:t>▸  </a:t>
             </a:r>
             <a:r>
-              <a:rPr b="0" sz="1600">
-                <a:solidFill>
-                  <a:srgbClr val="FFFFFF"/>
-                </a:solidFill>
-                <a:latin typeface="Century Gothic"/>
-              </a:rPr>
-              <a:t>Se usa por métodos que validan.</a:t>
+              <a:rPr sz="1600" b="0">
+                <a:solidFill>
+                  <a:srgbClr val="36B5FF"/>
+                </a:solidFill>
+                <a:latin typeface="Consolas"/>
+              </a:rPr>
+              <a:t>super(nombre)</a:t>
+            </a:r>
+            <a:r>
+              <a:rPr sz="1600" b="0">
+                <a:solidFill>
+                  <a:srgbClr val="FFFFFF"/>
+                </a:solidFill>
+                <a:latin typeface="Century Gothic"/>
+              </a:rPr>
+              <a:t>: le entrega el nombre al padre.</a:t>
             </a:r>
           </a:p>
           <a:p>
@@ -7480,7 +9042,7 @@
               </a:spcAft>
             </a:pPr>
             <a:r>
-              <a:rPr b="1" sz="1600">
+              <a:rPr sz="1600" b="1">
                 <a:solidFill>
                   <a:srgbClr val="36B5FF"/>
                 </a:solidFill>
@@ -7489,13 +9051,22 @@
               <a:t>▸  </a:t>
             </a:r>
             <a:r>
-              <a:rPr b="0" sz="1600">
-                <a:solidFill>
-                  <a:srgbClr val="FFFFFF"/>
-                </a:solidFill>
-                <a:latin typeface="Century Gothic"/>
-              </a:rPr>
-              <a:t>Como un cajero: tú no abres la caja fuerte.</a:t>
+              <a:rPr sz="1600" b="0">
+                <a:solidFill>
+                  <a:srgbClr val="36B5FF"/>
+                </a:solidFill>
+                <a:latin typeface="Consolas"/>
+              </a:rPr>
+              <a:t>@Override</a:t>
+            </a:r>
+            <a:r>
+              <a:rPr sz="1600" b="0">
+                <a:solidFill>
+                  <a:srgbClr val="FFFFFF"/>
+                </a:solidFill>
+                <a:latin typeface="Century Gothic"/>
+              </a:rPr>
+              <a:t>: cambia el sonido que venía del padre.</a:t>
             </a:r>
           </a:p>
         </p:txBody>
@@ -7517,14 +9088,14 @@
           <a:noFill/>
         </p:spPr>
         <p:txBody>
-          <a:bodyPr wrap="square" anchor="t" lIns="0" rIns="0">
+          <a:bodyPr wrap="square" lIns="0" rIns="0" anchor="t">
             <a:spAutoFit/>
           </a:bodyPr>
           <a:lstStyle/>
           <a:p>
             <a:pPr algn="l"/>
             <a:r>
-              <a:rPr b="0" sz="1200">
+              <a:rPr sz="1200" b="0">
                 <a:solidFill>
                   <a:srgbClr val="C9D6E3"/>
                 </a:solidFill>
@@ -7552,20 +9123,20 @@
           <a:noFill/>
         </p:spPr>
         <p:txBody>
-          <a:bodyPr wrap="square" anchor="t" lIns="0" rIns="0">
+          <a:bodyPr wrap="square" lIns="0" rIns="0" anchor="t">
             <a:spAutoFit/>
           </a:bodyPr>
           <a:lstStyle/>
           <a:p>
             <a:pPr algn="r"/>
             <a:r>
-              <a:rPr b="0" sz="1200">
+              <a:rPr sz="1200" b="0">
                 <a:solidFill>
                   <a:srgbClr val="C9D6E3"/>
                 </a:solidFill>
                 <a:latin typeface="Century Gothic"/>
               </a:rPr>
-              <a:t>7</a:t>
+              <a:t>8</a:t>
             </a:r>
           </a:p>
         </p:txBody>
@@ -7578,8 +9149,8 @@
 </p:sld>
 </file>
 
-<file path=ppt/slides/slide8.xml><?xml version="1.0" encoding="utf-8"?>
-<p:sld xmlns:a="http://schemas.openxmlformats.org/drawingml/2006/main" xmlns:p="http://schemas.openxmlformats.org/presentationml/2006/main" xmlns:r="http://schemas.openxmlformats.org/officeDocument/2006/relationships">
+<file path=ppt/slides/slide9.xml><?xml version="1.0" encoding="utf-8"?>
+<p:sld xmlns:a="http://schemas.openxmlformats.org/drawingml/2006/main" xmlns:r="http://schemas.openxmlformats.org/officeDocument/2006/relationships" xmlns:p="http://schemas.openxmlformats.org/presentationml/2006/main">
   <p:cSld>
     <p:bg>
       <p:bgPr>
@@ -7595,7 +9166,14 @@
         <p:cNvGrpSpPr/>
         <p:nvPr/>
       </p:nvGrpSpPr>
-      <p:grpSpPr/>
+      <p:grpSpPr>
+        <a:xfrm>
+          <a:off x="0" y="0"/>
+          <a:ext cx="0" cy="0"/>
+          <a:chOff x="0" y="0"/>
+          <a:chExt cx="0" cy="0"/>
+        </a:xfrm>
+      </p:grpSpPr>
       <p:sp>
         <p:nvSpPr>
           <p:cNvPr id="2" name="Rounded Rectangle 1"/>
@@ -7605,7 +9183,7 @@
         <p:spPr>
           <a:xfrm>
             <a:off x="548640" y="411480"/>
-            <a:ext cx="1124712" cy="329184"/>
+            <a:ext cx="1362456" cy="329184"/>
           </a:xfrm>
           <a:prstGeom prst="roundRect">
             <a:avLst>
@@ -7634,18 +9212,18 @@
           </a:fontRef>
         </p:style>
         <p:txBody>
-          <a:bodyPr rtlCol="0" anchor="ctr" tIns="0" bIns="0" wrap="none"/>
+          <a:bodyPr wrap="none" tIns="0" bIns="0" rtlCol="0" anchor="ctr"/>
           <a:lstStyle/>
           <a:p>
             <a:pPr algn="ctr"/>
             <a:r>
-              <a:rPr b="1" sz="1200">
-                <a:solidFill>
-                  <a:srgbClr val="FFFFFF"/>
-                </a:solidFill>
-                <a:latin typeface="Century Gothic"/>
-              </a:rPr>
-              <a:t>TEMA 3</a:t>
+              <a:rPr sz="1200" b="1">
+                <a:solidFill>
+                  <a:srgbClr val="FFFFFF"/>
+                </a:solidFill>
+                <a:latin typeface="Century Gothic"/>
+              </a:rPr>
+              <a:t>PRÁCTICA</a:t>
             </a:r>
           </a:p>
         </p:txBody>
@@ -7667,20 +9245,20 @@
           <a:noFill/>
         </p:spPr>
         <p:txBody>
-          <a:bodyPr wrap="square" anchor="t" lIns="0" rIns="0">
+          <a:bodyPr wrap="square" lIns="0" rIns="0" anchor="t">
             <a:spAutoFit/>
           </a:bodyPr>
           <a:lstStyle/>
           <a:p>
             <a:pPr algn="l"/>
             <a:r>
-              <a:rPr b="1" sz="2800">
-                <a:solidFill>
-                  <a:srgbClr val="FFFFFF"/>
-                </a:solidFill>
-                <a:latin typeface="Century Gothic"/>
-              </a:rPr>
-              <a:t>Herencia y polimorfismo</a:t>
+              <a:rPr sz="2800" b="1">
+                <a:solidFill>
+                  <a:srgbClr val="FFFFFF"/>
+                </a:solidFill>
+                <a:latin typeface="Century Gothic"/>
+              </a:rPr>
+              <a:t>Cómo lo corres y cómo lees un error</a:t>
             </a:r>
           </a:p>
         </p:txBody>
@@ -7693,18 +9271,18 @@
         </p:nvSpPr>
         <p:spPr>
           <a:xfrm>
-            <a:off x="548640" y="1737360"/>
-            <a:ext cx="6949440" cy="4389120"/>
+            <a:off x="548640" y="2057400"/>
+            <a:ext cx="2464993" cy="2651760"/>
           </a:xfrm>
           <a:prstGeom prst="roundRect">
             <a:avLst>
-              <a:gd name="adj" fmla="val 3000"/>
+              <a:gd name="adj" fmla="val 6000"/>
             </a:avLst>
           </a:prstGeom>
           <a:solidFill>
-            <a:srgbClr val="0A1B33"/>
+            <a:srgbClr val="0B2C59"/>
           </a:solidFill>
-          <a:ln w="12700">
+          <a:ln w="15875">
             <a:solidFill>
               <a:srgbClr val="5EA7D8"/>
             </a:solidFill>
@@ -7728,7 +9306,7 @@
           <a:bodyPr rtlCol="0" anchor="ctr"/>
           <a:lstStyle/>
           <a:p>
-            <a:pPr algn="ctr"/>
+            <a:endParaRPr/>
           </a:p>
         </p:txBody>
       </p:sp>
@@ -7740,8 +9318,8 @@
         </p:nvSpPr>
         <p:spPr>
           <a:xfrm>
-            <a:off x="777240" y="1847088"/>
-            <a:ext cx="2743200" cy="274320"/>
+            <a:off x="777240" y="2286000"/>
+            <a:ext cx="2007793" cy="548640"/>
           </a:xfrm>
           <a:prstGeom prst="rect">
             <a:avLst/>
@@ -7749,20 +9327,20 @@
           <a:noFill/>
         </p:spPr>
         <p:txBody>
-          <a:bodyPr wrap="square" anchor="t" lIns="0" rIns="0">
+          <a:bodyPr wrap="square" lIns="0" rIns="0" anchor="t">
             <a:spAutoFit/>
           </a:bodyPr>
           <a:lstStyle/>
           <a:p>
             <a:pPr algn="l"/>
             <a:r>
-              <a:rPr b="1" sz="1200">
-                <a:solidFill>
-                  <a:srgbClr val="36B5FF"/>
-                </a:solidFill>
-                <a:latin typeface="Century Gothic"/>
-              </a:rPr>
-              <a:t>Java</a:t>
+              <a:rPr sz="1800" b="1">
+                <a:solidFill>
+                  <a:srgbClr val="FFFFFF"/>
+                </a:solidFill>
+                <a:latin typeface="Century Gothic"/>
+              </a:rPr>
+              <a:t>1. PowerShell</a:t>
             </a:r>
           </a:p>
         </p:txBody>
@@ -7775,8 +9353,8 @@
         </p:nvSpPr>
         <p:spPr>
           <a:xfrm>
-            <a:off x="777240" y="2194560"/>
-            <a:ext cx="6492240" cy="3840480"/>
+            <a:off x="777240" y="2788920"/>
+            <a:ext cx="2007793" cy="1737360"/>
           </a:xfrm>
           <a:prstGeom prst="rect">
             <a:avLst/>
@@ -7784,570 +9362,23 @@
           <a:noFill/>
         </p:spPr>
         <p:txBody>
-          <a:bodyPr wrap="square">
+          <a:bodyPr wrap="square" lIns="0" rIns="0" anchor="t">
             <a:spAutoFit/>
           </a:bodyPr>
           <a:lstStyle/>
           <a:p>
-            <a:r>
-              <a:rPr sz="1300">
-                <a:solidFill>
-                  <a:srgbClr val="FFFFFF"/>
-                </a:solidFill>
-                <a:latin typeface="Consolas"/>
-              </a:rPr>
-              <a:t>public class Perro extends Animal {</a:t>
-            </a:r>
-          </a:p>
-          <a:p>
-            <a:r>
-              <a:rPr sz="1300">
-                <a:solidFill>
-                  <a:srgbClr val="FFFFFF"/>
-                </a:solidFill>
-                <a:latin typeface="Consolas"/>
-              </a:rPr>
-              <a:t>    @Override</a:t>
-            </a:r>
-          </a:p>
-          <a:p>
-            <a:r>
-              <a:rPr sz="1300">
-                <a:solidFill>
-                  <a:srgbClr val="FFFFFF"/>
-                </a:solidFill>
-                <a:latin typeface="Consolas"/>
-              </a:rPr>
-              <a:t>    public String hacerSonido() {</a:t>
-            </a:r>
-          </a:p>
-          <a:p>
-            <a:r>
-              <a:rPr sz="1300">
-                <a:solidFill>
-                  <a:srgbClr val="FFFFFF"/>
-                </a:solidFill>
-                <a:latin typeface="Consolas"/>
-              </a:rPr>
-              <a:t>        return "Guau";</a:t>
-            </a:r>
-          </a:p>
-          <a:p>
-            <a:r>
-              <a:rPr sz="1300">
-                <a:solidFill>
-                  <a:srgbClr val="FFFFFF"/>
-                </a:solidFill>
-                <a:latin typeface="Consolas"/>
-              </a:rPr>
-              <a:t>    }</a:t>
-            </a:r>
-          </a:p>
-          <a:p>
-            <a:r>
-              <a:rPr sz="1300">
-                <a:solidFill>
-                  <a:srgbClr val="FFFFFF"/>
-                </a:solidFill>
-                <a:latin typeface="Consolas"/>
-              </a:rPr>
-              <a:t>}</a:t>
-            </a:r>
-          </a:p>
-          <a:p>
-            <a:r>
-              <a:rPr sz="1300">
-                <a:solidFill>
-                  <a:srgbClr val="FFFFFF"/>
-                </a:solidFill>
-                <a:latin typeface="Consolas"/>
-              </a:rPr>
-              <a:t> </a:t>
-            </a:r>
-          </a:p>
-          <a:p>
-            <a:r>
-              <a:rPr sz="1300">
-                <a:solidFill>
-                  <a:srgbClr val="FFFFFF"/>
-                </a:solidFill>
-                <a:latin typeface="Consolas"/>
-              </a:rPr>
-              <a:t>List&lt;Animal&gt; animales = List.of(</a:t>
-            </a:r>
-          </a:p>
-          <a:p>
-            <a:r>
-              <a:rPr sz="1300">
-                <a:solidFill>
-                  <a:srgbClr val="FFFFFF"/>
-                </a:solidFill>
-                <a:latin typeface="Consolas"/>
-              </a:rPr>
-              <a:t>        new Perro("Firulais"), new Gato("Michi"));</a:t>
-            </a:r>
-          </a:p>
-          <a:p>
-            <a:r>
-              <a:rPr sz="1300">
-                <a:solidFill>
-                  <a:srgbClr val="FFFFFF"/>
-                </a:solidFill>
-                <a:latin typeface="Consolas"/>
-              </a:rPr>
-              <a:t>for (Animal animal : animales) {</a:t>
-            </a:r>
-          </a:p>
-          <a:p>
-            <a:r>
-              <a:rPr sz="1300">
-                <a:solidFill>
-                  <a:srgbClr val="FFFFFF"/>
-                </a:solidFill>
-                <a:latin typeface="Consolas"/>
-              </a:rPr>
-              <a:t>    System.out.println(animal.getNombre()</a:t>
-            </a:r>
-          </a:p>
-          <a:p>
-            <a:r>
-              <a:rPr sz="1300">
-                <a:solidFill>
-                  <a:srgbClr val="FFFFFF"/>
-                </a:solidFill>
-                <a:latin typeface="Consolas"/>
-              </a:rPr>
-              <a:t>            + " dice " + animal.hacerSonido());</a:t>
-            </a:r>
-          </a:p>
-          <a:p>
-            <a:r>
-              <a:rPr sz="1300">
-                <a:solidFill>
-                  <a:srgbClr val="FFFFFF"/>
-                </a:solidFill>
-                <a:latin typeface="Consolas"/>
-              </a:rPr>
-              <a:t>}</a:t>
-            </a:r>
-          </a:p>
-        </p:txBody>
-      </p:sp>
-      <p:sp>
-        <p:nvSpPr>
-          <p:cNvPr id="7" name="TextBox 6"/>
-          <p:cNvSpPr txBox="1"/>
-          <p:nvPr/>
-        </p:nvSpPr>
-        <p:spPr>
-          <a:xfrm>
-            <a:off x="7863840" y="1737360"/>
-            <a:ext cx="3779215" cy="4389120"/>
-          </a:xfrm>
-          <a:prstGeom prst="rect">
-            <a:avLst/>
-          </a:prstGeom>
-          <a:noFill/>
-        </p:spPr>
-        <p:txBody>
-          <a:bodyPr wrap="square">
-            <a:spAutoFit/>
-          </a:bodyPr>
-          <a:lstStyle/>
-          <a:p>
-            <a:pPr>
-              <a:spcAft>
-                <a:spcPts val="1000"/>
-              </a:spcAft>
-            </a:pPr>
-            <a:r>
-              <a:rPr b="1" sz="1600">
+            <a:pPr algn="l"/>
+            <a:r>
+              <a:rPr sz="1400" b="0">
                 <a:solidFill>
                   <a:srgbClr val="36B5FF"/>
                 </a:solidFill>
-                <a:latin typeface="Century Gothic"/>
-              </a:rPr>
-              <a:t>▸  </a:t>
-            </a:r>
-            <a:r>
-              <a:rPr b="0" sz="1600">
-                <a:solidFill>
-                  <a:srgbClr val="36B5FF"/>
-                </a:solidFill>
-                <a:latin typeface="Consolas"/>
-              </a:rPr>
-              <a:t>extends</a:t>
-            </a:r>
-            <a:r>
-              <a:rPr b="0" sz="1600">
-                <a:solidFill>
-                  <a:srgbClr val="FFFFFF"/>
-                </a:solidFill>
-                <a:latin typeface="Century Gothic"/>
-              </a:rPr>
-              <a:t>: Perro hereda nombre de Animal.</a:t>
-            </a:r>
-          </a:p>
-          <a:p>
-            <a:pPr>
-              <a:spcAft>
-                <a:spcPts val="1000"/>
-              </a:spcAft>
-            </a:pPr>
-            <a:r>
-              <a:rPr b="1" sz="1600">
-                <a:solidFill>
-                  <a:srgbClr val="36B5FF"/>
-                </a:solidFill>
-                <a:latin typeface="Century Gothic"/>
-              </a:rPr>
-              <a:t>▸  </a:t>
-            </a:r>
-            <a:r>
-              <a:rPr b="0" sz="1600">
-                <a:solidFill>
-                  <a:srgbClr val="36B5FF"/>
-                </a:solidFill>
-                <a:latin typeface="Consolas"/>
-              </a:rPr>
-              <a:t>@Override</a:t>
-            </a:r>
-            <a:r>
-              <a:rPr b="0" sz="1600">
-                <a:solidFill>
-                  <a:srgbClr val="FFFFFF"/>
-                </a:solidFill>
-                <a:latin typeface="Century Gothic"/>
-              </a:rPr>
-              <a:t>: cambia el sonido del padre.</a:t>
-            </a:r>
-          </a:p>
-          <a:p>
-            <a:pPr>
-              <a:spcAft>
-                <a:spcPts val="1000"/>
-              </a:spcAft>
-            </a:pPr>
-            <a:r>
-              <a:rPr b="1" sz="1600">
-                <a:solidFill>
-                  <a:srgbClr val="36B5FF"/>
-                </a:solidFill>
-                <a:latin typeface="Century Gothic"/>
-              </a:rPr>
-              <a:t>▸  </a:t>
-            </a:r>
-            <a:r>
-              <a:rPr b="0" sz="1600">
-                <a:solidFill>
-                  <a:srgbClr val="FFFFFF"/>
-                </a:solidFill>
-                <a:latin typeface="Century Gothic"/>
-              </a:rPr>
-              <a:t>Una misma orden, cada uno responde a su manera.</a:t>
-            </a:r>
-          </a:p>
-        </p:txBody>
-      </p:sp>
-      <p:sp>
-        <p:nvSpPr>
-          <p:cNvPr id="8" name="TextBox 7"/>
-          <p:cNvSpPr txBox="1"/>
-          <p:nvPr/>
-        </p:nvSpPr>
-        <p:spPr>
-          <a:xfrm>
-            <a:off x="548640" y="6400800"/>
-            <a:ext cx="8229600" cy="274320"/>
-          </a:xfrm>
-          <a:prstGeom prst="rect">
-            <a:avLst/>
-          </a:prstGeom>
-          <a:noFill/>
-        </p:spPr>
-        <p:txBody>
-          <a:bodyPr wrap="square" anchor="t" lIns="0" rIns="0">
-            <a:spAutoFit/>
-          </a:bodyPr>
-          <a:lstStyle/>
-          <a:p>
-            <a:pPr algn="l"/>
-            <a:r>
-              <a:rPr b="0" sz="1200">
-                <a:solidFill>
-                  <a:srgbClr val="C9D6E3"/>
-                </a:solidFill>
-                <a:latin typeface="Century Gothic"/>
-              </a:rPr>
-              <a:t>Semillero QA 2026 · Automatización Web · Clase 1 · 01-fundamentos-java-poo</a:t>
-            </a:r>
-          </a:p>
-        </p:txBody>
-      </p:sp>
-      <p:sp>
-        <p:nvSpPr>
-          <p:cNvPr id="9" name="TextBox 8"/>
-          <p:cNvSpPr txBox="1"/>
-          <p:nvPr/>
-        </p:nvSpPr>
-        <p:spPr>
-          <a:xfrm>
-            <a:off x="10728655" y="6400800"/>
-            <a:ext cx="914400" cy="274320"/>
-          </a:xfrm>
-          <a:prstGeom prst="rect">
-            <a:avLst/>
-          </a:prstGeom>
-          <a:noFill/>
-        </p:spPr>
-        <p:txBody>
-          <a:bodyPr wrap="square" anchor="t" lIns="0" rIns="0">
-            <a:spAutoFit/>
-          </a:bodyPr>
-          <a:lstStyle/>
-          <a:p>
-            <a:pPr algn="r"/>
-            <a:r>
-              <a:rPr b="0" sz="1200">
-                <a:solidFill>
-                  <a:srgbClr val="C9D6E3"/>
-                </a:solidFill>
-                <a:latin typeface="Century Gothic"/>
-              </a:rPr>
-              <a:t>8</a:t>
-            </a:r>
-          </a:p>
-        </p:txBody>
-      </p:sp>
-    </p:spTree>
-  </p:cSld>
-  <p:clrMapOvr>
-    <a:masterClrMapping/>
-  </p:clrMapOvr>
-</p:sld>
-</file>
-
-<file path=ppt/slides/slide9.xml><?xml version="1.0" encoding="utf-8"?>
-<p:sld xmlns:a="http://schemas.openxmlformats.org/drawingml/2006/main" xmlns:p="http://schemas.openxmlformats.org/presentationml/2006/main" xmlns:r="http://schemas.openxmlformats.org/officeDocument/2006/relationships">
-  <p:cSld>
-    <p:bg>
-      <p:bgPr>
-        <a:solidFill>
-          <a:srgbClr val="06142C"/>
-        </a:solidFill>
-        <a:effectLst/>
-      </p:bgPr>
-    </p:bg>
-    <p:spTree>
-      <p:nvGrpSpPr>
-        <p:cNvPr id="1" name=""/>
-        <p:cNvGrpSpPr/>
-        <p:nvPr/>
-      </p:nvGrpSpPr>
-      <p:grpSpPr/>
-      <p:sp>
-        <p:nvSpPr>
-          <p:cNvPr id="2" name="Rounded Rectangle 1"/>
-          <p:cNvSpPr/>
-          <p:nvPr/>
-        </p:nvSpPr>
-        <p:spPr>
-          <a:xfrm>
-            <a:off x="548640" y="411480"/>
-            <a:ext cx="1362456" cy="329184"/>
-          </a:xfrm>
-          <a:prstGeom prst="roundRect">
-            <a:avLst>
-              <a:gd name="adj" fmla="val 50000"/>
-            </a:avLst>
-          </a:prstGeom>
-          <a:solidFill>
-            <a:srgbClr val="0072BC"/>
-          </a:solidFill>
-          <a:ln>
-            <a:noFill/>
-          </a:ln>
-        </p:spPr>
-        <p:style>
-          <a:lnRef idx="1">
-            <a:schemeClr val="accent1"/>
-          </a:lnRef>
-          <a:fillRef idx="3">
-            <a:schemeClr val="accent1"/>
-          </a:fillRef>
-          <a:effectRef idx="2">
-            <a:schemeClr val="accent1"/>
-          </a:effectRef>
-          <a:fontRef idx="minor">
-            <a:schemeClr val="lt1"/>
-          </a:fontRef>
-        </p:style>
-        <p:txBody>
-          <a:bodyPr rtlCol="0" anchor="ctr" tIns="0" bIns="0" wrap="none"/>
-          <a:lstStyle/>
-          <a:p>
-            <a:pPr algn="ctr"/>
-            <a:r>
-              <a:rPr b="1" sz="1200">
-                <a:solidFill>
-                  <a:srgbClr val="FFFFFF"/>
-                </a:solidFill>
-                <a:latin typeface="Century Gothic"/>
-              </a:rPr>
-              <a:t>PRÁCTICA</a:t>
-            </a:r>
-          </a:p>
-        </p:txBody>
-      </p:sp>
-      <p:sp>
-        <p:nvSpPr>
-          <p:cNvPr id="3" name="TextBox 2"/>
-          <p:cNvSpPr txBox="1"/>
-          <p:nvPr/>
-        </p:nvSpPr>
-        <p:spPr>
-          <a:xfrm>
-            <a:off x="548640" y="868680"/>
-            <a:ext cx="11094415" cy="731520"/>
-          </a:xfrm>
-          <a:prstGeom prst="rect">
-            <a:avLst/>
-          </a:prstGeom>
-          <a:noFill/>
-        </p:spPr>
-        <p:txBody>
-          <a:bodyPr wrap="square" anchor="t" lIns="0" rIns="0">
-            <a:spAutoFit/>
-          </a:bodyPr>
-          <a:lstStyle/>
-          <a:p>
-            <a:pPr algn="l"/>
-            <a:r>
-              <a:rPr b="1" sz="2800">
-                <a:solidFill>
-                  <a:srgbClr val="FFFFFF"/>
-                </a:solidFill>
-                <a:latin typeface="Century Gothic"/>
-              </a:rPr>
-              <a:t>Cómo lo corres y cómo lees un error</a:t>
-            </a:r>
-          </a:p>
-        </p:txBody>
-      </p:sp>
-      <p:sp>
-        <p:nvSpPr>
-          <p:cNvPr id="4" name="Rounded Rectangle 3"/>
-          <p:cNvSpPr/>
-          <p:nvPr/>
-        </p:nvSpPr>
-        <p:spPr>
-          <a:xfrm>
-            <a:off x="548640" y="2057400"/>
-            <a:ext cx="2464993" cy="2651760"/>
-          </a:xfrm>
-          <a:prstGeom prst="roundRect">
-            <a:avLst>
-              <a:gd name="adj" fmla="val 6000"/>
-            </a:avLst>
-          </a:prstGeom>
-          <a:solidFill>
-            <a:srgbClr val="0B2C59"/>
-          </a:solidFill>
-          <a:ln w="15875">
-            <a:solidFill>
-              <a:srgbClr val="5EA7D8"/>
-            </a:solidFill>
-          </a:ln>
-        </p:spPr>
-        <p:style>
-          <a:lnRef idx="1">
-            <a:schemeClr val="accent1"/>
-          </a:lnRef>
-          <a:fillRef idx="3">
-            <a:schemeClr val="accent1"/>
-          </a:fillRef>
-          <a:effectRef idx="2">
-            <a:schemeClr val="accent1"/>
-          </a:effectRef>
-          <a:fontRef idx="minor">
-            <a:schemeClr val="lt1"/>
-          </a:fontRef>
-        </p:style>
-        <p:txBody>
-          <a:bodyPr rtlCol="0" anchor="ctr"/>
-          <a:lstStyle/>
-          <a:p/>
-        </p:txBody>
-      </p:sp>
-      <p:sp>
-        <p:nvSpPr>
-          <p:cNvPr id="5" name="TextBox 4"/>
-          <p:cNvSpPr txBox="1"/>
-          <p:nvPr/>
-        </p:nvSpPr>
-        <p:spPr>
-          <a:xfrm>
-            <a:off x="777240" y="2286000"/>
-            <a:ext cx="2007793" cy="548640"/>
-          </a:xfrm>
-          <a:prstGeom prst="rect">
-            <a:avLst/>
-          </a:prstGeom>
-          <a:noFill/>
-        </p:spPr>
-        <p:txBody>
-          <a:bodyPr wrap="square" anchor="t" lIns="0" rIns="0">
-            <a:spAutoFit/>
-          </a:bodyPr>
-          <a:lstStyle/>
-          <a:p>
-            <a:pPr algn="l"/>
-            <a:r>
-              <a:rPr b="1" sz="1800">
-                <a:solidFill>
-                  <a:srgbClr val="FFFFFF"/>
-                </a:solidFill>
-                <a:latin typeface="Century Gothic"/>
-              </a:rPr>
-              <a:t>1. PowerShell</a:t>
-            </a:r>
-          </a:p>
-        </p:txBody>
-      </p:sp>
-      <p:sp>
-        <p:nvSpPr>
-          <p:cNvPr id="6" name="TextBox 5"/>
-          <p:cNvSpPr txBox="1"/>
-          <p:nvPr/>
-        </p:nvSpPr>
-        <p:spPr>
-          <a:xfrm>
-            <a:off x="777240" y="2788920"/>
-            <a:ext cx="2007793" cy="1737360"/>
-          </a:xfrm>
-          <a:prstGeom prst="rect">
-            <a:avLst/>
-          </a:prstGeom>
-          <a:noFill/>
-        </p:spPr>
-        <p:txBody>
-          <a:bodyPr wrap="square" anchor="t" lIns="0" rIns="0">
-            <a:spAutoFit/>
-          </a:bodyPr>
-          <a:lstStyle/>
-          <a:p>
-            <a:pPr algn="l"/>
-            <a:r>
-              <a:rPr b="0" sz="1400">
-                <a:solidFill>
-                  <a:srgbClr val="36B5FF"/>
-                </a:solidFill>
                 <a:latin typeface="Consolas"/>
               </a:rPr>
               <a:t>cd</a:t>
             </a:r>
             <a:r>
-              <a:rPr b="0" sz="1400">
+              <a:rPr sz="1400" b="0">
                 <a:solidFill>
                   <a:srgbClr val="C9D6E3"/>
                 </a:solidFill>
@@ -8436,7 +9467,9 @@
         <p:txBody>
           <a:bodyPr rtlCol="0" anchor="ctr"/>
           <a:lstStyle/>
-          <a:p/>
+          <a:p>
+            <a:endParaRPr/>
+          </a:p>
         </p:txBody>
       </p:sp>
       <p:sp>
@@ -8456,14 +9489,14 @@
           <a:noFill/>
         </p:spPr>
         <p:txBody>
-          <a:bodyPr wrap="square" anchor="t" lIns="0" rIns="0">
+          <a:bodyPr wrap="square" lIns="0" rIns="0" anchor="t">
             <a:spAutoFit/>
           </a:bodyPr>
           <a:lstStyle/>
           <a:p>
             <a:pPr algn="l"/>
             <a:r>
-              <a:rPr b="1" sz="1800">
+              <a:rPr sz="1800" b="1">
                 <a:solidFill>
                   <a:srgbClr val="FFFFFF"/>
                 </a:solidFill>
@@ -8491,14 +9524,14 @@
           <a:noFill/>
         </p:spPr>
         <p:txBody>
-          <a:bodyPr wrap="square" anchor="t" lIns="0" rIns="0">
+          <a:bodyPr wrap="square" lIns="0" rIns="0" anchor="t">
             <a:spAutoFit/>
           </a:bodyPr>
           <a:lstStyle/>
           <a:p>
             <a:pPr algn="l"/>
             <a:r>
-              <a:rPr b="0" sz="1400">
+              <a:rPr sz="1400" b="0">
                 <a:solidFill>
                   <a:srgbClr val="C9D6E3"/>
                 </a:solidFill>
@@ -8587,7 +9620,9 @@
         <p:txBody>
           <a:bodyPr rtlCol="0" anchor="ctr"/>
           <a:lstStyle/>
-          <a:p/>
+          <a:p>
+            <a:endParaRPr/>
+          </a:p>
         </p:txBody>
       </p:sp>
       <p:sp>
@@ -8607,14 +9642,14 @@
           <a:noFill/>
         </p:spPr>
         <p:txBody>
-          <a:bodyPr wrap="square" anchor="t" lIns="0" rIns="0">
+          <a:bodyPr wrap="square" lIns="0" rIns="0" anchor="t">
             <a:spAutoFit/>
           </a:bodyPr>
           <a:lstStyle/>
           <a:p>
             <a:pPr algn="l"/>
             <a:r>
-              <a:rPr b="1" sz="1800">
+              <a:rPr sz="1800" b="1">
                 <a:solidFill>
                   <a:srgbClr val="FFFFFF"/>
                 </a:solidFill>
@@ -8642,14 +9677,14 @@
           <a:noFill/>
         </p:spPr>
         <p:txBody>
-          <a:bodyPr wrap="square" anchor="t" lIns="0" rIns="0">
+          <a:bodyPr wrap="square" lIns="0" rIns="0" anchor="t">
             <a:spAutoFit/>
           </a:bodyPr>
           <a:lstStyle/>
           <a:p>
             <a:pPr algn="l"/>
             <a:r>
-              <a:rPr b="0" sz="1400">
+              <a:rPr sz="1400" b="0">
                 <a:solidFill>
                   <a:srgbClr val="C9D6E3"/>
                 </a:solidFill>
@@ -8658,7 +9693,7 @@
               <a:t>Un título por tema y </a:t>
             </a:r>
             <a:r>
-              <a:rPr b="0" sz="1400">
+              <a:rPr sz="1400" b="0">
                 <a:solidFill>
                   <a:srgbClr val="36B5FF"/>
                 </a:solidFill>
@@ -8667,7 +9702,7 @@
               <a:t>BUILD SUCCESSFUL</a:t>
             </a:r>
             <a:r>
-              <a:rPr b="0" sz="1400">
+              <a:rPr sz="1400" b="0">
                 <a:solidFill>
                   <a:srgbClr val="C9D6E3"/>
                 </a:solidFill>
@@ -8756,7 +9791,9 @@
         <p:txBody>
           <a:bodyPr rtlCol="0" anchor="ctr"/>
           <a:lstStyle/>
-          <a:p/>
+          <a:p>
+            <a:endParaRPr/>
+          </a:p>
         </p:txBody>
       </p:sp>
       <p:sp>
@@ -8776,14 +9813,14 @@
           <a:noFill/>
         </p:spPr>
         <p:txBody>
-          <a:bodyPr wrap="square" anchor="t" lIns="0" rIns="0">
+          <a:bodyPr wrap="square" lIns="0" rIns="0" anchor="t">
             <a:spAutoFit/>
           </a:bodyPr>
           <a:lstStyle/>
           <a:p>
             <a:pPr algn="l"/>
             <a:r>
-              <a:rPr b="1" sz="1800">
+              <a:rPr sz="1800" b="1">
                 <a:solidFill>
                   <a:srgbClr val="FFFFFF"/>
                 </a:solidFill>
@@ -8811,14 +9848,14 @@
           <a:noFill/>
         </p:spPr>
         <p:txBody>
-          <a:bodyPr wrap="square" anchor="t" lIns="0" rIns="0">
+          <a:bodyPr wrap="square" lIns="0" rIns="0" anchor="t">
             <a:spAutoFit/>
           </a:bodyPr>
           <a:lstStyle/>
           <a:p>
             <a:pPr algn="l"/>
             <a:r>
-              <a:rPr b="0" sz="1400">
+              <a:rPr sz="1400" b="0">
                 <a:solidFill>
                   <a:srgbClr val="C9D6E3"/>
                 </a:solidFill>
@@ -8827,7 +9864,7 @@
               <a:t>Busca archivo, línea y mensaje: </a:t>
             </a:r>
             <a:r>
-              <a:rPr b="0" sz="1400">
+              <a:rPr sz="1400" b="0">
                 <a:solidFill>
                   <a:srgbClr val="36B5FF"/>
                 </a:solidFill>
@@ -8855,14 +9892,14 @@
           <a:noFill/>
         </p:spPr>
         <p:txBody>
-          <a:bodyPr wrap="square" anchor="t" lIns="0" rIns="0">
+          <a:bodyPr wrap="square" lIns="0" rIns="0" anchor="t">
             <a:spAutoFit/>
           </a:bodyPr>
           <a:lstStyle/>
           <a:p>
             <a:pPr algn="l"/>
             <a:r>
-              <a:rPr b="0" sz="1600">
+              <a:rPr sz="1600" b="0">
                 <a:solidFill>
                   <a:srgbClr val="C9D6E3"/>
                 </a:solidFill>
@@ -8871,7 +9908,7 @@
               <a:t>Otro error que vas a ver: </a:t>
             </a:r>
             <a:r>
-              <a:rPr b="0" sz="1600">
+              <a:rPr sz="1600" b="0">
                 <a:solidFill>
                   <a:srgbClr val="36B5FF"/>
                 </a:solidFill>
@@ -8880,7 +9917,7 @@
               <a:t>saldo has private access in CuentaBancaria</a:t>
             </a:r>
             <a:r>
-              <a:rPr b="0" sz="1600">
+              <a:rPr sz="1600" b="0">
                 <a:solidFill>
                   <a:srgbClr val="C9D6E3"/>
                 </a:solidFill>
@@ -8908,14 +9945,14 @@
           <a:noFill/>
         </p:spPr>
         <p:txBody>
-          <a:bodyPr wrap="square" anchor="t" lIns="0" rIns="0">
+          <a:bodyPr wrap="square" lIns="0" rIns="0" anchor="t">
             <a:spAutoFit/>
           </a:bodyPr>
           <a:lstStyle/>
           <a:p>
             <a:pPr algn="l"/>
             <a:r>
-              <a:rPr b="0" sz="1200">
+              <a:rPr sz="1200" b="0">
                 <a:solidFill>
                   <a:srgbClr val="C9D6E3"/>
                 </a:solidFill>
@@ -8943,20 +9980,20 @@
           <a:noFill/>
         </p:spPr>
         <p:txBody>
-          <a:bodyPr wrap="square" anchor="t" lIns="0" rIns="0">
+          <a:bodyPr wrap="square" lIns="0" rIns="0" anchor="t">
             <a:spAutoFit/>
           </a:bodyPr>
           <a:lstStyle/>
           <a:p>
             <a:pPr algn="r"/>
             <a:r>
-              <a:rPr b="0" sz="1200">
+              <a:rPr sz="1200" b="0">
                 <a:solidFill>
                   <a:srgbClr val="C9D6E3"/>
                 </a:solidFill>
                 <a:latin typeface="Century Gothic"/>
               </a:rPr>
-              <a:t>9</a:t>
+              <a:t>10</a:t>
             </a:r>
           </a:p>
         </p:txBody>

--- a/material-de-apoyo/Clase1_Presentacion_Java_POO.pptx
+++ b/material-de-apoyo/Clase1_Presentacion_Java_POO.pptx
@@ -13,6 +13,7 @@
     <p:sldId id="261" r:id="rId7"/>
     <p:sldId id="262" r:id="rId8"/>
     <p:sldId id="263" r:id="rId9"/>
+    <p:sldId id="267" r:id="rId17"/>
     <p:sldId id="266" r:id="rId16"/>
     <p:sldId id="264" r:id="rId10"/>
     <p:sldId id="265" r:id="rId11"/>
@@ -3365,7 +3366,7 @@
         <p:spPr>
           <a:xfrm>
             <a:off x="548640" y="411480"/>
-            <a:ext cx="1124712" cy="329184"/>
+            <a:ext cx="1362456" cy="329184"/>
           </a:xfrm>
           <a:prstGeom prst="roundRect">
             <a:avLst>
@@ -3405,7 +3406,7 @@
                 </a:solidFill>
                 <a:latin typeface="Century Gothic"/>
               </a:rPr>
-              <a:t>CIERRE</a:t>
+              <a:t>PRÁCTICA</a:t>
             </a:r>
           </a:p>
         </p:txBody>
@@ -3440,225 +3441,21 @@
                 </a:solidFill>
                 <a:latin typeface="Century Gothic"/>
               </a:rPr>
-              <a:t>Tu actividad</a:t>
-            </a:r>
-          </a:p>
-        </p:txBody>
-      </p:sp>
-      <p:sp>
-        <p:nvSpPr>
-          <p:cNvPr id="4" name="TextBox 3"/>
-          <p:cNvSpPr txBox="1"/>
-          <p:nvPr/>
-        </p:nvSpPr>
-        <p:spPr>
-          <a:xfrm>
-            <a:off x="548640" y="1737360"/>
-            <a:ext cx="6766560" cy="4114800"/>
-          </a:xfrm>
-          <a:prstGeom prst="rect">
-            <a:avLst/>
-          </a:prstGeom>
-          <a:noFill/>
-        </p:spPr>
-        <p:txBody>
-          <a:bodyPr wrap="square">
-            <a:spAutoFit/>
-          </a:bodyPr>
-          <a:lstStyle/>
-          <a:p>
-            <a:pPr>
-              <a:spcAft>
-                <a:spcPts val="1200"/>
-              </a:spcAft>
-            </a:pPr>
-            <a:r>
-              <a:rPr sz="1800" b="1">
-                <a:solidFill>
-                  <a:srgbClr val="36B5FF"/>
-                </a:solidFill>
-                <a:latin typeface="Century Gothic"/>
-              </a:rPr>
-              <a:t>✓  </a:t>
-            </a:r>
-            <a:r>
-              <a:rPr sz="1800" b="0">
-                <a:solidFill>
-                  <a:srgbClr val="FFFFFF"/>
-                </a:solidFill>
-                <a:latin typeface="Century Gothic"/>
-              </a:rPr>
-              <a:t>Clase </a:t>
-            </a:r>
-            <a:r>
-              <a:rPr sz="1800" b="0">
-                <a:solidFill>
-                  <a:srgbClr val="36B5FF"/>
-                </a:solidFill>
-                <a:latin typeface="Consolas"/>
-              </a:rPr>
-              <a:t>Producto</a:t>
-            </a:r>
-            <a:r>
-              <a:rPr sz="1800" b="0">
-                <a:solidFill>
-                  <a:srgbClr val="FFFFFF"/>
-                </a:solidFill>
-                <a:latin typeface="Century Gothic"/>
-              </a:rPr>
-              <a:t> con precio privado que no acepta negativos.</a:t>
-            </a:r>
-          </a:p>
-          <a:p>
-            <a:pPr>
-              <a:spcAft>
-                <a:spcPts val="1200"/>
-              </a:spcAft>
-            </a:pPr>
-            <a:r>
-              <a:rPr sz="1800" b="1">
-                <a:solidFill>
-                  <a:srgbClr val="36B5FF"/>
-                </a:solidFill>
-                <a:latin typeface="Century Gothic"/>
-              </a:rPr>
-              <a:t>✓  </a:t>
-            </a:r>
-            <a:r>
-              <a:rPr sz="1800" b="0">
-                <a:solidFill>
-                  <a:srgbClr val="FFFFFF"/>
-                </a:solidFill>
-                <a:latin typeface="Century Gothic"/>
-              </a:rPr>
-              <a:t>Descuento con </a:t>
-            </a:r>
-            <a:r>
-              <a:rPr sz="1800" b="0">
-                <a:solidFill>
-                  <a:srgbClr val="36B5FF"/>
-                </a:solidFill>
-                <a:latin typeface="Consolas"/>
-              </a:rPr>
-              <a:t>if</a:t>
-            </a:r>
-            <a:r>
-              <a:rPr sz="1800" b="0">
-                <a:solidFill>
-                  <a:srgbClr val="FFFFFF"/>
-                </a:solidFill>
-                <a:latin typeface="Century Gothic"/>
-              </a:rPr>
-              <a:t>.</a:t>
-            </a:r>
-          </a:p>
-          <a:p>
-            <a:pPr>
-              <a:spcAft>
-                <a:spcPts val="1200"/>
-              </a:spcAft>
-            </a:pPr>
-            <a:r>
-              <a:rPr sz="1800" b="1">
-                <a:solidFill>
-                  <a:srgbClr val="36B5FF"/>
-                </a:solidFill>
-                <a:latin typeface="Century Gothic"/>
-              </a:rPr>
-              <a:t>✓  </a:t>
-            </a:r>
-            <a:r>
-              <a:rPr sz="1800" b="0">
-                <a:solidFill>
-                  <a:srgbClr val="36B5FF"/>
-                </a:solidFill>
-                <a:latin typeface="Consolas"/>
-              </a:rPr>
-              <a:t>ProductoEnOferta</a:t>
-            </a:r>
-            <a:r>
-              <a:rPr sz="1800" b="0">
-                <a:solidFill>
-                  <a:srgbClr val="FFFFFF"/>
-                </a:solidFill>
-                <a:latin typeface="Century Gothic"/>
-              </a:rPr>
-              <a:t> que hereda y sobrescribe.</a:t>
-            </a:r>
-          </a:p>
-          <a:p>
-            <a:pPr>
-              <a:spcAft>
-                <a:spcPts val="1200"/>
-              </a:spcAft>
-            </a:pPr>
-            <a:r>
-              <a:rPr sz="1800" b="1">
-                <a:solidFill>
-                  <a:srgbClr val="36B5FF"/>
-                </a:solidFill>
-                <a:latin typeface="Century Gothic"/>
-              </a:rPr>
-              <a:t>✓  </a:t>
-            </a:r>
-            <a:r>
-              <a:rPr sz="1800" b="0">
-                <a:solidFill>
-                  <a:srgbClr val="FFFFFF"/>
-                </a:solidFill>
-                <a:latin typeface="Century Gothic"/>
-              </a:rPr>
-              <a:t>Clase </a:t>
-            </a:r>
-            <a:r>
-              <a:rPr sz="1800" b="0">
-                <a:solidFill>
-                  <a:srgbClr val="36B5FF"/>
-                </a:solidFill>
-                <a:latin typeface="Consolas"/>
-              </a:rPr>
-              <a:t>Tienda</a:t>
-            </a:r>
-            <a:r>
-              <a:rPr sz="1800" b="0">
-                <a:solidFill>
-                  <a:srgbClr val="FFFFFF"/>
-                </a:solidFill>
-                <a:latin typeface="Century Gothic"/>
-              </a:rPr>
-              <a:t> que imprime 4 casos con </a:t>
-            </a:r>
-            <a:r>
-              <a:rPr sz="1800" b="0">
-                <a:solidFill>
-                  <a:srgbClr val="36B5FF"/>
-                </a:solidFill>
-                <a:latin typeface="Consolas"/>
-              </a:rPr>
-              <a:t>gradle run</a:t>
-            </a:r>
-            <a:r>
-              <a:rPr sz="1800" b="0">
-                <a:solidFill>
-                  <a:srgbClr val="FFFFFF"/>
-                </a:solidFill>
-                <a:latin typeface="Century Gothic"/>
-              </a:rPr>
-              <a:t>.</a:t>
-            </a:r>
-          </a:p>
-        </p:txBody>
-      </p:sp>
-      <p:sp>
-        <p:nvSpPr>
-          <p:cNvPr id="5" name="Rounded Rectangle 4"/>
+              <a:t>Cómo lo corres y cómo lees un error</a:t>
+            </a:r>
+          </a:p>
+        </p:txBody>
+      </p:sp>
+      <p:sp>
+        <p:nvSpPr>
+          <p:cNvPr id="4" name="Rounded Rectangle 3"/>
           <p:cNvSpPr/>
           <p:nvPr/>
         </p:nvSpPr>
         <p:spPr>
           <a:xfrm>
-            <a:off x="7680960" y="1737360"/>
-            <a:ext cx="3962095" cy="3931920"/>
+            <a:off x="548640" y="2057400"/>
+            <a:ext cx="2464993" cy="2651760"/>
           </a:xfrm>
           <a:prstGeom prst="roundRect">
             <a:avLst>
@@ -3698,14 +3495,14 @@
       </p:sp>
       <p:sp>
         <p:nvSpPr>
-          <p:cNvPr id="6" name="TextBox 5"/>
+          <p:cNvPr id="5" name="TextBox 4"/>
           <p:cNvSpPr txBox="1"/>
           <p:nvPr/>
         </p:nvSpPr>
         <p:spPr>
           <a:xfrm>
-            <a:off x="7909560" y="1965960"/>
-            <a:ext cx="3504895" cy="548640"/>
+            <a:off x="777240" y="2286000"/>
+            <a:ext cx="2007793" cy="548640"/>
           </a:xfrm>
           <a:prstGeom prst="rect">
             <a:avLst/>
@@ -3726,21 +3523,21 @@
                 </a:solidFill>
                 <a:latin typeface="Century Gothic"/>
               </a:rPr>
-              <a:t>Entrega</a:t>
-            </a:r>
-          </a:p>
-        </p:txBody>
-      </p:sp>
-      <p:sp>
-        <p:nvSpPr>
-          <p:cNvPr id="7" name="TextBox 6"/>
+              <a:t>1. PowerShell</a:t>
+            </a:r>
+          </a:p>
+        </p:txBody>
+      </p:sp>
+      <p:sp>
+        <p:nvSpPr>
+          <p:cNvPr id="6" name="TextBox 5"/>
           <p:cNvSpPr txBox="1"/>
           <p:nvPr/>
         </p:nvSpPr>
         <p:spPr>
           <a:xfrm>
-            <a:off x="7909560" y="2468880"/>
-            <a:ext cx="3504895" cy="3017520"/>
+            <a:off x="777240" y="2788920"/>
+            <a:ext cx="2007793" cy="1737360"/>
           </a:xfrm>
           <a:prstGeom prst="rect">
             <a:avLst/>
@@ -3757,67 +3554,117 @@
             <a:r>
               <a:rPr sz="1400" b="0">
                 <a:solidFill>
+                  <a:srgbClr val="36B5FF"/>
+                </a:solidFill>
+                <a:latin typeface="Consolas"/>
+              </a:rPr>
+              <a:t>cd</a:t>
+            </a:r>
+            <a:r>
+              <a:rPr sz="1400" b="0">
+                <a:solidFill>
                   <a:srgbClr val="C9D6E3"/>
                 </a:solidFill>
                 <a:latin typeface="Century Gothic"/>
               </a:rPr>
-              <a:t>Miércoles 23 de septiembre de 2026, 8:00 a.m.</a:t>
-            </a:r>
-          </a:p>
-          <a:p>
-            <a:pPr algn="l"/>
-            <a:r>
-              <a:rPr sz="1400" b="0">
-                <a:solidFill>
-                  <a:srgbClr val="C9D6E3"/>
-                </a:solidFill>
-                <a:latin typeface="Century Gothic"/>
-              </a:rPr>
-              <a:t>Repositorio en GitHub o .zip sin la carpeta build</a:t>
-            </a:r>
-          </a:p>
-          <a:p>
-            <a:pPr algn="l"/>
-            <a:r>
-              <a:rPr sz="1400" b="0">
-                <a:solidFill>
-                  <a:srgbClr val="C9D6E3"/>
-                </a:solidFill>
-                <a:latin typeface="Century Gothic"/>
-              </a:rPr>
-              <a:t>Captura de </a:t>
-            </a:r>
-            <a:r>
-              <a:rPr sz="1400" b="0">
-                <a:solidFill>
-                  <a:srgbClr val="36B5FF"/>
-                </a:solidFill>
-                <a:latin typeface="Consolas"/>
-              </a:rPr>
-              <a:t>gradle run</a:t>
-            </a:r>
-            <a:r>
-              <a:rPr sz="1400" b="0">
-                <a:solidFill>
-                  <a:srgbClr val="C9D6E3"/>
-                </a:solidFill>
-                <a:latin typeface="Century Gothic"/>
-              </a:rPr>
-              <a:t> con la salida</a:t>
-            </a:r>
-          </a:p>
-        </p:txBody>
-      </p:sp>
-      <p:sp>
-        <p:nvSpPr>
-          <p:cNvPr id="8" name="TextBox 7"/>
+              <a:t> a la carpeta del proyecto</a:t>
+            </a:r>
+          </a:p>
+        </p:txBody>
+      </p:sp>
+      <p:cxnSp>
+        <p:nvCxnSpPr>
+          <p:cNvPr id="7" name="Connector 6"/>
+          <p:cNvCxnSpPr/>
+          <p:nvPr/>
+        </p:nvCxnSpPr>
+        <p:spPr>
+          <a:xfrm>
+            <a:off x="3059353" y="3383280"/>
+            <a:ext cx="320040" cy="0"/>
+          </a:xfrm>
+          <a:prstGeom prst="line">
+            <a:avLst/>
+          </a:prstGeom>
+          <a:ln w="31750">
+            <a:solidFill>
+              <a:srgbClr val="36B5FF"/>
+            </a:solidFill>
+            <a:tailEnd type="triangle"/>
+          </a:ln>
+        </p:spPr>
+        <p:style>
+          <a:lnRef idx="2">
+            <a:schemeClr val="accent1"/>
+          </a:lnRef>
+          <a:fillRef idx="0">
+            <a:schemeClr val="accent1"/>
+          </a:fillRef>
+          <a:effectRef idx="1">
+            <a:schemeClr val="accent1"/>
+          </a:effectRef>
+          <a:fontRef idx="minor">
+            <a:schemeClr val="tx1"/>
+          </a:fontRef>
+        </p:style>
+      </p:cxnSp>
+      <p:sp>
+        <p:nvSpPr>
+          <p:cNvPr id="8" name="Rounded Rectangle 7"/>
+          <p:cNvSpPr/>
+          <p:nvPr/>
+        </p:nvSpPr>
+        <p:spPr>
+          <a:xfrm>
+            <a:off x="3425113" y="2057400"/>
+            <a:ext cx="2464993" cy="2651760"/>
+          </a:xfrm>
+          <a:prstGeom prst="roundRect">
+            <a:avLst>
+              <a:gd name="adj" fmla="val 6000"/>
+            </a:avLst>
+          </a:prstGeom>
+          <a:solidFill>
+            <a:srgbClr val="08264F"/>
+          </a:solidFill>
+          <a:ln w="15875">
+            <a:solidFill>
+              <a:srgbClr val="5EA7D8"/>
+            </a:solidFill>
+          </a:ln>
+        </p:spPr>
+        <p:style>
+          <a:lnRef idx="1">
+            <a:schemeClr val="accent1"/>
+          </a:lnRef>
+          <a:fillRef idx="3">
+            <a:schemeClr val="accent1"/>
+          </a:fillRef>
+          <a:effectRef idx="2">
+            <a:schemeClr val="accent1"/>
+          </a:effectRef>
+          <a:fontRef idx="minor">
+            <a:schemeClr val="lt1"/>
+          </a:fontRef>
+        </p:style>
+        <p:txBody>
+          <a:bodyPr rtlCol="0" anchor="ctr"/>
+          <a:lstStyle/>
+          <a:p>
+            <a:endParaRPr/>
+          </a:p>
+        </p:txBody>
+      </p:sp>
+      <p:sp>
+        <p:nvSpPr>
+          <p:cNvPr id="9" name="TextBox 8"/>
           <p:cNvSpPr txBox="1"/>
           <p:nvPr/>
         </p:nvSpPr>
         <p:spPr>
           <a:xfrm>
-            <a:off x="548640" y="6400800"/>
-            <a:ext cx="8229600" cy="274320"/>
+            <a:off x="3653713" y="2286000"/>
+            <a:ext cx="2007793" cy="548640"/>
           </a:xfrm>
           <a:prstGeom prst="rect">
             <a:avLst/>
@@ -3832,6 +3679,462 @@
           <a:p>
             <a:pPr algn="l"/>
             <a:r>
+              <a:rPr sz="1800" b="1">
+                <a:solidFill>
+                  <a:srgbClr val="FFFFFF"/>
+                </a:solidFill>
+                <a:latin typeface="Century Gothic"/>
+              </a:rPr>
+              <a:t>2. gradle run</a:t>
+            </a:r>
+          </a:p>
+        </p:txBody>
+      </p:sp>
+      <p:sp>
+        <p:nvSpPr>
+          <p:cNvPr id="10" name="TextBox 9"/>
+          <p:cNvSpPr txBox="1"/>
+          <p:nvPr/>
+        </p:nvSpPr>
+        <p:spPr>
+          <a:xfrm>
+            <a:off x="3653713" y="2788920"/>
+            <a:ext cx="2007793" cy="1737360"/>
+          </a:xfrm>
+          <a:prstGeom prst="rect">
+            <a:avLst/>
+          </a:prstGeom>
+          <a:noFill/>
+        </p:spPr>
+        <p:txBody>
+          <a:bodyPr wrap="square" lIns="0" rIns="0" anchor="t">
+            <a:spAutoFit/>
+          </a:bodyPr>
+          <a:lstStyle/>
+          <a:p>
+            <a:pPr algn="l"/>
+            <a:r>
+              <a:rPr sz="1400" b="0">
+                <a:solidFill>
+                  <a:srgbClr val="C9D6E3"/>
+                </a:solidFill>
+                <a:latin typeface="Century Gothic"/>
+              </a:rPr>
+              <a:t>Compila y ejecuta los ejemplos</a:t>
+            </a:r>
+          </a:p>
+        </p:txBody>
+      </p:sp>
+      <p:cxnSp>
+        <p:nvCxnSpPr>
+          <p:cNvPr id="11" name="Connector 10"/>
+          <p:cNvCxnSpPr/>
+          <p:nvPr/>
+        </p:nvCxnSpPr>
+        <p:spPr>
+          <a:xfrm>
+            <a:off x="5935826" y="3383280"/>
+            <a:ext cx="320040" cy="0"/>
+          </a:xfrm>
+          <a:prstGeom prst="line">
+            <a:avLst/>
+          </a:prstGeom>
+          <a:ln w="31750">
+            <a:solidFill>
+              <a:srgbClr val="36B5FF"/>
+            </a:solidFill>
+            <a:tailEnd type="triangle"/>
+          </a:ln>
+        </p:spPr>
+        <p:style>
+          <a:lnRef idx="2">
+            <a:schemeClr val="accent1"/>
+          </a:lnRef>
+          <a:fillRef idx="0">
+            <a:schemeClr val="accent1"/>
+          </a:fillRef>
+          <a:effectRef idx="1">
+            <a:schemeClr val="accent1"/>
+          </a:effectRef>
+          <a:fontRef idx="minor">
+            <a:schemeClr val="tx1"/>
+          </a:fontRef>
+        </p:style>
+      </p:cxnSp>
+      <p:sp>
+        <p:nvSpPr>
+          <p:cNvPr id="12" name="Rounded Rectangle 11"/>
+          <p:cNvSpPr/>
+          <p:nvPr/>
+        </p:nvSpPr>
+        <p:spPr>
+          <a:xfrm>
+            <a:off x="6301586" y="2057400"/>
+            <a:ext cx="2464993" cy="2651760"/>
+          </a:xfrm>
+          <a:prstGeom prst="roundRect">
+            <a:avLst>
+              <a:gd name="adj" fmla="val 6000"/>
+            </a:avLst>
+          </a:prstGeom>
+          <a:solidFill>
+            <a:srgbClr val="0B2C59"/>
+          </a:solidFill>
+          <a:ln w="15875">
+            <a:solidFill>
+              <a:srgbClr val="5EA7D8"/>
+            </a:solidFill>
+          </a:ln>
+        </p:spPr>
+        <p:style>
+          <a:lnRef idx="1">
+            <a:schemeClr val="accent1"/>
+          </a:lnRef>
+          <a:fillRef idx="3">
+            <a:schemeClr val="accent1"/>
+          </a:fillRef>
+          <a:effectRef idx="2">
+            <a:schemeClr val="accent1"/>
+          </a:effectRef>
+          <a:fontRef idx="minor">
+            <a:schemeClr val="lt1"/>
+          </a:fontRef>
+        </p:style>
+        <p:txBody>
+          <a:bodyPr rtlCol="0" anchor="ctr"/>
+          <a:lstStyle/>
+          <a:p>
+            <a:endParaRPr/>
+          </a:p>
+        </p:txBody>
+      </p:sp>
+      <p:sp>
+        <p:nvSpPr>
+          <p:cNvPr id="13" name="TextBox 12"/>
+          <p:cNvSpPr txBox="1"/>
+          <p:nvPr/>
+        </p:nvSpPr>
+        <p:spPr>
+          <a:xfrm>
+            <a:off x="6530186" y="2286000"/>
+            <a:ext cx="2007793" cy="548640"/>
+          </a:xfrm>
+          <a:prstGeom prst="rect">
+            <a:avLst/>
+          </a:prstGeom>
+          <a:noFill/>
+        </p:spPr>
+        <p:txBody>
+          <a:bodyPr wrap="square" lIns="0" rIns="0" anchor="t">
+            <a:spAutoFit/>
+          </a:bodyPr>
+          <a:lstStyle/>
+          <a:p>
+            <a:pPr algn="l"/>
+            <a:r>
+              <a:rPr sz="1800" b="1">
+                <a:solidFill>
+                  <a:srgbClr val="FFFFFF"/>
+                </a:solidFill>
+                <a:latin typeface="Century Gothic"/>
+              </a:rPr>
+              <a:t>3. Lee la consola</a:t>
+            </a:r>
+          </a:p>
+        </p:txBody>
+      </p:sp>
+      <p:sp>
+        <p:nvSpPr>
+          <p:cNvPr id="14" name="TextBox 13"/>
+          <p:cNvSpPr txBox="1"/>
+          <p:nvPr/>
+        </p:nvSpPr>
+        <p:spPr>
+          <a:xfrm>
+            <a:off x="6530186" y="2788920"/>
+            <a:ext cx="2007793" cy="1737360"/>
+          </a:xfrm>
+          <a:prstGeom prst="rect">
+            <a:avLst/>
+          </a:prstGeom>
+          <a:noFill/>
+        </p:spPr>
+        <p:txBody>
+          <a:bodyPr wrap="square" lIns="0" rIns="0" anchor="t">
+            <a:spAutoFit/>
+          </a:bodyPr>
+          <a:lstStyle/>
+          <a:p>
+            <a:pPr algn="l"/>
+            <a:r>
+              <a:rPr sz="1400" b="0">
+                <a:solidFill>
+                  <a:srgbClr val="C9D6E3"/>
+                </a:solidFill>
+                <a:latin typeface="Century Gothic"/>
+              </a:rPr>
+              <a:t>Un título por tema y </a:t>
+            </a:r>
+            <a:r>
+              <a:rPr sz="1400" b="0">
+                <a:solidFill>
+                  <a:srgbClr val="36B5FF"/>
+                </a:solidFill>
+                <a:latin typeface="Consolas"/>
+              </a:rPr>
+              <a:t>BUILD SUCCESSFUL</a:t>
+            </a:r>
+            <a:r>
+              <a:rPr sz="1400" b="0">
+                <a:solidFill>
+                  <a:srgbClr val="C9D6E3"/>
+                </a:solidFill>
+                <a:latin typeface="Century Gothic"/>
+              </a:rPr>
+              <a:t> al final</a:t>
+            </a:r>
+          </a:p>
+        </p:txBody>
+      </p:sp>
+      <p:cxnSp>
+        <p:nvCxnSpPr>
+          <p:cNvPr id="15" name="Connector 14"/>
+          <p:cNvCxnSpPr/>
+          <p:nvPr/>
+        </p:nvCxnSpPr>
+        <p:spPr>
+          <a:xfrm>
+            <a:off x="8812299" y="3383280"/>
+            <a:ext cx="320040" cy="0"/>
+          </a:xfrm>
+          <a:prstGeom prst="line">
+            <a:avLst/>
+          </a:prstGeom>
+          <a:ln w="31750">
+            <a:solidFill>
+              <a:srgbClr val="36B5FF"/>
+            </a:solidFill>
+            <a:tailEnd type="triangle"/>
+          </a:ln>
+        </p:spPr>
+        <p:style>
+          <a:lnRef idx="2">
+            <a:schemeClr val="accent1"/>
+          </a:lnRef>
+          <a:fillRef idx="0">
+            <a:schemeClr val="accent1"/>
+          </a:fillRef>
+          <a:effectRef idx="1">
+            <a:schemeClr val="accent1"/>
+          </a:effectRef>
+          <a:fontRef idx="minor">
+            <a:schemeClr val="tx1"/>
+          </a:fontRef>
+        </p:style>
+      </p:cxnSp>
+      <p:sp>
+        <p:nvSpPr>
+          <p:cNvPr id="16" name="Rounded Rectangle 15"/>
+          <p:cNvSpPr/>
+          <p:nvPr/>
+        </p:nvSpPr>
+        <p:spPr>
+          <a:xfrm>
+            <a:off x="9178059" y="2057400"/>
+            <a:ext cx="2464993" cy="2651760"/>
+          </a:xfrm>
+          <a:prstGeom prst="roundRect">
+            <a:avLst>
+              <a:gd name="adj" fmla="val 6000"/>
+            </a:avLst>
+          </a:prstGeom>
+          <a:solidFill>
+            <a:srgbClr val="08264F"/>
+          </a:solidFill>
+          <a:ln w="15875">
+            <a:solidFill>
+              <a:srgbClr val="5EA7D8"/>
+            </a:solidFill>
+          </a:ln>
+        </p:spPr>
+        <p:style>
+          <a:lnRef idx="1">
+            <a:schemeClr val="accent1"/>
+          </a:lnRef>
+          <a:fillRef idx="3">
+            <a:schemeClr val="accent1"/>
+          </a:fillRef>
+          <a:effectRef idx="2">
+            <a:schemeClr val="accent1"/>
+          </a:effectRef>
+          <a:fontRef idx="minor">
+            <a:schemeClr val="lt1"/>
+          </a:fontRef>
+        </p:style>
+        <p:txBody>
+          <a:bodyPr rtlCol="0" anchor="ctr"/>
+          <a:lstStyle/>
+          <a:p>
+            <a:endParaRPr/>
+          </a:p>
+        </p:txBody>
+      </p:sp>
+      <p:sp>
+        <p:nvSpPr>
+          <p:cNvPr id="17" name="TextBox 16"/>
+          <p:cNvSpPr txBox="1"/>
+          <p:nvPr/>
+        </p:nvSpPr>
+        <p:spPr>
+          <a:xfrm>
+            <a:off x="9406659" y="2286000"/>
+            <a:ext cx="2007793" cy="548640"/>
+          </a:xfrm>
+          <a:prstGeom prst="rect">
+            <a:avLst/>
+          </a:prstGeom>
+          <a:noFill/>
+        </p:spPr>
+        <p:txBody>
+          <a:bodyPr wrap="square" lIns="0" rIns="0" anchor="t">
+            <a:spAutoFit/>
+          </a:bodyPr>
+          <a:lstStyle/>
+          <a:p>
+            <a:pPr algn="l"/>
+            <a:r>
+              <a:rPr sz="1800" b="1">
+                <a:solidFill>
+                  <a:srgbClr val="FFFFFF"/>
+                </a:solidFill>
+                <a:latin typeface="Century Gothic"/>
+              </a:rPr>
+              <a:t>4. Si falla</a:t>
+            </a:r>
+          </a:p>
+        </p:txBody>
+      </p:sp>
+      <p:sp>
+        <p:nvSpPr>
+          <p:cNvPr id="18" name="TextBox 17"/>
+          <p:cNvSpPr txBox="1"/>
+          <p:nvPr/>
+        </p:nvSpPr>
+        <p:spPr>
+          <a:xfrm>
+            <a:off x="9406659" y="2788920"/>
+            <a:ext cx="2007793" cy="1737360"/>
+          </a:xfrm>
+          <a:prstGeom prst="rect">
+            <a:avLst/>
+          </a:prstGeom>
+          <a:noFill/>
+        </p:spPr>
+        <p:txBody>
+          <a:bodyPr wrap="square" lIns="0" rIns="0" anchor="t">
+            <a:spAutoFit/>
+          </a:bodyPr>
+          <a:lstStyle/>
+          <a:p>
+            <a:pPr algn="l"/>
+            <a:r>
+              <a:rPr sz="1400" b="0">
+                <a:solidFill>
+                  <a:srgbClr val="C9D6E3"/>
+                </a:solidFill>
+                <a:latin typeface="Century Gothic"/>
+              </a:rPr>
+              <a:t>Busca archivo, línea y mensaje: </a:t>
+            </a:r>
+            <a:r>
+              <a:rPr sz="1400" b="0">
+                <a:solidFill>
+                  <a:srgbClr val="36B5FF"/>
+                </a:solidFill>
+                <a:latin typeface="Consolas"/>
+              </a:rPr>
+              <a:t>Variables.java:9: error: ';' expected</a:t>
+            </a:r>
+          </a:p>
+        </p:txBody>
+      </p:sp>
+      <p:sp>
+        <p:nvSpPr>
+          <p:cNvPr id="19" name="TextBox 18"/>
+          <p:cNvSpPr txBox="1"/>
+          <p:nvPr/>
+        </p:nvSpPr>
+        <p:spPr>
+          <a:xfrm>
+            <a:off x="548640" y="5029200"/>
+            <a:ext cx="11094415" cy="1097280"/>
+          </a:xfrm>
+          <a:prstGeom prst="rect">
+            <a:avLst/>
+          </a:prstGeom>
+          <a:noFill/>
+        </p:spPr>
+        <p:txBody>
+          <a:bodyPr wrap="square" lIns="0" rIns="0" anchor="t">
+            <a:spAutoFit/>
+          </a:bodyPr>
+          <a:lstStyle/>
+          <a:p>
+            <a:pPr algn="l"/>
+            <a:r>
+              <a:rPr sz="1600" b="0">
+                <a:solidFill>
+                  <a:srgbClr val="C9D6E3"/>
+                </a:solidFill>
+                <a:latin typeface="Century Gothic"/>
+              </a:rPr>
+              <a:t>Otro error que vas a ver: </a:t>
+            </a:r>
+            <a:r>
+              <a:rPr sz="1600" b="0">
+                <a:solidFill>
+                  <a:srgbClr val="36B5FF"/>
+                </a:solidFill>
+                <a:latin typeface="Consolas"/>
+              </a:rPr>
+              <a:t>saldo has private access in CuentaBancaria</a:t>
+            </a:r>
+            <a:r>
+              <a:rPr sz="1600" b="0">
+                <a:solidFill>
+                  <a:srgbClr val="C9D6E3"/>
+                </a:solidFill>
+                <a:latin typeface="Century Gothic"/>
+              </a:rPr>
+              <a:t>. Es el encapsulamiento protegiendo el dato.</a:t>
+            </a:r>
+          </a:p>
+        </p:txBody>
+      </p:sp>
+      <p:sp>
+        <p:nvSpPr>
+          <p:cNvPr id="20" name="TextBox 19"/>
+          <p:cNvSpPr txBox="1"/>
+          <p:nvPr/>
+        </p:nvSpPr>
+        <p:spPr>
+          <a:xfrm>
+            <a:off x="548640" y="6400800"/>
+            <a:ext cx="8229600" cy="274320"/>
+          </a:xfrm>
+          <a:prstGeom prst="rect">
+            <a:avLst/>
+          </a:prstGeom>
+          <a:noFill/>
+        </p:spPr>
+        <p:txBody>
+          <a:bodyPr wrap="square" lIns="0" rIns="0" anchor="t">
+            <a:spAutoFit/>
+          </a:bodyPr>
+          <a:lstStyle/>
+          <a:p>
+            <a:pPr algn="l"/>
+            <a:r>
               <a:rPr sz="1200" b="0">
                 <a:solidFill>
                   <a:srgbClr val="C9D6E3"/>
@@ -3845,7 +4148,7 @@
       </p:sp>
       <p:sp>
         <p:nvSpPr>
-          <p:cNvPr id="9" name="TextBox 8"/>
+          <p:cNvPr id="21" name="TextBox 20"/>
           <p:cNvSpPr txBox="1"/>
           <p:nvPr/>
         </p:nvSpPr>
@@ -3887,6 +4190,561 @@
 </file>
 
 <file path=ppt/slides/slide11.xml><?xml version="1.0" encoding="utf-8"?>
+<p:sld xmlns:a="http://schemas.openxmlformats.org/drawingml/2006/main" xmlns:r="http://schemas.openxmlformats.org/officeDocument/2006/relationships" xmlns:p="http://schemas.openxmlformats.org/presentationml/2006/main">
+  <p:cSld>
+    <p:bg>
+      <p:bgPr>
+        <a:solidFill>
+          <a:srgbClr val="06142C"/>
+        </a:solidFill>
+        <a:effectLst/>
+      </p:bgPr>
+    </p:bg>
+    <p:spTree>
+      <p:nvGrpSpPr>
+        <p:cNvPr id="1" name=""/>
+        <p:cNvGrpSpPr/>
+        <p:nvPr/>
+      </p:nvGrpSpPr>
+      <p:grpSpPr>
+        <a:xfrm>
+          <a:off x="0" y="0"/>
+          <a:ext cx="0" cy="0"/>
+          <a:chOff x="0" y="0"/>
+          <a:chExt cx="0" cy="0"/>
+        </a:xfrm>
+      </p:grpSpPr>
+      <p:sp>
+        <p:nvSpPr>
+          <p:cNvPr id="2" name="Rounded Rectangle 1"/>
+          <p:cNvSpPr/>
+          <p:nvPr/>
+        </p:nvSpPr>
+        <p:spPr>
+          <a:xfrm>
+            <a:off x="548640" y="411480"/>
+            <a:ext cx="1124712" cy="329184"/>
+          </a:xfrm>
+          <a:prstGeom prst="roundRect">
+            <a:avLst>
+              <a:gd name="adj" fmla="val 50000"/>
+            </a:avLst>
+          </a:prstGeom>
+          <a:solidFill>
+            <a:srgbClr val="0072BC"/>
+          </a:solidFill>
+          <a:ln>
+            <a:noFill/>
+          </a:ln>
+        </p:spPr>
+        <p:style>
+          <a:lnRef idx="1">
+            <a:schemeClr val="accent1"/>
+          </a:lnRef>
+          <a:fillRef idx="3">
+            <a:schemeClr val="accent1"/>
+          </a:fillRef>
+          <a:effectRef idx="2">
+            <a:schemeClr val="accent1"/>
+          </a:effectRef>
+          <a:fontRef idx="minor">
+            <a:schemeClr val="lt1"/>
+          </a:fontRef>
+        </p:style>
+        <p:txBody>
+          <a:bodyPr wrap="none" tIns="0" bIns="0" rtlCol="0" anchor="ctr"/>
+          <a:lstStyle/>
+          <a:p>
+            <a:pPr algn="ctr"/>
+            <a:r>
+              <a:rPr sz="1200" b="1">
+                <a:solidFill>
+                  <a:srgbClr val="FFFFFF"/>
+                </a:solidFill>
+                <a:latin typeface="Century Gothic"/>
+              </a:rPr>
+              <a:t>CIERRE</a:t>
+            </a:r>
+          </a:p>
+        </p:txBody>
+      </p:sp>
+      <p:sp>
+        <p:nvSpPr>
+          <p:cNvPr id="3" name="TextBox 2"/>
+          <p:cNvSpPr txBox="1"/>
+          <p:nvPr/>
+        </p:nvSpPr>
+        <p:spPr>
+          <a:xfrm>
+            <a:off x="548640" y="868680"/>
+            <a:ext cx="11094415" cy="731520"/>
+          </a:xfrm>
+          <a:prstGeom prst="rect">
+            <a:avLst/>
+          </a:prstGeom>
+          <a:noFill/>
+        </p:spPr>
+        <p:txBody>
+          <a:bodyPr wrap="square" lIns="0" rIns="0" anchor="t">
+            <a:spAutoFit/>
+          </a:bodyPr>
+          <a:lstStyle/>
+          <a:p>
+            <a:pPr algn="l"/>
+            <a:r>
+              <a:rPr sz="2800" b="1">
+                <a:solidFill>
+                  <a:srgbClr val="FFFFFF"/>
+                </a:solidFill>
+                <a:latin typeface="Century Gothic"/>
+              </a:rPr>
+              <a:t>Tu actividad</a:t>
+            </a:r>
+          </a:p>
+        </p:txBody>
+      </p:sp>
+      <p:sp>
+        <p:nvSpPr>
+          <p:cNvPr id="4" name="TextBox 3"/>
+          <p:cNvSpPr txBox="1"/>
+          <p:nvPr/>
+        </p:nvSpPr>
+        <p:spPr>
+          <a:xfrm>
+            <a:off x="548640" y="1737360"/>
+            <a:ext cx="6766560" cy="4114800"/>
+          </a:xfrm>
+          <a:prstGeom prst="rect">
+            <a:avLst/>
+          </a:prstGeom>
+          <a:noFill/>
+        </p:spPr>
+        <p:txBody>
+          <a:bodyPr wrap="square">
+            <a:spAutoFit/>
+          </a:bodyPr>
+          <a:lstStyle/>
+          <a:p>
+            <a:pPr>
+              <a:spcAft>
+                <a:spcPts val="1200"/>
+              </a:spcAft>
+            </a:pPr>
+            <a:r>
+              <a:rPr sz="1800" b="1">
+                <a:solidFill>
+                  <a:srgbClr val="36B5FF"/>
+                </a:solidFill>
+                <a:latin typeface="Century Gothic"/>
+              </a:rPr>
+              <a:t>✓  </a:t>
+            </a:r>
+            <a:r>
+              <a:rPr sz="1800" b="0">
+                <a:solidFill>
+                  <a:srgbClr val="FFFFFF"/>
+                </a:solidFill>
+                <a:latin typeface="Century Gothic"/>
+              </a:rPr>
+              <a:t>Clase </a:t>
+            </a:r>
+            <a:r>
+              <a:rPr sz="1800" b="0">
+                <a:solidFill>
+                  <a:srgbClr val="36B5FF"/>
+                </a:solidFill>
+                <a:latin typeface="Consolas"/>
+              </a:rPr>
+              <a:t>Producto</a:t>
+            </a:r>
+            <a:r>
+              <a:rPr sz="1800" b="0">
+                <a:solidFill>
+                  <a:srgbClr val="FFFFFF"/>
+                </a:solidFill>
+                <a:latin typeface="Century Gothic"/>
+              </a:rPr>
+              <a:t> con precio privado que no acepta negativos.</a:t>
+            </a:r>
+          </a:p>
+          <a:p>
+            <a:pPr>
+              <a:spcAft>
+                <a:spcPts val="1200"/>
+              </a:spcAft>
+            </a:pPr>
+            <a:r>
+              <a:rPr sz="1800" b="1">
+                <a:solidFill>
+                  <a:srgbClr val="36B5FF"/>
+                </a:solidFill>
+                <a:latin typeface="Century Gothic"/>
+              </a:rPr>
+              <a:t>✓  </a:t>
+            </a:r>
+            <a:r>
+              <a:rPr sz="1800" b="0">
+                <a:solidFill>
+                  <a:srgbClr val="FFFFFF"/>
+                </a:solidFill>
+                <a:latin typeface="Century Gothic"/>
+              </a:rPr>
+              <a:t>Descuento con </a:t>
+            </a:r>
+            <a:r>
+              <a:rPr sz="1800" b="0">
+                <a:solidFill>
+                  <a:srgbClr val="36B5FF"/>
+                </a:solidFill>
+                <a:latin typeface="Consolas"/>
+              </a:rPr>
+              <a:t>if</a:t>
+            </a:r>
+            <a:r>
+              <a:rPr sz="1800" b="0">
+                <a:solidFill>
+                  <a:srgbClr val="FFFFFF"/>
+                </a:solidFill>
+                <a:latin typeface="Century Gothic"/>
+              </a:rPr>
+              <a:t>.</a:t>
+            </a:r>
+          </a:p>
+          <a:p>
+            <a:pPr>
+              <a:spcAft>
+                <a:spcPts val="1200"/>
+              </a:spcAft>
+            </a:pPr>
+            <a:r>
+              <a:rPr sz="1800" b="1">
+                <a:solidFill>
+                  <a:srgbClr val="36B5FF"/>
+                </a:solidFill>
+                <a:latin typeface="Century Gothic"/>
+              </a:rPr>
+              <a:t>✓  </a:t>
+            </a:r>
+            <a:r>
+              <a:rPr sz="1800" b="0">
+                <a:solidFill>
+                  <a:srgbClr val="36B5FF"/>
+                </a:solidFill>
+                <a:latin typeface="Consolas"/>
+              </a:rPr>
+              <a:t>ProductoEnOferta</a:t>
+            </a:r>
+            <a:r>
+              <a:rPr sz="1800" b="0">
+                <a:solidFill>
+                  <a:srgbClr val="FFFFFF"/>
+                </a:solidFill>
+                <a:latin typeface="Century Gothic"/>
+              </a:rPr>
+              <a:t> que hereda y sobrescribe.</a:t>
+            </a:r>
+          </a:p>
+          <a:p>
+            <a:pPr>
+              <a:spcAft>
+                <a:spcPts val="1200"/>
+              </a:spcAft>
+            </a:pPr>
+            <a:r>
+              <a:rPr sz="1800" b="1">
+                <a:solidFill>
+                  <a:srgbClr val="36B5FF"/>
+                </a:solidFill>
+                <a:latin typeface="Century Gothic"/>
+              </a:rPr>
+              <a:t>✓  </a:t>
+            </a:r>
+            <a:r>
+              <a:rPr sz="1800" b="0">
+                <a:solidFill>
+                  <a:srgbClr val="FFFFFF"/>
+                </a:solidFill>
+                <a:latin typeface="Century Gothic"/>
+              </a:rPr>
+              <a:t>Clase </a:t>
+            </a:r>
+            <a:r>
+              <a:rPr sz="1800" b="0">
+                <a:solidFill>
+                  <a:srgbClr val="36B5FF"/>
+                </a:solidFill>
+                <a:latin typeface="Consolas"/>
+              </a:rPr>
+              <a:t>Tienda</a:t>
+            </a:r>
+            <a:r>
+              <a:rPr sz="1800" b="0">
+                <a:solidFill>
+                  <a:srgbClr val="FFFFFF"/>
+                </a:solidFill>
+                <a:latin typeface="Century Gothic"/>
+              </a:rPr>
+              <a:t> que imprime 4 casos con </a:t>
+            </a:r>
+            <a:r>
+              <a:rPr sz="1800" b="0">
+                <a:solidFill>
+                  <a:srgbClr val="36B5FF"/>
+                </a:solidFill>
+                <a:latin typeface="Consolas"/>
+              </a:rPr>
+              <a:t>gradle run</a:t>
+            </a:r>
+            <a:r>
+              <a:rPr sz="1800" b="0">
+                <a:solidFill>
+                  <a:srgbClr val="FFFFFF"/>
+                </a:solidFill>
+                <a:latin typeface="Century Gothic"/>
+              </a:rPr>
+              <a:t>.</a:t>
+            </a:r>
+          </a:p>
+        </p:txBody>
+      </p:sp>
+      <p:sp>
+        <p:nvSpPr>
+          <p:cNvPr id="5" name="Rounded Rectangle 4"/>
+          <p:cNvSpPr/>
+          <p:nvPr/>
+        </p:nvSpPr>
+        <p:spPr>
+          <a:xfrm>
+            <a:off x="7680960" y="1737360"/>
+            <a:ext cx="3962095" cy="3931920"/>
+          </a:xfrm>
+          <a:prstGeom prst="roundRect">
+            <a:avLst>
+              <a:gd name="adj" fmla="val 6000"/>
+            </a:avLst>
+          </a:prstGeom>
+          <a:solidFill>
+            <a:srgbClr val="0B2C59"/>
+          </a:solidFill>
+          <a:ln w="15875">
+            <a:solidFill>
+              <a:srgbClr val="5EA7D8"/>
+            </a:solidFill>
+          </a:ln>
+        </p:spPr>
+        <p:style>
+          <a:lnRef idx="1">
+            <a:schemeClr val="accent1"/>
+          </a:lnRef>
+          <a:fillRef idx="3">
+            <a:schemeClr val="accent1"/>
+          </a:fillRef>
+          <a:effectRef idx="2">
+            <a:schemeClr val="accent1"/>
+          </a:effectRef>
+          <a:fontRef idx="minor">
+            <a:schemeClr val="lt1"/>
+          </a:fontRef>
+        </p:style>
+        <p:txBody>
+          <a:bodyPr rtlCol="0" anchor="ctr"/>
+          <a:lstStyle/>
+          <a:p>
+            <a:endParaRPr/>
+          </a:p>
+        </p:txBody>
+      </p:sp>
+      <p:sp>
+        <p:nvSpPr>
+          <p:cNvPr id="6" name="TextBox 5"/>
+          <p:cNvSpPr txBox="1"/>
+          <p:nvPr/>
+        </p:nvSpPr>
+        <p:spPr>
+          <a:xfrm>
+            <a:off x="7909560" y="1965960"/>
+            <a:ext cx="3504895" cy="548640"/>
+          </a:xfrm>
+          <a:prstGeom prst="rect">
+            <a:avLst/>
+          </a:prstGeom>
+          <a:noFill/>
+        </p:spPr>
+        <p:txBody>
+          <a:bodyPr wrap="square" lIns="0" rIns="0" anchor="t">
+            <a:spAutoFit/>
+          </a:bodyPr>
+          <a:lstStyle/>
+          <a:p>
+            <a:pPr algn="l"/>
+            <a:r>
+              <a:rPr sz="1800" b="1">
+                <a:solidFill>
+                  <a:srgbClr val="FFFFFF"/>
+                </a:solidFill>
+                <a:latin typeface="Century Gothic"/>
+              </a:rPr>
+              <a:t>Entrega</a:t>
+            </a:r>
+          </a:p>
+        </p:txBody>
+      </p:sp>
+      <p:sp>
+        <p:nvSpPr>
+          <p:cNvPr id="7" name="TextBox 6"/>
+          <p:cNvSpPr txBox="1"/>
+          <p:nvPr/>
+        </p:nvSpPr>
+        <p:spPr>
+          <a:xfrm>
+            <a:off x="7909560" y="2468880"/>
+            <a:ext cx="3504895" cy="3017520"/>
+          </a:xfrm>
+          <a:prstGeom prst="rect">
+            <a:avLst/>
+          </a:prstGeom>
+          <a:noFill/>
+        </p:spPr>
+        <p:txBody>
+          <a:bodyPr wrap="square" lIns="0" rIns="0" anchor="t">
+            <a:spAutoFit/>
+          </a:bodyPr>
+          <a:lstStyle/>
+          <a:p>
+            <a:pPr algn="l"/>
+            <a:r>
+              <a:rPr sz="1400" b="0">
+                <a:solidFill>
+                  <a:srgbClr val="C9D6E3"/>
+                </a:solidFill>
+                <a:latin typeface="Century Gothic"/>
+              </a:rPr>
+              <a:t>Miércoles 23 de septiembre de 2026, 8:00 a.m.</a:t>
+            </a:r>
+          </a:p>
+          <a:p>
+            <a:pPr algn="l"/>
+            <a:r>
+              <a:rPr sz="1400" b="0">
+                <a:solidFill>
+                  <a:srgbClr val="C9D6E3"/>
+                </a:solidFill>
+                <a:latin typeface="Century Gothic"/>
+              </a:rPr>
+              <a:t>Repositorio en GitHub o .zip sin la carpeta build</a:t>
+            </a:r>
+          </a:p>
+          <a:p>
+            <a:pPr algn="l"/>
+            <a:r>
+              <a:rPr sz="1400" b="0">
+                <a:solidFill>
+                  <a:srgbClr val="C9D6E3"/>
+                </a:solidFill>
+                <a:latin typeface="Century Gothic"/>
+              </a:rPr>
+              <a:t>Captura de </a:t>
+            </a:r>
+            <a:r>
+              <a:rPr sz="1400" b="0">
+                <a:solidFill>
+                  <a:srgbClr val="36B5FF"/>
+                </a:solidFill>
+                <a:latin typeface="Consolas"/>
+              </a:rPr>
+              <a:t>gradle run</a:t>
+            </a:r>
+            <a:r>
+              <a:rPr sz="1400" b="0">
+                <a:solidFill>
+                  <a:srgbClr val="C9D6E3"/>
+                </a:solidFill>
+                <a:latin typeface="Century Gothic"/>
+              </a:rPr>
+              <a:t> con la salida</a:t>
+            </a:r>
+          </a:p>
+        </p:txBody>
+      </p:sp>
+      <p:sp>
+        <p:nvSpPr>
+          <p:cNvPr id="8" name="TextBox 7"/>
+          <p:cNvSpPr txBox="1"/>
+          <p:nvPr/>
+        </p:nvSpPr>
+        <p:spPr>
+          <a:xfrm>
+            <a:off x="548640" y="6400800"/>
+            <a:ext cx="8229600" cy="274320"/>
+          </a:xfrm>
+          <a:prstGeom prst="rect">
+            <a:avLst/>
+          </a:prstGeom>
+          <a:noFill/>
+        </p:spPr>
+        <p:txBody>
+          <a:bodyPr wrap="square" lIns="0" rIns="0" anchor="t">
+            <a:spAutoFit/>
+          </a:bodyPr>
+          <a:lstStyle/>
+          <a:p>
+            <a:pPr algn="l"/>
+            <a:r>
+              <a:rPr sz="1200" b="0">
+                <a:solidFill>
+                  <a:srgbClr val="C9D6E3"/>
+                </a:solidFill>
+                <a:latin typeface="Century Gothic"/>
+              </a:rPr>
+              <a:t>Semillero QA 2026 · Automatización Web · Clase 1 · 01-fundamentos-java-poo</a:t>
+            </a:r>
+          </a:p>
+        </p:txBody>
+      </p:sp>
+      <p:sp>
+        <p:nvSpPr>
+          <p:cNvPr id="9" name="TextBox 8"/>
+          <p:cNvSpPr txBox="1"/>
+          <p:nvPr/>
+        </p:nvSpPr>
+        <p:spPr>
+          <a:xfrm>
+            <a:off x="10728655" y="6400800"/>
+            <a:ext cx="914400" cy="274320"/>
+          </a:xfrm>
+          <a:prstGeom prst="rect">
+            <a:avLst/>
+          </a:prstGeom>
+          <a:noFill/>
+        </p:spPr>
+        <p:txBody>
+          <a:bodyPr wrap="square" lIns="0" rIns="0" anchor="t">
+            <a:spAutoFit/>
+          </a:bodyPr>
+          <a:lstStyle/>
+          <a:p>
+            <a:pPr algn="r"/>
+            <a:r>
+              <a:rPr sz="1200" b="0">
+                <a:solidFill>
+                  <a:srgbClr val="C9D6E3"/>
+                </a:solidFill>
+                <a:latin typeface="Century Gothic"/>
+              </a:rPr>
+              <a:t>12</a:t>
+            </a:r>
+          </a:p>
+        </p:txBody>
+      </p:sp>
+    </p:spTree>
+  </p:cSld>
+  <p:clrMapOvr>
+    <a:masterClrMapping/>
+  </p:clrMapOvr>
+</p:sld>
+</file>
+
+<file path=ppt/slides/slide12.xml><?xml version="1.0" encoding="utf-8"?>
 <p:sld xmlns:a="http://schemas.openxmlformats.org/drawingml/2006/main" xmlns:p="http://schemas.openxmlformats.org/presentationml/2006/main" xmlns:r="http://schemas.openxmlformats.org/officeDocument/2006/relationships">
   <p:cSld>
     <p:bg>
@@ -3988,7 +4846,7 @@
                 </a:solidFill>
                 <a:latin typeface="Century Gothic"/>
               </a:rPr>
-              <a:t>Polimorfismo: métodos sobrecargados</a:t>
+              <a:t>Heredar o firmar un compromiso</a:t>
             </a:r>
           </a:p>
         </p:txBody>
@@ -4002,7 +4860,7 @@
         <p:spPr>
           <a:xfrm>
             <a:off x="548640" y="1737360"/>
-            <a:ext cx="6949440" cy="4389120"/>
+            <a:ext cx="5669280" cy="4389120"/>
           </a:xfrm>
           <a:prstGeom prst="roundRect">
             <a:avLst>
@@ -4085,7 +4943,7 @@
         <p:spPr>
           <a:xfrm>
             <a:off x="777240" y="2194560"/>
-            <a:ext cx="6492240" cy="3840480"/>
+            <a:ext cx="5212080" cy="3840480"/>
           </a:xfrm>
           <a:prstGeom prst="rect">
             <a:avLst/>
@@ -4105,7 +4963,7 @@
                 </a:solidFill>
                 <a:latin typeface="Consolas"/>
               </a:rPr>
-              <a:t>public class Calculadora {</a:t>
+              <a:t>public interface Volador {</a:t>
             </a:r>
           </a:p>
           <a:p>
@@ -4116,7 +4974,7 @@
                 </a:solidFill>
                 <a:latin typeface="Consolas"/>
               </a:rPr>
-              <a:t>    public int sumar(int a, int b) {</a:t>
+              <a:t>    String volar();</a:t>
             </a:r>
           </a:p>
           <a:p>
@@ -4127,7 +4985,7 @@
                 </a:solidFill>
                 <a:latin typeface="Consolas"/>
               </a:rPr>
-              <a:t>        return a + b;</a:t>
+              <a:t>}</a:t>
             </a:r>
           </a:p>
           <a:p>
@@ -4138,6 +4996,61 @@
                 </a:solidFill>
                 <a:latin typeface="Consolas"/>
               </a:rPr>
+              <a:t> </a:t>
+            </a:r>
+          </a:p>
+          <a:p>
+            <a:r>
+              <a:rPr sz="1300">
+                <a:solidFill>
+                  <a:srgbClr val="FFFFFF"/>
+                </a:solidFill>
+                <a:latin typeface="Consolas"/>
+              </a:rPr>
+              <a:t>public class Pajaro implements Volador {</a:t>
+            </a:r>
+          </a:p>
+          <a:p>
+            <a:r>
+              <a:rPr sz="1300">
+                <a:solidFill>
+                  <a:srgbClr val="FFFFFF"/>
+                </a:solidFill>
+                <a:latin typeface="Consolas"/>
+              </a:rPr>
+              <a:t>    @Override</a:t>
+            </a:r>
+          </a:p>
+          <a:p>
+            <a:r>
+              <a:rPr sz="1300">
+                <a:solidFill>
+                  <a:srgbClr val="FFFFFF"/>
+                </a:solidFill>
+                <a:latin typeface="Consolas"/>
+              </a:rPr>
+              <a:t>    public String volar() {</a:t>
+            </a:r>
+          </a:p>
+          <a:p>
+            <a:r>
+              <a:rPr sz="1300">
+                <a:solidFill>
+                  <a:srgbClr val="FFFFFF"/>
+                </a:solidFill>
+                <a:latin typeface="Consolas"/>
+              </a:rPr>
+              <a:t>        return "vuela moviendo las alas";</a:t>
+            </a:r>
+          </a:p>
+          <a:p>
+            <a:r>
+              <a:rPr sz="1300">
+                <a:solidFill>
+                  <a:srgbClr val="FFFFFF"/>
+                </a:solidFill>
+                <a:latin typeface="Consolas"/>
+              </a:rPr>
               <a:t>    }</a:t>
             </a:r>
           </a:p>
@@ -4149,7 +5062,7 @@
                 </a:solidFill>
                 <a:latin typeface="Consolas"/>
               </a:rPr>
-              <a:t>    public int sumar(int a, int b, int c) {</a:t>
+              <a:t>}</a:t>
             </a:r>
           </a:p>
           <a:p>
@@ -4160,7 +5073,7 @@
                 </a:solidFill>
                 <a:latin typeface="Consolas"/>
               </a:rPr>
-              <a:t>        return a + b + c;</a:t>
+              <a:t> </a:t>
             </a:r>
           </a:p>
           <a:p>
@@ -4171,7 +5084,7 @@
                 </a:solidFill>
                 <a:latin typeface="Consolas"/>
               </a:rPr>
-              <a:t>    }</a:t>
+              <a:t>public class Perro extends Animal {</a:t>
             </a:r>
           </a:p>
           <a:p>
@@ -4182,7 +5095,7 @@
                 </a:solidFill>
                 <a:latin typeface="Consolas"/>
               </a:rPr>
-              <a:t>    public double sumar(double a, double b) {</a:t>
+              <a:t>    ...</a:t>
             </a:r>
           </a:p>
           <a:p>
@@ -4193,189 +5106,7 @@
                 </a:solidFill>
                 <a:latin typeface="Consolas"/>
               </a:rPr>
-              <a:t>        return a + b;</a:t>
-            </a:r>
-          </a:p>
-          <a:p>
-            <a:r>
-              <a:rPr sz="1300">
-                <a:solidFill>
-                  <a:srgbClr val="FFFFFF"/>
-                </a:solidFill>
-                <a:latin typeface="Consolas"/>
-              </a:rPr>
-              <a:t>    }</a:t>
-            </a:r>
-          </a:p>
-          <a:p>
-            <a:r>
-              <a:rPr sz="1300">
-                <a:solidFill>
-                  <a:srgbClr val="FFFFFF"/>
-                </a:solidFill>
-                <a:latin typeface="Consolas"/>
-              </a:rPr>
               <a:t>}</a:t>
-            </a:r>
-          </a:p>
-          <a:p>
-            <a:r>
-              <a:rPr sz="1300">
-                <a:solidFill>
-                  <a:srgbClr val="FFFFFF"/>
-                </a:solidFill>
-                <a:latin typeface="Consolas"/>
-              </a:rPr>
-              <a:t> </a:t>
-            </a:r>
-          </a:p>
-          <a:p>
-            <a:r>
-              <a:rPr sz="1300">
-                <a:solidFill>
-                  <a:srgbClr val="FFFFFF"/>
-                </a:solidFill>
-                <a:latin typeface="Consolas"/>
-              </a:rPr>
-              <a:t>calculadora.sumar(2, 3)       // 5</a:t>
-            </a:r>
-          </a:p>
-          <a:p>
-            <a:r>
-              <a:rPr sz="1300">
-                <a:solidFill>
-                  <a:srgbClr val="FFFFFF"/>
-                </a:solidFill>
-                <a:latin typeface="Consolas"/>
-              </a:rPr>
-              <a:t>calculadora.sumar(2, 3, 4)    // 9</a:t>
-            </a:r>
-          </a:p>
-          <a:p>
-            <a:r>
-              <a:rPr sz="1300">
-                <a:solidFill>
-                  <a:srgbClr val="FFFFFF"/>
-                </a:solidFill>
-                <a:latin typeface="Consolas"/>
-              </a:rPr>
-              <a:t>calculadora.sumar(2.5, 1.5)   // 4.0</a:t>
-            </a:r>
-          </a:p>
-        </p:txBody>
-      </p:sp>
-      <p:sp>
-        <p:nvSpPr>
-          <p:cNvPr id="7" name="TextBox 6"/>
-          <p:cNvSpPr txBox="1"/>
-          <p:nvPr/>
-        </p:nvSpPr>
-        <p:spPr>
-          <a:xfrm>
-            <a:off x="7863840" y="1737360"/>
-            <a:ext cx="3779215" cy="4389120"/>
-          </a:xfrm>
-          <a:prstGeom prst="rect">
-            <a:avLst/>
-          </a:prstGeom>
-          <a:noFill/>
-        </p:spPr>
-        <p:txBody>
-          <a:bodyPr wrap="square">
-            <a:spAutoFit/>
-          </a:bodyPr>
-          <a:lstStyle/>
-          <a:p>
-            <a:pPr>
-              <a:spcAft>
-                <a:spcPts val="1000"/>
-              </a:spcAft>
-            </a:pPr>
-            <a:r>
-              <a:rPr sz="1600" b="1">
-                <a:solidFill>
-                  <a:srgbClr val="36B5FF"/>
-                </a:solidFill>
-                <a:latin typeface="Century Gothic"/>
-              </a:rPr>
-              <a:t>▸  </a:t>
-            </a:r>
-            <a:r>
-              <a:rPr sz="1600" b="0">
-                <a:solidFill>
-                  <a:srgbClr val="FFFFFF"/>
-                </a:solidFill>
-                <a:latin typeface="Century Gothic"/>
-              </a:rPr>
-              <a:t>Mismo nombre, datos distintos.</a:t>
-            </a:r>
-          </a:p>
-          <a:p>
-            <a:pPr>
-              <a:spcAft>
-                <a:spcPts val="1000"/>
-              </a:spcAft>
-            </a:pPr>
-            <a:r>
-              <a:rPr sz="1600" b="1">
-                <a:solidFill>
-                  <a:srgbClr val="36B5FF"/>
-                </a:solidFill>
-                <a:latin typeface="Century Gothic"/>
-              </a:rPr>
-              <a:t>▸  </a:t>
-            </a:r>
-            <a:r>
-              <a:rPr sz="1600" b="0">
-                <a:solidFill>
-                  <a:srgbClr val="FFFFFF"/>
-                </a:solidFill>
-                <a:latin typeface="Century Gothic"/>
-              </a:rPr>
-              <a:t>Java escoge cuál usar por la cantidad y el tipo de datos.</a:t>
-            </a:r>
-          </a:p>
-          <a:p>
-            <a:pPr>
-              <a:spcAft>
-                <a:spcPts val="1000"/>
-              </a:spcAft>
-            </a:pPr>
-            <a:r>
-              <a:rPr sz="1600" b="1">
-                <a:solidFill>
-                  <a:srgbClr val="36B5FF"/>
-                </a:solidFill>
-                <a:latin typeface="Century Gothic"/>
-              </a:rPr>
-              <a:t>▸  </a:t>
-            </a:r>
-            <a:r>
-              <a:rPr sz="1600" b="0">
-                <a:solidFill>
-                  <a:srgbClr val="FFFFFF"/>
-                </a:solidFill>
-                <a:latin typeface="Century Gothic"/>
-              </a:rPr>
-              <a:t>No es </a:t>
-            </a:r>
-            <a:r>
-              <a:rPr sz="1600" b="0">
-                <a:solidFill>
-                  <a:srgbClr val="36B5FF"/>
-                </a:solidFill>
-                <a:latin typeface="Consolas"/>
-              </a:rPr>
-              <a:t>@Override</a:t>
-            </a:r>
-            <a:r>
-              <a:rPr sz="1600" b="0">
-                <a:solidFill>
-                  <a:srgbClr val="FFFFFF"/>
-                </a:solidFill>
-                <a:latin typeface="Century Gothic"/>
-              </a:rPr>
-              <a:t>: sobrescribir es cambiar un método del padre.</a:t>
             </a:r>
           </a:p>
         </p:txBody>
@@ -4450,6 +5181,317 @@
           </a:p>
         </p:txBody>
       </p:sp>
+      <p:graphicFrame>
+        <p:nvGraphicFramePr>
+          <p:cNvPr id="10" name="Table 9"/>
+          <p:cNvGraphicFramePr>
+            <a:graphicFrameLocks noGrp="1"/>
+          </p:cNvGraphicFramePr>
+          <p:nvPr/>
+        </p:nvGraphicFramePr>
+        <p:xfrm>
+          <a:off x="6492240" y="1920240"/>
+          <a:ext cx="5148070" cy="3291840"/>
+        </p:xfrm>
+        <a:graphic>
+          <a:graphicData uri="http://schemas.openxmlformats.org/drawingml/2006/table">
+            <a:tbl>
+              <a:tblPr firstRow="1" bandRow="1">
+                <a:tableStyleId>{5C22544A-7EE6-4342-B048-85BDC9FD1C3A}</a:tableStyleId>
+              </a:tblPr>
+              <a:tblGrid>
+                <a:gridCol w="1325880"/>
+                <a:gridCol w="1911095"/>
+                <a:gridCol w="1911095"/>
+              </a:tblGrid>
+              <a:tr h="822960">
+                <a:tc>
+                  <a:txBody>
+                    <a:bodyPr wrap="square"/>
+                    <a:lstStyle/>
+                    <a:p>
+                      <a:pPr algn="l"/>
+                      <a:r>
+                        <a:rPr sz="1400" b="1">
+                          <a:solidFill>
+                            <a:srgbClr val="FFFFFF"/>
+                          </a:solidFill>
+                          <a:latin typeface="Century Gothic"/>
+                        </a:rPr>
+                        <a:t/>
+                      </a:r>
+                    </a:p>
+                  </a:txBody>
+                  <a:tcPr marL="91440" marR="91440">
+                    <a:solidFill>
+                      <a:srgbClr val="0072BC"/>
+                    </a:solidFill>
+                  </a:tcPr>
+                </a:tc>
+                <a:tc>
+                  <a:txBody>
+                    <a:bodyPr wrap="square"/>
+                    <a:lstStyle/>
+                    <a:p>
+                      <a:pPr algn="l"/>
+                      <a:r>
+                        <a:rPr sz="1400" b="1">
+                          <a:solidFill>
+                            <a:srgbClr val="FFFFFF"/>
+                          </a:solidFill>
+                          <a:latin typeface="Consolas"/>
+                        </a:rPr>
+                        <a:t>extends</a:t>
+                      </a:r>
+                    </a:p>
+                  </a:txBody>
+                  <a:tcPr marL="91440" marR="91440">
+                    <a:solidFill>
+                      <a:srgbClr val="0072BC"/>
+                    </a:solidFill>
+                  </a:tcPr>
+                </a:tc>
+                <a:tc>
+                  <a:txBody>
+                    <a:bodyPr wrap="square"/>
+                    <a:lstStyle/>
+                    <a:p>
+                      <a:pPr algn="l"/>
+                      <a:r>
+                        <a:rPr sz="1400" b="1">
+                          <a:solidFill>
+                            <a:srgbClr val="FFFFFF"/>
+                          </a:solidFill>
+                          <a:latin typeface="Consolas"/>
+                        </a:rPr>
+                        <a:t>implements</a:t>
+                      </a:r>
+                    </a:p>
+                  </a:txBody>
+                  <a:tcPr marL="91440" marR="91440">
+                    <a:solidFill>
+                      <a:srgbClr val="0072BC"/>
+                    </a:solidFill>
+                  </a:tcPr>
+                </a:tc>
+              </a:tr>
+              <a:tr h="822960">
+                <a:tc>
+                  <a:txBody>
+                    <a:bodyPr wrap="square"/>
+                    <a:lstStyle/>
+                    <a:p>
+                      <a:pPr algn="l"/>
+                      <a:r>
+                        <a:rPr sz="1400" b="1">
+                          <a:solidFill>
+                            <a:srgbClr val="FFFFFF"/>
+                          </a:solidFill>
+                          <a:latin typeface="Century Gothic"/>
+                        </a:rPr>
+                        <a:t>Qué recibe</a:t>
+                      </a:r>
+                    </a:p>
+                  </a:txBody>
+                  <a:tcPr marL="91440" marR="91440">
+                    <a:solidFill>
+                      <a:srgbClr val="0B2C59"/>
+                    </a:solidFill>
+                  </a:tcPr>
+                </a:tc>
+                <a:tc>
+                  <a:txBody>
+                    <a:bodyPr wrap="square"/>
+                    <a:lstStyle/>
+                    <a:p>
+                      <a:pPr algn="l"/>
+                      <a:r>
+                        <a:rPr sz="1400" b="0">
+                          <a:solidFill>
+                            <a:srgbClr val="FFFFFF"/>
+                          </a:solidFill>
+                          <a:latin typeface="Century Gothic"/>
+                        </a:rPr>
+                        <a:t>Código ya hecho del padre</a:t>
+                      </a:r>
+                    </a:p>
+                  </a:txBody>
+                  <a:tcPr marL="91440" marR="91440">
+                    <a:solidFill>
+                      <a:srgbClr val="0B2C59"/>
+                    </a:solidFill>
+                  </a:tcPr>
+                </a:tc>
+                <a:tc>
+                  <a:txBody>
+                    <a:bodyPr wrap="square"/>
+                    <a:lstStyle/>
+                    <a:p>
+                      <a:pPr algn="l"/>
+                      <a:r>
+                        <a:rPr sz="1400" b="0">
+                          <a:solidFill>
+                            <a:srgbClr val="FFFFFF"/>
+                          </a:solidFill>
+                          <a:latin typeface="Century Gothic"/>
+                        </a:rPr>
+                        <a:t>La obligación de escribirlo</a:t>
+                      </a:r>
+                    </a:p>
+                  </a:txBody>
+                  <a:tcPr marL="91440" marR="91440">
+                    <a:solidFill>
+                      <a:srgbClr val="0B2C59"/>
+                    </a:solidFill>
+                  </a:tcPr>
+                </a:tc>
+              </a:tr>
+              <a:tr h="822960">
+                <a:tc>
+                  <a:txBody>
+                    <a:bodyPr wrap="square"/>
+                    <a:lstStyle/>
+                    <a:p>
+                      <a:pPr algn="l"/>
+                      <a:r>
+                        <a:rPr sz="1400" b="1">
+                          <a:solidFill>
+                            <a:srgbClr val="FFFFFF"/>
+                          </a:solidFill>
+                          <a:latin typeface="Century Gothic"/>
+                        </a:rPr>
+                        <a:t>Cuántas</a:t>
+                      </a:r>
+                    </a:p>
+                  </a:txBody>
+                  <a:tcPr marL="91440" marR="91440">
+                    <a:solidFill>
+                      <a:srgbClr val="08264F"/>
+                    </a:solidFill>
+                  </a:tcPr>
+                </a:tc>
+                <a:tc>
+                  <a:txBody>
+                    <a:bodyPr wrap="square"/>
+                    <a:lstStyle/>
+                    <a:p>
+                      <a:pPr algn="l"/>
+                      <a:r>
+                        <a:rPr sz="1400" b="0">
+                          <a:solidFill>
+                            <a:srgbClr val="FFFFFF"/>
+                          </a:solidFill>
+                          <a:latin typeface="Century Gothic"/>
+                        </a:rPr>
+                        <a:t>Una sola clase padre</a:t>
+                      </a:r>
+                    </a:p>
+                  </a:txBody>
+                  <a:tcPr marL="91440" marR="91440">
+                    <a:solidFill>
+                      <a:srgbClr val="08264F"/>
+                    </a:solidFill>
+                  </a:tcPr>
+                </a:tc>
+                <a:tc>
+                  <a:txBody>
+                    <a:bodyPr wrap="square"/>
+                    <a:lstStyle/>
+                    <a:p>
+                      <a:pPr algn="l"/>
+                      <a:r>
+                        <a:rPr sz="1400" b="0">
+                          <a:solidFill>
+                            <a:srgbClr val="FFFFFF"/>
+                          </a:solidFill>
+                          <a:latin typeface="Century Gothic"/>
+                        </a:rPr>
+                        <a:t>Varias interfaces</a:t>
+                      </a:r>
+                    </a:p>
+                  </a:txBody>
+                  <a:tcPr marL="91440" marR="91440">
+                    <a:solidFill>
+                      <a:srgbClr val="08264F"/>
+                    </a:solidFill>
+                  </a:tcPr>
+                </a:tc>
+              </a:tr>
+              <a:tr h="822960">
+                <a:tc>
+                  <a:txBody>
+                    <a:bodyPr wrap="square"/>
+                    <a:lstStyle/>
+                    <a:p>
+                      <a:pPr algn="l"/>
+                      <a:r>
+                        <a:rPr sz="1400" b="1">
+                          <a:solidFill>
+                            <a:srgbClr val="FFFFFF"/>
+                          </a:solidFill>
+                          <a:latin typeface="Century Gothic"/>
+                        </a:rPr>
+                        <a:t>En el proyecto</a:t>
+                      </a:r>
+                    </a:p>
+                  </a:txBody>
+                  <a:tcPr marL="91440" marR="91440">
+                    <a:solidFill>
+                      <a:srgbClr val="0B2C59"/>
+                    </a:solidFill>
+                  </a:tcPr>
+                </a:tc>
+                <a:tc>
+                  <a:txBody>
+                    <a:bodyPr wrap="square"/>
+                    <a:lstStyle/>
+                    <a:p>
+                      <a:pPr algn="l"/>
+                      <a:r>
+                        <a:rPr sz="1400" b="0">
+                          <a:solidFill>
+                            <a:srgbClr val="FFFFFF"/>
+                          </a:solidFill>
+                          <a:latin typeface="Century Gothic"/>
+                        </a:rPr>
+                        <a:t>Perro y Animal</a:t>
+                      </a:r>
+                    </a:p>
+                  </a:txBody>
+                  <a:tcPr marL="91440" marR="91440">
+                    <a:solidFill>
+                      <a:srgbClr val="0B2C59"/>
+                    </a:solidFill>
+                  </a:tcPr>
+                </a:tc>
+                <a:tc>
+                  <a:txBody>
+                    <a:bodyPr wrap="square"/>
+                    <a:lstStyle/>
+                    <a:p>
+                      <a:pPr algn="l"/>
+                      <a:r>
+                        <a:rPr sz="1400" b="0">
+                          <a:solidFill>
+                            <a:srgbClr val="FFFFFF"/>
+                          </a:solidFill>
+                          <a:latin typeface="Century Gothic"/>
+                        </a:rPr>
+                        <a:t>Pajaro y Volador</a:t>
+                      </a:r>
+                    </a:p>
+                  </a:txBody>
+                  <a:tcPr marL="91440" marR="91440">
+                    <a:solidFill>
+                      <a:srgbClr val="0B2C59"/>
+                    </a:solidFill>
+                  </a:tcPr>
+                </a:tc>
+              </a:tr>
+            </a:tbl>
+          </a:graphicData>
+        </a:graphic>
+      </p:graphicFrame>
     </p:spTree>
   </p:cSld>
   <p:clrMapOvr>
@@ -9150,7 +10192,7 @@
 </file>
 
 <file path=ppt/slides/slide9.xml><?xml version="1.0" encoding="utf-8"?>
-<p:sld xmlns:a="http://schemas.openxmlformats.org/drawingml/2006/main" xmlns:r="http://schemas.openxmlformats.org/officeDocument/2006/relationships" xmlns:p="http://schemas.openxmlformats.org/presentationml/2006/main">
+<p:sld xmlns:a="http://schemas.openxmlformats.org/drawingml/2006/main" xmlns:p="http://schemas.openxmlformats.org/presentationml/2006/main" xmlns:r="http://schemas.openxmlformats.org/officeDocument/2006/relationships">
   <p:cSld>
     <p:bg>
       <p:bgPr>
@@ -9166,14 +10208,7 @@
         <p:cNvGrpSpPr/>
         <p:nvPr/>
       </p:nvGrpSpPr>
-      <p:grpSpPr>
-        <a:xfrm>
-          <a:off x="0" y="0"/>
-          <a:ext cx="0" cy="0"/>
-          <a:chOff x="0" y="0"/>
-          <a:chExt cx="0" cy="0"/>
-        </a:xfrm>
-      </p:grpSpPr>
+      <p:grpSpPr/>
       <p:sp>
         <p:nvSpPr>
           <p:cNvPr id="2" name="Rounded Rectangle 1"/>
@@ -9183,7 +10218,7 @@
         <p:spPr>
           <a:xfrm>
             <a:off x="548640" y="411480"/>
-            <a:ext cx="1362456" cy="329184"/>
+            <a:ext cx="1124712" cy="329184"/>
           </a:xfrm>
           <a:prstGeom prst="roundRect">
             <a:avLst>
@@ -9223,7 +10258,7 @@
                 </a:solidFill>
                 <a:latin typeface="Century Gothic"/>
               </a:rPr>
-              <a:t>PRÁCTICA</a:t>
+              <a:t>TEMA 3</a:t>
             </a:r>
           </a:p>
         </p:txBody>
@@ -9258,7 +10293,7 @@
                 </a:solidFill>
                 <a:latin typeface="Century Gothic"/>
               </a:rPr>
-              <a:t>Cómo lo corres y cómo lees un error</a:t>
+              <a:t>Polimorfismo: métodos sobrecargados</a:t>
             </a:r>
           </a:p>
         </p:txBody>
@@ -9271,18 +10306,18 @@
         </p:nvSpPr>
         <p:spPr>
           <a:xfrm>
-            <a:off x="548640" y="2057400"/>
-            <a:ext cx="2464993" cy="2651760"/>
+            <a:off x="548640" y="1737360"/>
+            <a:ext cx="6949440" cy="4389120"/>
           </a:xfrm>
           <a:prstGeom prst="roundRect">
             <a:avLst>
-              <a:gd name="adj" fmla="val 6000"/>
+              <a:gd name="adj" fmla="val 3000"/>
             </a:avLst>
           </a:prstGeom>
           <a:solidFill>
-            <a:srgbClr val="0B2C59"/>
+            <a:srgbClr val="0A1B33"/>
           </a:solidFill>
-          <a:ln w="15875">
+          <a:ln w="12700">
             <a:solidFill>
               <a:srgbClr val="5EA7D8"/>
             </a:solidFill>
@@ -9306,6 +10341,7 @@
           <a:bodyPr rtlCol="0" anchor="ctr"/>
           <a:lstStyle/>
           <a:p>
+            <a:pPr algn="ctr"/>
             <a:endParaRPr/>
           </a:p>
         </p:txBody>
@@ -9318,8 +10354,8 @@
         </p:nvSpPr>
         <p:spPr>
           <a:xfrm>
-            <a:off x="777240" y="2286000"/>
-            <a:ext cx="2007793" cy="548640"/>
+            <a:off x="777240" y="1847088"/>
+            <a:ext cx="2743200" cy="274320"/>
           </a:xfrm>
           <a:prstGeom prst="rect">
             <a:avLst/>
@@ -9334,13 +10370,13 @@
           <a:p>
             <a:pPr algn="l"/>
             <a:r>
-              <a:rPr sz="1800" b="1">
-                <a:solidFill>
-                  <a:srgbClr val="FFFFFF"/>
-                </a:solidFill>
-                <a:latin typeface="Century Gothic"/>
-              </a:rPr>
-              <a:t>1. PowerShell</a:t>
+              <a:rPr sz="1200" b="1">
+                <a:solidFill>
+                  <a:srgbClr val="36B5FF"/>
+                </a:solidFill>
+                <a:latin typeface="Century Gothic"/>
+              </a:rPr>
+              <a:t>Java</a:t>
             </a:r>
           </a:p>
         </p:txBody>
@@ -9353,8 +10389,312 @@
         </p:nvSpPr>
         <p:spPr>
           <a:xfrm>
-            <a:off x="777240" y="2788920"/>
-            <a:ext cx="2007793" cy="1737360"/>
+            <a:off x="777240" y="2194560"/>
+            <a:ext cx="6492240" cy="3840480"/>
+          </a:xfrm>
+          <a:prstGeom prst="rect">
+            <a:avLst/>
+          </a:prstGeom>
+          <a:noFill/>
+        </p:spPr>
+        <p:txBody>
+          <a:bodyPr wrap="square">
+            <a:spAutoFit/>
+          </a:bodyPr>
+          <a:lstStyle/>
+          <a:p>
+            <a:r>
+              <a:rPr sz="1300">
+                <a:solidFill>
+                  <a:srgbClr val="FFFFFF"/>
+                </a:solidFill>
+                <a:latin typeface="Consolas"/>
+              </a:rPr>
+              <a:t>public class Calculadora {</a:t>
+            </a:r>
+          </a:p>
+          <a:p>
+            <a:r>
+              <a:rPr sz="1300">
+                <a:solidFill>
+                  <a:srgbClr val="FFFFFF"/>
+                </a:solidFill>
+                <a:latin typeface="Consolas"/>
+              </a:rPr>
+              <a:t>    public int sumar(int a, int b) {</a:t>
+            </a:r>
+          </a:p>
+          <a:p>
+            <a:r>
+              <a:rPr sz="1300">
+                <a:solidFill>
+                  <a:srgbClr val="FFFFFF"/>
+                </a:solidFill>
+                <a:latin typeface="Consolas"/>
+              </a:rPr>
+              <a:t>        return a + b;</a:t>
+            </a:r>
+          </a:p>
+          <a:p>
+            <a:r>
+              <a:rPr sz="1300">
+                <a:solidFill>
+                  <a:srgbClr val="FFFFFF"/>
+                </a:solidFill>
+                <a:latin typeface="Consolas"/>
+              </a:rPr>
+              <a:t>    }</a:t>
+            </a:r>
+          </a:p>
+          <a:p>
+            <a:r>
+              <a:rPr sz="1300">
+                <a:solidFill>
+                  <a:srgbClr val="FFFFFF"/>
+                </a:solidFill>
+                <a:latin typeface="Consolas"/>
+              </a:rPr>
+              <a:t>    public int sumar(int a, int b, int c) {</a:t>
+            </a:r>
+          </a:p>
+          <a:p>
+            <a:r>
+              <a:rPr sz="1300">
+                <a:solidFill>
+                  <a:srgbClr val="FFFFFF"/>
+                </a:solidFill>
+                <a:latin typeface="Consolas"/>
+              </a:rPr>
+              <a:t>        return a + b + c;</a:t>
+            </a:r>
+          </a:p>
+          <a:p>
+            <a:r>
+              <a:rPr sz="1300">
+                <a:solidFill>
+                  <a:srgbClr val="FFFFFF"/>
+                </a:solidFill>
+                <a:latin typeface="Consolas"/>
+              </a:rPr>
+              <a:t>    }</a:t>
+            </a:r>
+          </a:p>
+          <a:p>
+            <a:r>
+              <a:rPr sz="1300">
+                <a:solidFill>
+                  <a:srgbClr val="FFFFFF"/>
+                </a:solidFill>
+                <a:latin typeface="Consolas"/>
+              </a:rPr>
+              <a:t>    public double sumar(double a, double b) {</a:t>
+            </a:r>
+          </a:p>
+          <a:p>
+            <a:r>
+              <a:rPr sz="1300">
+                <a:solidFill>
+                  <a:srgbClr val="FFFFFF"/>
+                </a:solidFill>
+                <a:latin typeface="Consolas"/>
+              </a:rPr>
+              <a:t>        return a + b;</a:t>
+            </a:r>
+          </a:p>
+          <a:p>
+            <a:r>
+              <a:rPr sz="1300">
+                <a:solidFill>
+                  <a:srgbClr val="FFFFFF"/>
+                </a:solidFill>
+                <a:latin typeface="Consolas"/>
+              </a:rPr>
+              <a:t>    }</a:t>
+            </a:r>
+          </a:p>
+          <a:p>
+            <a:r>
+              <a:rPr sz="1300">
+                <a:solidFill>
+                  <a:srgbClr val="FFFFFF"/>
+                </a:solidFill>
+                <a:latin typeface="Consolas"/>
+              </a:rPr>
+              <a:t>}</a:t>
+            </a:r>
+          </a:p>
+          <a:p>
+            <a:r>
+              <a:rPr sz="1300">
+                <a:solidFill>
+                  <a:srgbClr val="FFFFFF"/>
+                </a:solidFill>
+                <a:latin typeface="Consolas"/>
+              </a:rPr>
+              <a:t> </a:t>
+            </a:r>
+          </a:p>
+          <a:p>
+            <a:r>
+              <a:rPr sz="1300">
+                <a:solidFill>
+                  <a:srgbClr val="FFFFFF"/>
+                </a:solidFill>
+                <a:latin typeface="Consolas"/>
+              </a:rPr>
+              <a:t>calculadora.sumar(2, 3)       // 5</a:t>
+            </a:r>
+          </a:p>
+          <a:p>
+            <a:r>
+              <a:rPr sz="1300">
+                <a:solidFill>
+                  <a:srgbClr val="FFFFFF"/>
+                </a:solidFill>
+                <a:latin typeface="Consolas"/>
+              </a:rPr>
+              <a:t>calculadora.sumar(2, 3, 4)    // 9</a:t>
+            </a:r>
+          </a:p>
+          <a:p>
+            <a:r>
+              <a:rPr sz="1300">
+                <a:solidFill>
+                  <a:srgbClr val="FFFFFF"/>
+                </a:solidFill>
+                <a:latin typeface="Consolas"/>
+              </a:rPr>
+              <a:t>calculadora.sumar(2.5, 1.5)   // 4.0</a:t>
+            </a:r>
+          </a:p>
+        </p:txBody>
+      </p:sp>
+      <p:sp>
+        <p:nvSpPr>
+          <p:cNvPr id="7" name="TextBox 6"/>
+          <p:cNvSpPr txBox="1"/>
+          <p:nvPr/>
+        </p:nvSpPr>
+        <p:spPr>
+          <a:xfrm>
+            <a:off x="7863840" y="1737360"/>
+            <a:ext cx="3779215" cy="4389120"/>
+          </a:xfrm>
+          <a:prstGeom prst="rect">
+            <a:avLst/>
+          </a:prstGeom>
+          <a:noFill/>
+        </p:spPr>
+        <p:txBody>
+          <a:bodyPr wrap="square">
+            <a:spAutoFit/>
+          </a:bodyPr>
+          <a:lstStyle/>
+          <a:p>
+            <a:pPr>
+              <a:spcAft>
+                <a:spcPts val="1000"/>
+              </a:spcAft>
+            </a:pPr>
+            <a:r>
+              <a:rPr sz="1600" b="1">
+                <a:solidFill>
+                  <a:srgbClr val="36B5FF"/>
+                </a:solidFill>
+                <a:latin typeface="Century Gothic"/>
+              </a:rPr>
+              <a:t>▸  </a:t>
+            </a:r>
+            <a:r>
+              <a:rPr sz="1600" b="0">
+                <a:solidFill>
+                  <a:srgbClr val="FFFFFF"/>
+                </a:solidFill>
+                <a:latin typeface="Century Gothic"/>
+              </a:rPr>
+              <a:t>Mismo nombre, datos distintos.</a:t>
+            </a:r>
+          </a:p>
+          <a:p>
+            <a:pPr>
+              <a:spcAft>
+                <a:spcPts val="1000"/>
+              </a:spcAft>
+            </a:pPr>
+            <a:r>
+              <a:rPr sz="1600" b="1">
+                <a:solidFill>
+                  <a:srgbClr val="36B5FF"/>
+                </a:solidFill>
+                <a:latin typeface="Century Gothic"/>
+              </a:rPr>
+              <a:t>▸  </a:t>
+            </a:r>
+            <a:r>
+              <a:rPr sz="1600" b="0">
+                <a:solidFill>
+                  <a:srgbClr val="FFFFFF"/>
+                </a:solidFill>
+                <a:latin typeface="Century Gothic"/>
+              </a:rPr>
+              <a:t>Java escoge cuál usar por la cantidad y el tipo de datos.</a:t>
+            </a:r>
+          </a:p>
+          <a:p>
+            <a:pPr>
+              <a:spcAft>
+                <a:spcPts val="1000"/>
+              </a:spcAft>
+            </a:pPr>
+            <a:r>
+              <a:rPr sz="1600" b="1">
+                <a:solidFill>
+                  <a:srgbClr val="36B5FF"/>
+                </a:solidFill>
+                <a:latin typeface="Century Gothic"/>
+              </a:rPr>
+              <a:t>▸  </a:t>
+            </a:r>
+            <a:r>
+              <a:rPr sz="1600" b="0">
+                <a:solidFill>
+                  <a:srgbClr val="FFFFFF"/>
+                </a:solidFill>
+                <a:latin typeface="Century Gothic"/>
+              </a:rPr>
+              <a:t>No es </a:t>
+            </a:r>
+            <a:r>
+              <a:rPr sz="1600" b="0">
+                <a:solidFill>
+                  <a:srgbClr val="36B5FF"/>
+                </a:solidFill>
+                <a:latin typeface="Consolas"/>
+              </a:rPr>
+              <a:t>@Override</a:t>
+            </a:r>
+            <a:r>
+              <a:rPr sz="1600" b="0">
+                <a:solidFill>
+                  <a:srgbClr val="FFFFFF"/>
+                </a:solidFill>
+                <a:latin typeface="Century Gothic"/>
+              </a:rPr>
+              <a:t>: sobrescribir es cambiar un método del padre.</a:t>
+            </a:r>
+          </a:p>
+        </p:txBody>
+      </p:sp>
+      <p:sp>
+        <p:nvSpPr>
+          <p:cNvPr id="8" name="TextBox 7"/>
+          <p:cNvSpPr txBox="1"/>
+          <p:nvPr/>
+        </p:nvSpPr>
+        <p:spPr>
+          <a:xfrm>
+            <a:off x="548640" y="6400800"/>
+            <a:ext cx="8229600" cy="274320"/>
           </a:xfrm>
           <a:prstGeom prst="rect">
             <a:avLst/>
@@ -9369,603 +10709,20 @@
           <a:p>
             <a:pPr algn="l"/>
             <a:r>
-              <a:rPr sz="1400" b="0">
-                <a:solidFill>
-                  <a:srgbClr val="36B5FF"/>
-                </a:solidFill>
-                <a:latin typeface="Consolas"/>
-              </a:rPr>
-              <a:t>cd</a:t>
-            </a:r>
-            <a:r>
-              <a:rPr sz="1400" b="0">
+              <a:rPr sz="1200" b="0">
                 <a:solidFill>
                   <a:srgbClr val="C9D6E3"/>
                 </a:solidFill>
                 <a:latin typeface="Century Gothic"/>
               </a:rPr>
-              <a:t> a la carpeta del proyecto</a:t>
-            </a:r>
-          </a:p>
-        </p:txBody>
-      </p:sp>
-      <p:cxnSp>
-        <p:nvCxnSpPr>
-          <p:cNvPr id="7" name="Connector 6"/>
-          <p:cNvCxnSpPr/>
-          <p:nvPr/>
-        </p:nvCxnSpPr>
-        <p:spPr>
-          <a:xfrm>
-            <a:off x="3059353" y="3383280"/>
-            <a:ext cx="320040" cy="0"/>
-          </a:xfrm>
-          <a:prstGeom prst="line">
-            <a:avLst/>
-          </a:prstGeom>
-          <a:ln w="31750">
-            <a:solidFill>
-              <a:srgbClr val="36B5FF"/>
-            </a:solidFill>
-            <a:tailEnd type="triangle"/>
-          </a:ln>
-        </p:spPr>
-        <p:style>
-          <a:lnRef idx="2">
-            <a:schemeClr val="accent1"/>
-          </a:lnRef>
-          <a:fillRef idx="0">
-            <a:schemeClr val="accent1"/>
-          </a:fillRef>
-          <a:effectRef idx="1">
-            <a:schemeClr val="accent1"/>
-          </a:effectRef>
-          <a:fontRef idx="minor">
-            <a:schemeClr val="tx1"/>
-          </a:fontRef>
-        </p:style>
-      </p:cxnSp>
-      <p:sp>
-        <p:nvSpPr>
-          <p:cNvPr id="8" name="Rounded Rectangle 7"/>
-          <p:cNvSpPr/>
-          <p:nvPr/>
-        </p:nvSpPr>
-        <p:spPr>
-          <a:xfrm>
-            <a:off x="3425113" y="2057400"/>
-            <a:ext cx="2464993" cy="2651760"/>
-          </a:xfrm>
-          <a:prstGeom prst="roundRect">
-            <a:avLst>
-              <a:gd name="adj" fmla="val 6000"/>
-            </a:avLst>
-          </a:prstGeom>
-          <a:solidFill>
-            <a:srgbClr val="08264F"/>
-          </a:solidFill>
-          <a:ln w="15875">
-            <a:solidFill>
-              <a:srgbClr val="5EA7D8"/>
-            </a:solidFill>
-          </a:ln>
-        </p:spPr>
-        <p:style>
-          <a:lnRef idx="1">
-            <a:schemeClr val="accent1"/>
-          </a:lnRef>
-          <a:fillRef idx="3">
-            <a:schemeClr val="accent1"/>
-          </a:fillRef>
-          <a:effectRef idx="2">
-            <a:schemeClr val="accent1"/>
-          </a:effectRef>
-          <a:fontRef idx="minor">
-            <a:schemeClr val="lt1"/>
-          </a:fontRef>
-        </p:style>
-        <p:txBody>
-          <a:bodyPr rtlCol="0" anchor="ctr"/>
-          <a:lstStyle/>
-          <a:p>
-            <a:endParaRPr/>
+              <a:t>Semillero QA 2026 · Automatización Web · Clase 1 · 01-fundamentos-java-poo</a:t>
+            </a:r>
           </a:p>
         </p:txBody>
       </p:sp>
       <p:sp>
         <p:nvSpPr>
           <p:cNvPr id="9" name="TextBox 8"/>
-          <p:cNvSpPr txBox="1"/>
-          <p:nvPr/>
-        </p:nvSpPr>
-        <p:spPr>
-          <a:xfrm>
-            <a:off x="3653713" y="2286000"/>
-            <a:ext cx="2007793" cy="548640"/>
-          </a:xfrm>
-          <a:prstGeom prst="rect">
-            <a:avLst/>
-          </a:prstGeom>
-          <a:noFill/>
-        </p:spPr>
-        <p:txBody>
-          <a:bodyPr wrap="square" lIns="0" rIns="0" anchor="t">
-            <a:spAutoFit/>
-          </a:bodyPr>
-          <a:lstStyle/>
-          <a:p>
-            <a:pPr algn="l"/>
-            <a:r>
-              <a:rPr sz="1800" b="1">
-                <a:solidFill>
-                  <a:srgbClr val="FFFFFF"/>
-                </a:solidFill>
-                <a:latin typeface="Century Gothic"/>
-              </a:rPr>
-              <a:t>2. gradle run</a:t>
-            </a:r>
-          </a:p>
-        </p:txBody>
-      </p:sp>
-      <p:sp>
-        <p:nvSpPr>
-          <p:cNvPr id="10" name="TextBox 9"/>
-          <p:cNvSpPr txBox="1"/>
-          <p:nvPr/>
-        </p:nvSpPr>
-        <p:spPr>
-          <a:xfrm>
-            <a:off x="3653713" y="2788920"/>
-            <a:ext cx="2007793" cy="1737360"/>
-          </a:xfrm>
-          <a:prstGeom prst="rect">
-            <a:avLst/>
-          </a:prstGeom>
-          <a:noFill/>
-        </p:spPr>
-        <p:txBody>
-          <a:bodyPr wrap="square" lIns="0" rIns="0" anchor="t">
-            <a:spAutoFit/>
-          </a:bodyPr>
-          <a:lstStyle/>
-          <a:p>
-            <a:pPr algn="l"/>
-            <a:r>
-              <a:rPr sz="1400" b="0">
-                <a:solidFill>
-                  <a:srgbClr val="C9D6E3"/>
-                </a:solidFill>
-                <a:latin typeface="Century Gothic"/>
-              </a:rPr>
-              <a:t>Compila y ejecuta los ejemplos</a:t>
-            </a:r>
-          </a:p>
-        </p:txBody>
-      </p:sp>
-      <p:cxnSp>
-        <p:nvCxnSpPr>
-          <p:cNvPr id="11" name="Connector 10"/>
-          <p:cNvCxnSpPr/>
-          <p:nvPr/>
-        </p:nvCxnSpPr>
-        <p:spPr>
-          <a:xfrm>
-            <a:off x="5935826" y="3383280"/>
-            <a:ext cx="320040" cy="0"/>
-          </a:xfrm>
-          <a:prstGeom prst="line">
-            <a:avLst/>
-          </a:prstGeom>
-          <a:ln w="31750">
-            <a:solidFill>
-              <a:srgbClr val="36B5FF"/>
-            </a:solidFill>
-            <a:tailEnd type="triangle"/>
-          </a:ln>
-        </p:spPr>
-        <p:style>
-          <a:lnRef idx="2">
-            <a:schemeClr val="accent1"/>
-          </a:lnRef>
-          <a:fillRef idx="0">
-            <a:schemeClr val="accent1"/>
-          </a:fillRef>
-          <a:effectRef idx="1">
-            <a:schemeClr val="accent1"/>
-          </a:effectRef>
-          <a:fontRef idx="minor">
-            <a:schemeClr val="tx1"/>
-          </a:fontRef>
-        </p:style>
-      </p:cxnSp>
-      <p:sp>
-        <p:nvSpPr>
-          <p:cNvPr id="12" name="Rounded Rectangle 11"/>
-          <p:cNvSpPr/>
-          <p:nvPr/>
-        </p:nvSpPr>
-        <p:spPr>
-          <a:xfrm>
-            <a:off x="6301586" y="2057400"/>
-            <a:ext cx="2464993" cy="2651760"/>
-          </a:xfrm>
-          <a:prstGeom prst="roundRect">
-            <a:avLst>
-              <a:gd name="adj" fmla="val 6000"/>
-            </a:avLst>
-          </a:prstGeom>
-          <a:solidFill>
-            <a:srgbClr val="0B2C59"/>
-          </a:solidFill>
-          <a:ln w="15875">
-            <a:solidFill>
-              <a:srgbClr val="5EA7D8"/>
-            </a:solidFill>
-          </a:ln>
-        </p:spPr>
-        <p:style>
-          <a:lnRef idx="1">
-            <a:schemeClr val="accent1"/>
-          </a:lnRef>
-          <a:fillRef idx="3">
-            <a:schemeClr val="accent1"/>
-          </a:fillRef>
-          <a:effectRef idx="2">
-            <a:schemeClr val="accent1"/>
-          </a:effectRef>
-          <a:fontRef idx="minor">
-            <a:schemeClr val="lt1"/>
-          </a:fontRef>
-        </p:style>
-        <p:txBody>
-          <a:bodyPr rtlCol="0" anchor="ctr"/>
-          <a:lstStyle/>
-          <a:p>
-            <a:endParaRPr/>
-          </a:p>
-        </p:txBody>
-      </p:sp>
-      <p:sp>
-        <p:nvSpPr>
-          <p:cNvPr id="13" name="TextBox 12"/>
-          <p:cNvSpPr txBox="1"/>
-          <p:nvPr/>
-        </p:nvSpPr>
-        <p:spPr>
-          <a:xfrm>
-            <a:off x="6530186" y="2286000"/>
-            <a:ext cx="2007793" cy="548640"/>
-          </a:xfrm>
-          <a:prstGeom prst="rect">
-            <a:avLst/>
-          </a:prstGeom>
-          <a:noFill/>
-        </p:spPr>
-        <p:txBody>
-          <a:bodyPr wrap="square" lIns="0" rIns="0" anchor="t">
-            <a:spAutoFit/>
-          </a:bodyPr>
-          <a:lstStyle/>
-          <a:p>
-            <a:pPr algn="l"/>
-            <a:r>
-              <a:rPr sz="1800" b="1">
-                <a:solidFill>
-                  <a:srgbClr val="FFFFFF"/>
-                </a:solidFill>
-                <a:latin typeface="Century Gothic"/>
-              </a:rPr>
-              <a:t>3. Lee la consola</a:t>
-            </a:r>
-          </a:p>
-        </p:txBody>
-      </p:sp>
-      <p:sp>
-        <p:nvSpPr>
-          <p:cNvPr id="14" name="TextBox 13"/>
-          <p:cNvSpPr txBox="1"/>
-          <p:nvPr/>
-        </p:nvSpPr>
-        <p:spPr>
-          <a:xfrm>
-            <a:off x="6530186" y="2788920"/>
-            <a:ext cx="2007793" cy="1737360"/>
-          </a:xfrm>
-          <a:prstGeom prst="rect">
-            <a:avLst/>
-          </a:prstGeom>
-          <a:noFill/>
-        </p:spPr>
-        <p:txBody>
-          <a:bodyPr wrap="square" lIns="0" rIns="0" anchor="t">
-            <a:spAutoFit/>
-          </a:bodyPr>
-          <a:lstStyle/>
-          <a:p>
-            <a:pPr algn="l"/>
-            <a:r>
-              <a:rPr sz="1400" b="0">
-                <a:solidFill>
-                  <a:srgbClr val="C9D6E3"/>
-                </a:solidFill>
-                <a:latin typeface="Century Gothic"/>
-              </a:rPr>
-              <a:t>Un título por tema y </a:t>
-            </a:r>
-            <a:r>
-              <a:rPr sz="1400" b="0">
-                <a:solidFill>
-                  <a:srgbClr val="36B5FF"/>
-                </a:solidFill>
-                <a:latin typeface="Consolas"/>
-              </a:rPr>
-              <a:t>BUILD SUCCESSFUL</a:t>
-            </a:r>
-            <a:r>
-              <a:rPr sz="1400" b="0">
-                <a:solidFill>
-                  <a:srgbClr val="C9D6E3"/>
-                </a:solidFill>
-                <a:latin typeface="Century Gothic"/>
-              </a:rPr>
-              <a:t> al final</a:t>
-            </a:r>
-          </a:p>
-        </p:txBody>
-      </p:sp>
-      <p:cxnSp>
-        <p:nvCxnSpPr>
-          <p:cNvPr id="15" name="Connector 14"/>
-          <p:cNvCxnSpPr/>
-          <p:nvPr/>
-        </p:nvCxnSpPr>
-        <p:spPr>
-          <a:xfrm>
-            <a:off x="8812299" y="3383280"/>
-            <a:ext cx="320040" cy="0"/>
-          </a:xfrm>
-          <a:prstGeom prst="line">
-            <a:avLst/>
-          </a:prstGeom>
-          <a:ln w="31750">
-            <a:solidFill>
-              <a:srgbClr val="36B5FF"/>
-            </a:solidFill>
-            <a:tailEnd type="triangle"/>
-          </a:ln>
-        </p:spPr>
-        <p:style>
-          <a:lnRef idx="2">
-            <a:schemeClr val="accent1"/>
-          </a:lnRef>
-          <a:fillRef idx="0">
-            <a:schemeClr val="accent1"/>
-          </a:fillRef>
-          <a:effectRef idx="1">
-            <a:schemeClr val="accent1"/>
-          </a:effectRef>
-          <a:fontRef idx="minor">
-            <a:schemeClr val="tx1"/>
-          </a:fontRef>
-        </p:style>
-      </p:cxnSp>
-      <p:sp>
-        <p:nvSpPr>
-          <p:cNvPr id="16" name="Rounded Rectangle 15"/>
-          <p:cNvSpPr/>
-          <p:nvPr/>
-        </p:nvSpPr>
-        <p:spPr>
-          <a:xfrm>
-            <a:off x="9178059" y="2057400"/>
-            <a:ext cx="2464993" cy="2651760"/>
-          </a:xfrm>
-          <a:prstGeom prst="roundRect">
-            <a:avLst>
-              <a:gd name="adj" fmla="val 6000"/>
-            </a:avLst>
-          </a:prstGeom>
-          <a:solidFill>
-            <a:srgbClr val="08264F"/>
-          </a:solidFill>
-          <a:ln w="15875">
-            <a:solidFill>
-              <a:srgbClr val="5EA7D8"/>
-            </a:solidFill>
-          </a:ln>
-        </p:spPr>
-        <p:style>
-          <a:lnRef idx="1">
-            <a:schemeClr val="accent1"/>
-          </a:lnRef>
-          <a:fillRef idx="3">
-            <a:schemeClr val="accent1"/>
-          </a:fillRef>
-          <a:effectRef idx="2">
-            <a:schemeClr val="accent1"/>
-          </a:effectRef>
-          <a:fontRef idx="minor">
-            <a:schemeClr val="lt1"/>
-          </a:fontRef>
-        </p:style>
-        <p:txBody>
-          <a:bodyPr rtlCol="0" anchor="ctr"/>
-          <a:lstStyle/>
-          <a:p>
-            <a:endParaRPr/>
-          </a:p>
-        </p:txBody>
-      </p:sp>
-      <p:sp>
-        <p:nvSpPr>
-          <p:cNvPr id="17" name="TextBox 16"/>
-          <p:cNvSpPr txBox="1"/>
-          <p:nvPr/>
-        </p:nvSpPr>
-        <p:spPr>
-          <a:xfrm>
-            <a:off x="9406659" y="2286000"/>
-            <a:ext cx="2007793" cy="548640"/>
-          </a:xfrm>
-          <a:prstGeom prst="rect">
-            <a:avLst/>
-          </a:prstGeom>
-          <a:noFill/>
-        </p:spPr>
-        <p:txBody>
-          <a:bodyPr wrap="square" lIns="0" rIns="0" anchor="t">
-            <a:spAutoFit/>
-          </a:bodyPr>
-          <a:lstStyle/>
-          <a:p>
-            <a:pPr algn="l"/>
-            <a:r>
-              <a:rPr sz="1800" b="1">
-                <a:solidFill>
-                  <a:srgbClr val="FFFFFF"/>
-                </a:solidFill>
-                <a:latin typeface="Century Gothic"/>
-              </a:rPr>
-              <a:t>4. Si falla</a:t>
-            </a:r>
-          </a:p>
-        </p:txBody>
-      </p:sp>
-      <p:sp>
-        <p:nvSpPr>
-          <p:cNvPr id="18" name="TextBox 17"/>
-          <p:cNvSpPr txBox="1"/>
-          <p:nvPr/>
-        </p:nvSpPr>
-        <p:spPr>
-          <a:xfrm>
-            <a:off x="9406659" y="2788920"/>
-            <a:ext cx="2007793" cy="1737360"/>
-          </a:xfrm>
-          <a:prstGeom prst="rect">
-            <a:avLst/>
-          </a:prstGeom>
-          <a:noFill/>
-        </p:spPr>
-        <p:txBody>
-          <a:bodyPr wrap="square" lIns="0" rIns="0" anchor="t">
-            <a:spAutoFit/>
-          </a:bodyPr>
-          <a:lstStyle/>
-          <a:p>
-            <a:pPr algn="l"/>
-            <a:r>
-              <a:rPr sz="1400" b="0">
-                <a:solidFill>
-                  <a:srgbClr val="C9D6E3"/>
-                </a:solidFill>
-                <a:latin typeface="Century Gothic"/>
-              </a:rPr>
-              <a:t>Busca archivo, línea y mensaje: </a:t>
-            </a:r>
-            <a:r>
-              <a:rPr sz="1400" b="0">
-                <a:solidFill>
-                  <a:srgbClr val="36B5FF"/>
-                </a:solidFill>
-                <a:latin typeface="Consolas"/>
-              </a:rPr>
-              <a:t>Variables.java:9: error: ';' expected</a:t>
-            </a:r>
-          </a:p>
-        </p:txBody>
-      </p:sp>
-      <p:sp>
-        <p:nvSpPr>
-          <p:cNvPr id="19" name="TextBox 18"/>
-          <p:cNvSpPr txBox="1"/>
-          <p:nvPr/>
-        </p:nvSpPr>
-        <p:spPr>
-          <a:xfrm>
-            <a:off x="548640" y="5029200"/>
-            <a:ext cx="11094415" cy="1097280"/>
-          </a:xfrm>
-          <a:prstGeom prst="rect">
-            <a:avLst/>
-          </a:prstGeom>
-          <a:noFill/>
-        </p:spPr>
-        <p:txBody>
-          <a:bodyPr wrap="square" lIns="0" rIns="0" anchor="t">
-            <a:spAutoFit/>
-          </a:bodyPr>
-          <a:lstStyle/>
-          <a:p>
-            <a:pPr algn="l"/>
-            <a:r>
-              <a:rPr sz="1600" b="0">
-                <a:solidFill>
-                  <a:srgbClr val="C9D6E3"/>
-                </a:solidFill>
-                <a:latin typeface="Century Gothic"/>
-              </a:rPr>
-              <a:t>Otro error que vas a ver: </a:t>
-            </a:r>
-            <a:r>
-              <a:rPr sz="1600" b="0">
-                <a:solidFill>
-                  <a:srgbClr val="36B5FF"/>
-                </a:solidFill>
-                <a:latin typeface="Consolas"/>
-              </a:rPr>
-              <a:t>saldo has private access in CuentaBancaria</a:t>
-            </a:r>
-            <a:r>
-              <a:rPr sz="1600" b="0">
-                <a:solidFill>
-                  <a:srgbClr val="C9D6E3"/>
-                </a:solidFill>
-                <a:latin typeface="Century Gothic"/>
-              </a:rPr>
-              <a:t>. Es el encapsulamiento protegiendo el dato.</a:t>
-            </a:r>
-          </a:p>
-        </p:txBody>
-      </p:sp>
-      <p:sp>
-        <p:nvSpPr>
-          <p:cNvPr id="20" name="TextBox 19"/>
-          <p:cNvSpPr txBox="1"/>
-          <p:nvPr/>
-        </p:nvSpPr>
-        <p:spPr>
-          <a:xfrm>
-            <a:off x="548640" y="6400800"/>
-            <a:ext cx="8229600" cy="274320"/>
-          </a:xfrm>
-          <a:prstGeom prst="rect">
-            <a:avLst/>
-          </a:prstGeom>
-          <a:noFill/>
-        </p:spPr>
-        <p:txBody>
-          <a:bodyPr wrap="square" lIns="0" rIns="0" anchor="t">
-            <a:spAutoFit/>
-          </a:bodyPr>
-          <a:lstStyle/>
-          <a:p>
-            <a:pPr algn="l"/>
-            <a:r>
-              <a:rPr sz="1200" b="0">
-                <a:solidFill>
-                  <a:srgbClr val="C9D6E3"/>
-                </a:solidFill>
-                <a:latin typeface="Century Gothic"/>
-              </a:rPr>
-              <a:t>Semillero QA 2026 · Automatización Web · Clase 1 · 01-fundamentos-java-poo</a:t>
-            </a:r>
-          </a:p>
-        </p:txBody>
-      </p:sp>
-      <p:sp>
-        <p:nvSpPr>
-          <p:cNvPr id="21" name="TextBox 20"/>
           <p:cNvSpPr txBox="1"/>
           <p:nvPr/>
         </p:nvSpPr>
